--- a/houmon-nyuyoku-slides.pptx
+++ b/houmon-nyuyoku-slides.pptx
@@ -3642,153 +3642,765 @@
       </p:sp>
       <p:sp>
         <p:nvSpPr>
-          <p:cNvPr id="6" name="Shape 4"/>
+          <p:cNvPr id="6" name="Rounded Rectangle 5"/>
           <p:cNvSpPr/>
           <p:nvPr/>
         </p:nvSpPr>
         <p:spPr>
           <a:xfrm>
-            <a:off x="566928" y="1700784"/>
-            <a:ext cx="2286000" cy="1481328"/>
+            <a:off x="566928" y="1645920"/>
+            <a:ext cx="2377440" cy="1554480"/>
           </a:xfrm>
           <a:prstGeom prst="roundRect">
             <a:avLst>
-              <a:gd name="adj" fmla="val 4321"/>
+              <a:gd name="adj" fmla="val 5882"/>
             </a:avLst>
           </a:prstGeom>
           <a:solidFill>
             <a:srgbClr val="1D9E75"/>
           </a:solidFill>
-          <a:ln w="12700">
-            <a:solidFill>
-              <a:srgbClr val="1D9E75"/>
-            </a:solidFill>
-            <a:prstDash val="solid"/>
+          <a:ln>
+            <a:noFill/>
           </a:ln>
-        </p:spPr>
-        <p:txBody>
-          <a:bodyPr/>
-          <a:lstStyle/>
-          <a:p>
-            <a:endParaRPr lang="ja-JP" altLang="en-US"/>
-          </a:p>
-        </p:txBody>
-      </p:sp>
-      <p:sp>
-        <p:nvSpPr>
-          <p:cNvPr id="7" name="Text 5"/>
+          <a:effectLst/>
+        </p:spPr>
+        <p:style>
+          <a:lnRef idx="1">
+            <a:schemeClr val="accent1"/>
+          </a:lnRef>
+          <a:fillRef idx="3">
+            <a:schemeClr val="accent1"/>
+          </a:fillRef>
+          <a:effectRef idx="2">
+            <a:schemeClr val="accent1"/>
+          </a:effectRef>
+          <a:fontRef idx="minor">
+            <a:schemeClr val="lt1"/>
+          </a:fontRef>
+        </p:style>
+        <p:txBody>
+          <a:bodyPr rtlCol="0" anchor="ctr"/>
+          <a:lstStyle/>
+          <a:p>
+            <a:pPr algn="ctr"/>
+          </a:p>
+        </p:txBody>
+      </p:sp>
+      <p:sp>
+        <p:nvSpPr>
+          <p:cNvPr id="7" name="TextBox 6"/>
           <p:cNvSpPr txBox="1"/>
           <p:nvPr/>
         </p:nvSpPr>
         <p:spPr>
           <a:xfrm>
-            <a:off x="658368" y="1700784"/>
-            <a:ext cx="2103120" cy="1481328"/>
+            <a:off x="658368" y="1645920"/>
+            <a:ext cx="2194560" cy="1554480"/>
           </a:xfrm>
           <a:prstGeom prst="rect">
             <a:avLst/>
           </a:prstGeom>
           <a:noFill/>
-          <a:ln/>
-        </p:spPr>
-        <p:txBody>
-          <a:bodyPr wrap="square" lIns="0" tIns="0" rIns="0" bIns="0" rtlCol="0" anchor="ctr"/>
-          <a:lstStyle/>
-          <a:p>
-            <a:pPr marL="0" indent="0" algn="ctr">
-              <a:lnSpc>
-                <a:spcPct val="130000"/>
-              </a:lnSpc>
-              <a:buNone/>
+        </p:spPr>
+        <p:txBody>
+          <a:bodyPr wrap="square" anchor="ctr" lIns="0" rIns="0" tIns="0" bIns="0">
+            <a:spAutoFit/>
+          </a:bodyPr>
+          <a:lstStyle/>
+          <a:p>
+            <a:pPr algn="ctr"/>
+            <a:r>
+              <a:rPr sz="1500" b="1">
+                <a:solidFill>
+                  <a:srgbClr val="FFFFFF"/>
+                </a:solidFill>
+                <a:latin typeface="Meiryo"/>
+              </a:rPr>
+              <a:t>訪問入浴介護</a:t>
+            </a:r>
+          </a:p>
+          <a:p>
+            <a:pPr algn="ctr">
+              <a:spcBef>
+                <a:spcPts val="600"/>
+              </a:spcBef>
             </a:pPr>
             <a:r>
-              <a:rPr lang="en-US" sz="1600" b="1" dirty="0">
+              <a:rPr sz="1050" b="0">
                 <a:solidFill>
                   <a:srgbClr val="FFFFFF"/>
                 </a:solidFill>
-                <a:latin typeface="Meiryo" pitchFamily="34" charset="0"/>
-                <a:ea typeface="Meiryo" pitchFamily="34" charset="-122"/>
-                <a:cs typeface="Meiryo" pitchFamily="34" charset="-120"/>
-              </a:rPr>
-              <a:t>訪問入浴介護</a:t>
-            </a:r>
-            <a:endParaRPr lang="en-US" sz="1600" dirty="0"/>
-          </a:p>
-          <a:p>
-            <a:pPr marL="0" indent="0" algn="ctr">
-              <a:lnSpc>
-                <a:spcPct val="130000"/>
-              </a:lnSpc>
-              <a:buNone/>
-            </a:pPr>
-            <a:r>
-              <a:rPr lang="en-US" sz="1050" dirty="0">
-                <a:solidFill>
-                  <a:srgbClr val="D6F3E6"/>
-                </a:solidFill>
-                <a:latin typeface="Meiryo" pitchFamily="34" charset="0"/>
-                <a:ea typeface="Meiryo" pitchFamily="34" charset="-122"/>
-                <a:cs typeface="Meiryo" pitchFamily="34" charset="-120"/>
+                <a:latin typeface="Meiryo"/>
               </a:rPr>
               <a:t>看護師1名＋介護2名</a:t>
             </a:r>
-            <a:endParaRPr lang="en-US" sz="1600" dirty="0"/>
-          </a:p>
-        </p:txBody>
-      </p:sp>
-      <p:sp>
-        <p:nvSpPr>
-          <p:cNvPr id="8" name="Text 6"/>
+          </a:p>
+        </p:txBody>
+      </p:sp>
+      <p:sp>
+        <p:nvSpPr>
+          <p:cNvPr id="8" name="Rounded Rectangle 7"/>
+          <p:cNvSpPr/>
+          <p:nvPr/>
+        </p:nvSpPr>
+        <p:spPr>
+          <a:xfrm>
+            <a:off x="3566160" y="1645920"/>
+            <a:ext cx="3931920" cy="713232"/>
+          </a:xfrm>
+          <a:prstGeom prst="roundRect">
+            <a:avLst>
+              <a:gd name="adj" fmla="val 12820"/>
+            </a:avLst>
+          </a:prstGeom>
+          <a:solidFill>
+            <a:srgbClr val="F4F8FA"/>
+          </a:solidFill>
+          <a:ln>
+            <a:noFill/>
+          </a:ln>
+          <a:effectLst/>
+        </p:spPr>
+        <p:style>
+          <a:lnRef idx="1">
+            <a:schemeClr val="accent1"/>
+          </a:lnRef>
+          <a:fillRef idx="3">
+            <a:schemeClr val="accent1"/>
+          </a:fillRef>
+          <a:effectRef idx="2">
+            <a:schemeClr val="accent1"/>
+          </a:effectRef>
+          <a:fontRef idx="minor">
+            <a:schemeClr val="lt1"/>
+          </a:fontRef>
+        </p:style>
+        <p:txBody>
+          <a:bodyPr rtlCol="0" anchor="ctr"/>
+          <a:lstStyle/>
+          <a:p>
+            <a:pPr algn="ctr"/>
+          </a:p>
+        </p:txBody>
+      </p:sp>
+      <p:sp>
+        <p:nvSpPr>
+          <p:cNvPr id="9" name="TextBox 8"/>
           <p:cNvSpPr txBox="1"/>
           <p:nvPr/>
         </p:nvSpPr>
         <p:spPr>
           <a:xfrm>
-            <a:off x="2907792" y="1700784"/>
-            <a:ext cx="384048" cy="1481328"/>
+            <a:off x="3767328" y="1645920"/>
+            <a:ext cx="2103120" cy="713232"/>
           </a:xfrm>
           <a:prstGeom prst="rect">
             <a:avLst/>
           </a:prstGeom>
           <a:noFill/>
-          <a:ln/>
-        </p:spPr>
-        <p:txBody>
-          <a:bodyPr wrap="square" lIns="0" tIns="0" rIns="0" bIns="0" rtlCol="0" anchor="ctr"/>
-          <a:lstStyle/>
-          <a:p>
-            <a:pPr marL="0" indent="0" algn="ctr">
-              <a:buNone/>
-            </a:pPr>
-            <a:r>
-              <a:rPr lang="en-US" sz="2200" b="1" dirty="0">
+        </p:spPr>
+        <p:txBody>
+          <a:bodyPr wrap="square" anchor="ctr" lIns="0" rIns="0" tIns="0" bIns="0">
+            <a:spAutoFit/>
+          </a:bodyPr>
+          <a:lstStyle/>
+          <a:p>
+            <a:pPr algn="l"/>
+            <a:r>
+              <a:rPr sz="1350" b="1">
+                <a:solidFill>
+                  <a:srgbClr val="1A5276"/>
+                </a:solidFill>
+                <a:latin typeface="Meiryo"/>
+              </a:rPr>
+              <a:t>主治医・在宅医</a:t>
+            </a:r>
+          </a:p>
+        </p:txBody>
+      </p:sp>
+      <p:sp>
+        <p:nvSpPr>
+          <p:cNvPr id="10" name="TextBox 9"/>
+          <p:cNvSpPr txBox="1"/>
+          <p:nvPr/>
+        </p:nvSpPr>
+        <p:spPr>
+          <a:xfrm>
+            <a:off x="5806440" y="1645920"/>
+            <a:ext cx="1554480" cy="713232"/>
+          </a:xfrm>
+          <a:prstGeom prst="rect">
+            <a:avLst/>
+          </a:prstGeom>
+          <a:noFill/>
+        </p:spPr>
+        <p:txBody>
+          <a:bodyPr wrap="square" anchor="ctr" lIns="0" rIns="0" tIns="0" bIns="0">
+            <a:spAutoFit/>
+          </a:bodyPr>
+          <a:lstStyle/>
+          <a:p>
+            <a:pPr algn="r"/>
+            <a:r>
+              <a:rPr sz="1050" b="0">
+                <a:solidFill>
+                  <a:srgbClr val="566573"/>
+                </a:solidFill>
+                <a:latin typeface="Meiryo"/>
+              </a:rPr>
+              <a:t>創部・全身状態の報告</a:t>
+            </a:r>
+          </a:p>
+        </p:txBody>
+      </p:sp>
+      <p:sp>
+        <p:nvSpPr>
+          <p:cNvPr id="11" name="TextBox 10"/>
+          <p:cNvSpPr txBox="1"/>
+          <p:nvPr/>
+        </p:nvSpPr>
+        <p:spPr>
+          <a:xfrm>
+            <a:off x="3090672" y="1645920"/>
+            <a:ext cx="402336" cy="713232"/>
+          </a:xfrm>
+          <a:prstGeom prst="rect">
+            <a:avLst/>
+          </a:prstGeom>
+          <a:noFill/>
+        </p:spPr>
+        <p:txBody>
+          <a:bodyPr wrap="square" anchor="ctr" lIns="0" rIns="0" tIns="0" bIns="0">
+            <a:spAutoFit/>
+          </a:bodyPr>
+          <a:lstStyle/>
+          <a:p>
+            <a:pPr algn="ctr"/>
+            <a:r>
+              <a:rPr sz="1700" b="1">
                 <a:solidFill>
                   <a:srgbClr val="1D9E75"/>
                 </a:solidFill>
-                <a:latin typeface="Meiryo" pitchFamily="34" charset="0"/>
-                <a:ea typeface="Meiryo" pitchFamily="34" charset="-122"/>
-                <a:cs typeface="Meiryo" pitchFamily="34" charset="-120"/>
+                <a:latin typeface="Meiryo"/>
               </a:rPr>
               <a:t>⇄</a:t>
             </a:r>
-            <a:endParaRPr lang="en-US" sz="2200" dirty="0"/>
-          </a:p>
-        </p:txBody>
-      </p:sp>
-      <p:sp>
-        <p:nvSpPr>
-          <p:cNvPr id="9" name="Shape 7"/>
+          </a:p>
+        </p:txBody>
+      </p:sp>
+      <p:sp>
+        <p:nvSpPr>
+          <p:cNvPr id="12" name="Rounded Rectangle 11"/>
           <p:cNvSpPr/>
           <p:nvPr/>
         </p:nvSpPr>
         <p:spPr>
           <a:xfrm>
-            <a:off x="3364992" y="1700784"/>
-            <a:ext cx="4029304" cy="676656"/>
+            <a:off x="7680960" y="1645920"/>
+            <a:ext cx="3931920" cy="713232"/>
           </a:xfrm>
           <a:prstGeom prst="roundRect">
             <a:avLst>
-              <a:gd name="adj" fmla="val 6757"/>
+              <a:gd name="adj" fmla="val 12820"/>
+            </a:avLst>
+          </a:prstGeom>
+          <a:solidFill>
+            <a:srgbClr val="F4F8FA"/>
+          </a:solidFill>
+          <a:ln>
+            <a:noFill/>
+          </a:ln>
+          <a:effectLst/>
+        </p:spPr>
+        <p:style>
+          <a:lnRef idx="1">
+            <a:schemeClr val="accent1"/>
+          </a:lnRef>
+          <a:fillRef idx="3">
+            <a:schemeClr val="accent1"/>
+          </a:fillRef>
+          <a:effectRef idx="2">
+            <a:schemeClr val="accent1"/>
+          </a:effectRef>
+          <a:fontRef idx="minor">
+            <a:schemeClr val="lt1"/>
+          </a:fontRef>
+        </p:style>
+        <p:txBody>
+          <a:bodyPr rtlCol="0" anchor="ctr"/>
+          <a:lstStyle/>
+          <a:p>
+            <a:pPr algn="ctr"/>
+          </a:p>
+        </p:txBody>
+      </p:sp>
+      <p:sp>
+        <p:nvSpPr>
+          <p:cNvPr id="13" name="TextBox 12"/>
+          <p:cNvSpPr txBox="1"/>
+          <p:nvPr/>
+        </p:nvSpPr>
+        <p:spPr>
+          <a:xfrm>
+            <a:off x="7882128" y="1645920"/>
+            <a:ext cx="2103120" cy="713232"/>
+          </a:xfrm>
+          <a:prstGeom prst="rect">
+            <a:avLst/>
+          </a:prstGeom>
+          <a:noFill/>
+        </p:spPr>
+        <p:txBody>
+          <a:bodyPr wrap="square" anchor="ctr" lIns="0" rIns="0" tIns="0" bIns="0">
+            <a:spAutoFit/>
+          </a:bodyPr>
+          <a:lstStyle/>
+          <a:p>
+            <a:pPr algn="l"/>
+            <a:r>
+              <a:rPr sz="1350" b="1">
+                <a:solidFill>
+                  <a:srgbClr val="1A5276"/>
+                </a:solidFill>
+                <a:latin typeface="Meiryo"/>
+              </a:rPr>
+              <a:t>訪問看護ステーション</a:t>
+            </a:r>
+          </a:p>
+        </p:txBody>
+      </p:sp>
+      <p:sp>
+        <p:nvSpPr>
+          <p:cNvPr id="14" name="TextBox 13"/>
+          <p:cNvSpPr txBox="1"/>
+          <p:nvPr/>
+        </p:nvSpPr>
+        <p:spPr>
+          <a:xfrm>
+            <a:off x="9921240" y="1645920"/>
+            <a:ext cx="1554480" cy="713232"/>
+          </a:xfrm>
+          <a:prstGeom prst="rect">
+            <a:avLst/>
+          </a:prstGeom>
+          <a:noFill/>
+        </p:spPr>
+        <p:txBody>
+          <a:bodyPr wrap="square" anchor="ctr" lIns="0" rIns="0" tIns="0" bIns="0">
+            <a:spAutoFit/>
+          </a:bodyPr>
+          <a:lstStyle/>
+          <a:p>
+            <a:pPr algn="r"/>
+            <a:r>
+              <a:rPr sz="1050" b="0">
+                <a:solidFill>
+                  <a:srgbClr val="566573"/>
+                </a:solidFill>
+                <a:latin typeface="Meiryo"/>
+              </a:rPr>
+              <a:t>観察所見の共有</a:t>
+            </a:r>
+          </a:p>
+        </p:txBody>
+      </p:sp>
+      <p:sp>
+        <p:nvSpPr>
+          <p:cNvPr id="15" name="Rounded Rectangle 14"/>
+          <p:cNvSpPr/>
+          <p:nvPr/>
+        </p:nvSpPr>
+        <p:spPr>
+          <a:xfrm>
+            <a:off x="3566160" y="2487168"/>
+            <a:ext cx="3931920" cy="713232"/>
+          </a:xfrm>
+          <a:prstGeom prst="roundRect">
+            <a:avLst>
+              <a:gd name="adj" fmla="val 12820"/>
+            </a:avLst>
+          </a:prstGeom>
+          <a:solidFill>
+            <a:srgbClr val="F4F8FA"/>
+          </a:solidFill>
+          <a:ln>
+            <a:noFill/>
+          </a:ln>
+          <a:effectLst/>
+        </p:spPr>
+        <p:style>
+          <a:lnRef idx="1">
+            <a:schemeClr val="accent1"/>
+          </a:lnRef>
+          <a:fillRef idx="3">
+            <a:schemeClr val="accent1"/>
+          </a:fillRef>
+          <a:effectRef idx="2">
+            <a:schemeClr val="accent1"/>
+          </a:effectRef>
+          <a:fontRef idx="minor">
+            <a:schemeClr val="lt1"/>
+          </a:fontRef>
+        </p:style>
+        <p:txBody>
+          <a:bodyPr rtlCol="0" anchor="ctr"/>
+          <a:lstStyle/>
+          <a:p>
+            <a:pPr algn="ctr"/>
+          </a:p>
+        </p:txBody>
+      </p:sp>
+      <p:sp>
+        <p:nvSpPr>
+          <p:cNvPr id="16" name="TextBox 15"/>
+          <p:cNvSpPr txBox="1"/>
+          <p:nvPr/>
+        </p:nvSpPr>
+        <p:spPr>
+          <a:xfrm>
+            <a:off x="3767328" y="2487168"/>
+            <a:ext cx="2103120" cy="713232"/>
+          </a:xfrm>
+          <a:prstGeom prst="rect">
+            <a:avLst/>
+          </a:prstGeom>
+          <a:noFill/>
+        </p:spPr>
+        <p:txBody>
+          <a:bodyPr wrap="square" anchor="ctr" lIns="0" rIns="0" tIns="0" bIns="0">
+            <a:spAutoFit/>
+          </a:bodyPr>
+          <a:lstStyle/>
+          <a:p>
+            <a:pPr algn="l"/>
+            <a:r>
+              <a:rPr sz="1350" b="1">
+                <a:solidFill>
+                  <a:srgbClr val="1A5276"/>
+                </a:solidFill>
+                <a:latin typeface="Meiryo"/>
+              </a:rPr>
+              <a:t>ケアマネジャー</a:t>
+            </a:r>
+          </a:p>
+        </p:txBody>
+      </p:sp>
+      <p:sp>
+        <p:nvSpPr>
+          <p:cNvPr id="17" name="TextBox 16"/>
+          <p:cNvSpPr txBox="1"/>
+          <p:nvPr/>
+        </p:nvSpPr>
+        <p:spPr>
+          <a:xfrm>
+            <a:off x="5806440" y="2487168"/>
+            <a:ext cx="1554480" cy="713232"/>
+          </a:xfrm>
+          <a:prstGeom prst="rect">
+            <a:avLst/>
+          </a:prstGeom>
+          <a:noFill/>
+        </p:spPr>
+        <p:txBody>
+          <a:bodyPr wrap="square" anchor="ctr" lIns="0" rIns="0" tIns="0" bIns="0">
+            <a:spAutoFit/>
+          </a:bodyPr>
+          <a:lstStyle/>
+          <a:p>
+            <a:pPr algn="r"/>
+            <a:r>
+              <a:rPr sz="1050" b="0">
+                <a:solidFill>
+                  <a:srgbClr val="566573"/>
+                </a:solidFill>
+                <a:latin typeface="Meiryo"/>
+              </a:rPr>
+              <a:t>状態変化の報告</a:t>
+            </a:r>
+          </a:p>
+        </p:txBody>
+      </p:sp>
+      <p:sp>
+        <p:nvSpPr>
+          <p:cNvPr id="18" name="TextBox 17"/>
+          <p:cNvSpPr txBox="1"/>
+          <p:nvPr/>
+        </p:nvSpPr>
+        <p:spPr>
+          <a:xfrm>
+            <a:off x="3090672" y="2487168"/>
+            <a:ext cx="402336" cy="713232"/>
+          </a:xfrm>
+          <a:prstGeom prst="rect">
+            <a:avLst/>
+          </a:prstGeom>
+          <a:noFill/>
+        </p:spPr>
+        <p:txBody>
+          <a:bodyPr wrap="square" anchor="ctr" lIns="0" rIns="0" tIns="0" bIns="0">
+            <a:spAutoFit/>
+          </a:bodyPr>
+          <a:lstStyle/>
+          <a:p>
+            <a:pPr algn="ctr"/>
+            <a:r>
+              <a:rPr sz="1700" b="1">
+                <a:solidFill>
+                  <a:srgbClr val="1D9E75"/>
+                </a:solidFill>
+                <a:latin typeface="Meiryo"/>
+              </a:rPr>
+              <a:t>⇄</a:t>
+            </a:r>
+          </a:p>
+        </p:txBody>
+      </p:sp>
+      <p:sp>
+        <p:nvSpPr>
+          <p:cNvPr id="19" name="Rounded Rectangle 18"/>
+          <p:cNvSpPr/>
+          <p:nvPr/>
+        </p:nvSpPr>
+        <p:spPr>
+          <a:xfrm>
+            <a:off x="7680960" y="2487168"/>
+            <a:ext cx="3931920" cy="713232"/>
+          </a:xfrm>
+          <a:prstGeom prst="roundRect">
+            <a:avLst>
+              <a:gd name="adj" fmla="val 12820"/>
+            </a:avLst>
+          </a:prstGeom>
+          <a:solidFill>
+            <a:srgbClr val="F4F8FA"/>
+          </a:solidFill>
+          <a:ln>
+            <a:noFill/>
+          </a:ln>
+          <a:effectLst/>
+        </p:spPr>
+        <p:style>
+          <a:lnRef idx="1">
+            <a:schemeClr val="accent1"/>
+          </a:lnRef>
+          <a:fillRef idx="3">
+            <a:schemeClr val="accent1"/>
+          </a:fillRef>
+          <a:effectRef idx="2">
+            <a:schemeClr val="accent1"/>
+          </a:effectRef>
+          <a:fontRef idx="minor">
+            <a:schemeClr val="lt1"/>
+          </a:fontRef>
+        </p:style>
+        <p:txBody>
+          <a:bodyPr rtlCol="0" anchor="ctr"/>
+          <a:lstStyle/>
+          <a:p>
+            <a:pPr algn="ctr"/>
+          </a:p>
+        </p:txBody>
+      </p:sp>
+      <p:sp>
+        <p:nvSpPr>
+          <p:cNvPr id="20" name="TextBox 19"/>
+          <p:cNvSpPr txBox="1"/>
+          <p:nvPr/>
+        </p:nvSpPr>
+        <p:spPr>
+          <a:xfrm>
+            <a:off x="7882128" y="2487168"/>
+            <a:ext cx="2103120" cy="713232"/>
+          </a:xfrm>
+          <a:prstGeom prst="rect">
+            <a:avLst/>
+          </a:prstGeom>
+          <a:noFill/>
+        </p:spPr>
+        <p:txBody>
+          <a:bodyPr wrap="square" anchor="ctr" lIns="0" rIns="0" tIns="0" bIns="0">
+            <a:spAutoFit/>
+          </a:bodyPr>
+          <a:lstStyle/>
+          <a:p>
+            <a:pPr algn="l"/>
+            <a:r>
+              <a:rPr sz="1350" b="1">
+                <a:solidFill>
+                  <a:srgbClr val="1A5276"/>
+                </a:solidFill>
+                <a:latin typeface="Meiryo"/>
+              </a:rPr>
+              <a:t>デイサービス・訪問介護</a:t>
+            </a:r>
+          </a:p>
+        </p:txBody>
+      </p:sp>
+      <p:sp>
+        <p:nvSpPr>
+          <p:cNvPr id="21" name="TextBox 20"/>
+          <p:cNvSpPr txBox="1"/>
+          <p:nvPr/>
+        </p:nvSpPr>
+        <p:spPr>
+          <a:xfrm>
+            <a:off x="9921240" y="2487168"/>
+            <a:ext cx="1554480" cy="713232"/>
+          </a:xfrm>
+          <a:prstGeom prst="rect">
+            <a:avLst/>
+          </a:prstGeom>
+          <a:noFill/>
+        </p:spPr>
+        <p:txBody>
+          <a:bodyPr wrap="square" anchor="ctr" lIns="0" rIns="0" tIns="0" bIns="0">
+            <a:spAutoFit/>
+          </a:bodyPr>
+          <a:lstStyle/>
+          <a:p>
+            <a:pPr algn="r"/>
+            <a:r>
+              <a:rPr sz="1050" b="0">
+                <a:solidFill>
+                  <a:srgbClr val="566573"/>
+                </a:solidFill>
+                <a:latin typeface="Meiryo"/>
+              </a:rPr>
+              <a:t>入浴日の分担</a:t>
+            </a:r>
+          </a:p>
+        </p:txBody>
+      </p:sp>
+      <p:sp>
+        <p:nvSpPr>
+          <p:cNvPr id="22" name="TextBox 21"/>
+          <p:cNvSpPr txBox="1"/>
+          <p:nvPr/>
+        </p:nvSpPr>
+        <p:spPr>
+          <a:xfrm>
+            <a:off x="566928" y="3529584"/>
+            <a:ext cx="11045952" cy="310896"/>
+          </a:xfrm>
+          <a:prstGeom prst="rect">
+            <a:avLst/>
+          </a:prstGeom>
+          <a:noFill/>
+        </p:spPr>
+        <p:txBody>
+          <a:bodyPr wrap="square" anchor="t" lIns="0" rIns="0" tIns="0" bIns="0">
+            <a:spAutoFit/>
+          </a:bodyPr>
+          <a:lstStyle/>
+          <a:p>
+            <a:pPr algn="l"/>
+            <a:r>
+              <a:rPr sz="1400" b="1">
+                <a:solidFill>
+                  <a:srgbClr val="1A5276"/>
+                </a:solidFill>
+                <a:latin typeface="Meiryo"/>
+              </a:rPr>
+              <a:t>デイサービスとは「競合」ではなく、引き継ぎと併用です</a:t>
+            </a:r>
+          </a:p>
+        </p:txBody>
+      </p:sp>
+      <p:sp>
+        <p:nvSpPr>
+          <p:cNvPr id="23" name="Rounded Rectangle 22"/>
+          <p:cNvSpPr/>
+          <p:nvPr/>
+        </p:nvSpPr>
+        <p:spPr>
+          <a:xfrm>
+            <a:off x="4846320" y="4078224"/>
+            <a:ext cx="1298448" cy="1408176"/>
+          </a:xfrm>
+          <a:prstGeom prst="roundRect">
+            <a:avLst>
+              <a:gd name="adj" fmla="val 7042"/>
+            </a:avLst>
+          </a:prstGeom>
+          <a:solidFill>
+            <a:srgbClr val="D6F3E6"/>
+          </a:solidFill>
+          <a:ln>
+            <a:noFill/>
+          </a:ln>
+          <a:effectLst/>
+        </p:spPr>
+        <p:style>
+          <a:lnRef idx="1">
+            <a:schemeClr val="accent1"/>
+          </a:lnRef>
+          <a:fillRef idx="3">
+            <a:schemeClr val="accent1"/>
+          </a:fillRef>
+          <a:effectRef idx="2">
+            <a:schemeClr val="accent1"/>
+          </a:effectRef>
+          <a:fontRef idx="minor">
+            <a:schemeClr val="lt1"/>
+          </a:fontRef>
+        </p:style>
+        <p:txBody>
+          <a:bodyPr rtlCol="0" anchor="ctr"/>
+          <a:lstStyle/>
+          <a:p>
+            <a:pPr algn="ctr"/>
+          </a:p>
+        </p:txBody>
+      </p:sp>
+      <p:sp>
+        <p:nvSpPr>
+          <p:cNvPr id="24" name="TextBox 23"/>
+          <p:cNvSpPr txBox="1"/>
+          <p:nvPr/>
+        </p:nvSpPr>
+        <p:spPr>
+          <a:xfrm>
+            <a:off x="4846320" y="3803904"/>
+            <a:ext cx="1298448" cy="256032"/>
+          </a:xfrm>
+          <a:prstGeom prst="rect">
+            <a:avLst/>
+          </a:prstGeom>
+          <a:noFill/>
+        </p:spPr>
+        <p:txBody>
+          <a:bodyPr wrap="square" anchor="t" lIns="0" rIns="0" tIns="0" bIns="0">
+            <a:spAutoFit/>
+          </a:bodyPr>
+          <a:lstStyle/>
+          <a:p>
+            <a:pPr algn="ctr"/>
+            <a:r>
+              <a:rPr sz="1050" b="1">
+                <a:solidFill>
+                  <a:srgbClr val="1D9E75"/>
+                </a:solidFill>
+                <a:latin typeface="Meiryo"/>
+              </a:rPr>
+              <a:t>併用期</a:t>
+            </a:r>
+          </a:p>
+        </p:txBody>
+      </p:sp>
+      <p:sp>
+        <p:nvSpPr>
+          <p:cNvPr id="25" name="Rounded Rectangle 24"/>
+          <p:cNvSpPr/>
+          <p:nvPr/>
+        </p:nvSpPr>
+        <p:spPr>
+          <a:xfrm>
+            <a:off x="566928" y="4206240"/>
+            <a:ext cx="5577840" cy="566928"/>
+          </a:xfrm>
+          <a:prstGeom prst="roundRect">
+            <a:avLst>
+              <a:gd name="adj" fmla="val 16129"/>
             </a:avLst>
           </a:prstGeom>
           <a:solidFill>
@@ -3796,629 +4408,295 @@
           </a:solidFill>
           <a:ln w="12700">
             <a:solidFill>
-              <a:srgbClr val="F4F8FA"/>
+              <a:srgbClr val="1A5276"/>
             </a:solidFill>
-            <a:prstDash val="solid"/>
           </a:ln>
-        </p:spPr>
-        <p:txBody>
-          <a:bodyPr/>
-          <a:lstStyle/>
-          <a:p>
-            <a:endParaRPr lang="ja-JP" altLang="en-US"/>
-          </a:p>
-        </p:txBody>
-      </p:sp>
-      <p:sp>
-        <p:nvSpPr>
-          <p:cNvPr id="10" name="Text 8"/>
+          <a:effectLst/>
+        </p:spPr>
+        <p:style>
+          <a:lnRef idx="1">
+            <a:schemeClr val="accent1"/>
+          </a:lnRef>
+          <a:fillRef idx="3">
+            <a:schemeClr val="accent1"/>
+          </a:fillRef>
+          <a:effectRef idx="2">
+            <a:schemeClr val="accent1"/>
+          </a:effectRef>
+          <a:fontRef idx="minor">
+            <a:schemeClr val="lt1"/>
+          </a:fontRef>
+        </p:style>
+        <p:txBody>
+          <a:bodyPr rtlCol="0" anchor="ctr"/>
+          <a:lstStyle/>
+          <a:p>
+            <a:pPr algn="ctr"/>
+          </a:p>
+        </p:txBody>
+      </p:sp>
+      <p:sp>
+        <p:nvSpPr>
+          <p:cNvPr id="26" name="TextBox 25"/>
           <p:cNvSpPr txBox="1"/>
           <p:nvPr/>
         </p:nvSpPr>
         <p:spPr>
           <a:xfrm>
-            <a:off x="3566160" y="1700784"/>
-            <a:ext cx="3626968" cy="676656"/>
+            <a:off x="841248" y="4206240"/>
+            <a:ext cx="5029200" cy="566928"/>
           </a:xfrm>
           <a:prstGeom prst="rect">
             <a:avLst/>
           </a:prstGeom>
           <a:noFill/>
-          <a:ln/>
-        </p:spPr>
-        <p:txBody>
-          <a:bodyPr wrap="square" lIns="0" tIns="0" rIns="0" bIns="0" rtlCol="0" anchor="ctr"/>
-          <a:lstStyle/>
-          <a:p>
-            <a:pPr marL="0" indent="0">
-              <a:lnSpc>
-                <a:spcPct val="115000"/>
-              </a:lnSpc>
-              <a:buNone/>
-            </a:pPr>
-            <a:r>
-              <a:rPr lang="en-US" sz="1350" b="1" dirty="0">
+        </p:spPr>
+        <p:txBody>
+          <a:bodyPr wrap="square" anchor="ctr" lIns="0" rIns="0" tIns="0" bIns="0">
+            <a:spAutoFit/>
+          </a:bodyPr>
+          <a:lstStyle/>
+          <a:p>
+            <a:pPr algn="l"/>
+            <a:r>
+              <a:rPr sz="1300" b="1">
                 <a:solidFill>
                   <a:srgbClr val="1A5276"/>
                 </a:solidFill>
-                <a:latin typeface="Meiryo" pitchFamily="34" charset="0"/>
-                <a:ea typeface="Meiryo" pitchFamily="34" charset="-122"/>
-                <a:cs typeface="Meiryo" pitchFamily="34" charset="-120"/>
-              </a:rPr>
-              <a:t>主治医・在宅医</a:t>
-            </a:r>
-            <a:endParaRPr lang="en-US" sz="1350" dirty="0"/>
-          </a:p>
-          <a:p>
-            <a:pPr marL="0" indent="0">
-              <a:lnSpc>
-                <a:spcPct val="115000"/>
-              </a:lnSpc>
-              <a:buNone/>
-            </a:pPr>
-            <a:r>
-              <a:rPr lang="en-US" sz="1000" dirty="0">
-                <a:solidFill>
-                  <a:srgbClr val="566573"/>
-                </a:solidFill>
-                <a:latin typeface="Meiryo" pitchFamily="34" charset="0"/>
-                <a:ea typeface="Meiryo" pitchFamily="34" charset="-122"/>
-                <a:cs typeface="Meiryo" pitchFamily="34" charset="-120"/>
-              </a:rPr>
-              <a:t>創部・全身状態の報告／指示の確認</a:t>
-            </a:r>
-            <a:endParaRPr lang="en-US" sz="1350" dirty="0"/>
-          </a:p>
-        </p:txBody>
-      </p:sp>
-      <p:sp>
-        <p:nvSpPr>
-          <p:cNvPr id="11" name="Shape 9"/>
+                <a:latin typeface="Meiryo"/>
+              </a:rPr>
+              <a:t>デイサービス（通所）での入浴</a:t>
+            </a:r>
+          </a:p>
+        </p:txBody>
+      </p:sp>
+      <p:sp>
+        <p:nvSpPr>
+          <p:cNvPr id="27" name="Rounded Rectangle 26"/>
           <p:cNvSpPr/>
           <p:nvPr/>
         </p:nvSpPr>
         <p:spPr>
           <a:xfrm>
-            <a:off x="7595464" y="1700784"/>
-            <a:ext cx="4029304" cy="676656"/>
+            <a:off x="4846320" y="4919472"/>
+            <a:ext cx="6766560" cy="566928"/>
           </a:xfrm>
           <a:prstGeom prst="roundRect">
             <a:avLst>
-              <a:gd name="adj" fmla="val 6757"/>
+              <a:gd name="adj" fmla="val 16129"/>
             </a:avLst>
           </a:prstGeom>
           <a:solidFill>
-            <a:srgbClr val="F4F8FA"/>
+            <a:srgbClr val="1D9E75"/>
           </a:solidFill>
-          <a:ln w="12700">
-            <a:solidFill>
-              <a:srgbClr val="F4F8FA"/>
-            </a:solidFill>
-            <a:prstDash val="solid"/>
+          <a:ln>
+            <a:noFill/>
           </a:ln>
-        </p:spPr>
-        <p:txBody>
-          <a:bodyPr/>
-          <a:lstStyle/>
-          <a:p>
-            <a:endParaRPr lang="ja-JP" altLang="en-US"/>
-          </a:p>
-        </p:txBody>
-      </p:sp>
-      <p:sp>
-        <p:nvSpPr>
-          <p:cNvPr id="12" name="Text 10"/>
+          <a:effectLst/>
+        </p:spPr>
+        <p:style>
+          <a:lnRef idx="1">
+            <a:schemeClr val="accent1"/>
+          </a:lnRef>
+          <a:fillRef idx="3">
+            <a:schemeClr val="accent1"/>
+          </a:fillRef>
+          <a:effectRef idx="2">
+            <a:schemeClr val="accent1"/>
+          </a:effectRef>
+          <a:fontRef idx="minor">
+            <a:schemeClr val="lt1"/>
+          </a:fontRef>
+        </p:style>
+        <p:txBody>
+          <a:bodyPr rtlCol="0" anchor="ctr"/>
+          <a:lstStyle/>
+          <a:p>
+            <a:pPr algn="ctr"/>
+          </a:p>
+        </p:txBody>
+      </p:sp>
+      <p:sp>
+        <p:nvSpPr>
+          <p:cNvPr id="28" name="TextBox 27"/>
           <p:cNvSpPr txBox="1"/>
           <p:nvPr/>
         </p:nvSpPr>
         <p:spPr>
           <a:xfrm>
-            <a:off x="7796632" y="1700784"/>
-            <a:ext cx="3626968" cy="676656"/>
+            <a:off x="5120640" y="4919472"/>
+            <a:ext cx="6217920" cy="566928"/>
           </a:xfrm>
           <a:prstGeom prst="rect">
             <a:avLst/>
           </a:prstGeom>
           <a:noFill/>
-          <a:ln/>
-        </p:spPr>
-        <p:txBody>
-          <a:bodyPr wrap="square" lIns="0" tIns="0" rIns="0" bIns="0" rtlCol="0" anchor="ctr"/>
-          <a:lstStyle/>
-          <a:p>
-            <a:pPr marL="0" indent="0">
-              <a:lnSpc>
-                <a:spcPct val="115000"/>
-              </a:lnSpc>
-              <a:buNone/>
-            </a:pPr>
-            <a:r>
-              <a:rPr lang="en-US" sz="1350" b="1" dirty="0">
-                <a:solidFill>
-                  <a:srgbClr val="1A5276"/>
-                </a:solidFill>
-                <a:latin typeface="Meiryo" pitchFamily="34" charset="0"/>
-                <a:ea typeface="Meiryo" pitchFamily="34" charset="-122"/>
-                <a:cs typeface="Meiryo" pitchFamily="34" charset="-120"/>
-              </a:rPr>
-              <a:t>訪問看護ステーション</a:t>
-            </a:r>
-            <a:endParaRPr lang="en-US" sz="1350" dirty="0"/>
-          </a:p>
-          <a:p>
-            <a:pPr marL="0" indent="0">
-              <a:lnSpc>
-                <a:spcPct val="115000"/>
-              </a:lnSpc>
-              <a:buNone/>
-            </a:pPr>
-            <a:r>
-              <a:rPr lang="en-US" sz="1000" dirty="0">
-                <a:solidFill>
-                  <a:srgbClr val="566573"/>
-                </a:solidFill>
-                <a:latin typeface="Meiryo" pitchFamily="34" charset="0"/>
-                <a:ea typeface="Meiryo" pitchFamily="34" charset="-122"/>
-                <a:cs typeface="Meiryo" pitchFamily="34" charset="-120"/>
-              </a:rPr>
-              <a:t>観察所見の共有／医療処置の依頼</a:t>
-            </a:r>
-            <a:endParaRPr lang="en-US" sz="1350" dirty="0"/>
-          </a:p>
-        </p:txBody>
-      </p:sp>
-      <p:sp>
-        <p:nvSpPr>
-          <p:cNvPr id="13" name="Shape 11"/>
+        </p:spPr>
+        <p:txBody>
+          <a:bodyPr wrap="square" anchor="ctr" lIns="0" rIns="0" tIns="0" bIns="0">
+            <a:spAutoFit/>
+          </a:bodyPr>
+          <a:lstStyle/>
+          <a:p>
+            <a:pPr algn="l"/>
+            <a:r>
+              <a:rPr sz="1300" b="1">
+                <a:solidFill>
+                  <a:srgbClr val="FFFFFF"/>
+                </a:solidFill>
+                <a:latin typeface="Meiryo"/>
+              </a:rPr>
+              <a:t>訪問入浴（自宅での全身浴）</a:t>
+            </a:r>
+          </a:p>
+        </p:txBody>
+      </p:sp>
+      <p:sp>
+        <p:nvSpPr>
+          <p:cNvPr id="29" name="Right Arrow 28"/>
           <p:cNvSpPr/>
           <p:nvPr/>
         </p:nvSpPr>
         <p:spPr>
           <a:xfrm>
-            <a:off x="3364992" y="2487168"/>
-            <a:ext cx="4029304" cy="676656"/>
-          </a:xfrm>
-          <a:prstGeom prst="roundRect">
-            <a:avLst>
-              <a:gd name="adj" fmla="val 6757"/>
-            </a:avLst>
+            <a:off x="566928" y="5632704"/>
+            <a:ext cx="11045952" cy="128016"/>
+          </a:xfrm>
+          <a:prstGeom prst="rightArrow">
+            <a:avLst/>
           </a:prstGeom>
           <a:solidFill>
-            <a:srgbClr val="F4F8FA"/>
+            <a:srgbClr val="C7D2DA"/>
           </a:solidFill>
-          <a:ln w="12700">
-            <a:solidFill>
-              <a:srgbClr val="F4F8FA"/>
-            </a:solidFill>
-            <a:prstDash val="solid"/>
+          <a:ln>
+            <a:noFill/>
           </a:ln>
-        </p:spPr>
-        <p:txBody>
-          <a:bodyPr/>
-          <a:lstStyle/>
-          <a:p>
-            <a:endParaRPr lang="ja-JP" altLang="en-US"/>
-          </a:p>
-        </p:txBody>
-      </p:sp>
-      <p:sp>
-        <p:nvSpPr>
-          <p:cNvPr id="14" name="Text 12"/>
+          <a:effectLst/>
+        </p:spPr>
+        <p:style>
+          <a:lnRef idx="1">
+            <a:schemeClr val="accent1"/>
+          </a:lnRef>
+          <a:fillRef idx="3">
+            <a:schemeClr val="accent1"/>
+          </a:fillRef>
+          <a:effectRef idx="2">
+            <a:schemeClr val="accent1"/>
+          </a:effectRef>
+          <a:fontRef idx="minor">
+            <a:schemeClr val="lt1"/>
+          </a:fontRef>
+        </p:style>
+        <p:txBody>
+          <a:bodyPr rtlCol="0" anchor="ctr"/>
+          <a:lstStyle/>
+          <a:p>
+            <a:pPr algn="ctr"/>
+          </a:p>
+        </p:txBody>
+      </p:sp>
+      <p:sp>
+        <p:nvSpPr>
+          <p:cNvPr id="30" name="TextBox 29"/>
           <p:cNvSpPr txBox="1"/>
           <p:nvPr/>
         </p:nvSpPr>
         <p:spPr>
           <a:xfrm>
-            <a:off x="3566160" y="2487168"/>
-            <a:ext cx="3626968" cy="676656"/>
+            <a:off x="566928" y="5852160"/>
+            <a:ext cx="4572000" cy="274320"/>
           </a:xfrm>
           <a:prstGeom prst="rect">
             <a:avLst/>
           </a:prstGeom>
           <a:noFill/>
-          <a:ln/>
-        </p:spPr>
-        <p:txBody>
-          <a:bodyPr wrap="square" lIns="0" tIns="0" rIns="0" bIns="0" rtlCol="0" anchor="ctr"/>
-          <a:lstStyle/>
-          <a:p>
-            <a:pPr marL="0" indent="0">
-              <a:lnSpc>
-                <a:spcPct val="115000"/>
-              </a:lnSpc>
-              <a:buNone/>
-            </a:pPr>
-            <a:r>
-              <a:rPr lang="en-US" sz="1350" b="1" dirty="0">
-                <a:solidFill>
-                  <a:srgbClr val="1A5276"/>
-                </a:solidFill>
-                <a:latin typeface="Meiryo" pitchFamily="34" charset="0"/>
-                <a:ea typeface="Meiryo" pitchFamily="34" charset="-122"/>
-                <a:cs typeface="Meiryo" pitchFamily="34" charset="-120"/>
-              </a:rPr>
-              <a:t>ケアマネジャー</a:t>
-            </a:r>
-            <a:endParaRPr lang="en-US" sz="1350" dirty="0"/>
-          </a:p>
-          <a:p>
-            <a:pPr marL="0" indent="0">
-              <a:lnSpc>
-                <a:spcPct val="115000"/>
-              </a:lnSpc>
-              <a:buNone/>
-            </a:pPr>
-            <a:r>
-              <a:rPr lang="en-US" sz="1000" dirty="0">
+        </p:spPr>
+        <p:txBody>
+          <a:bodyPr wrap="square" anchor="t" lIns="0" rIns="0" tIns="0" bIns="0">
+            <a:spAutoFit/>
+          </a:bodyPr>
+          <a:lstStyle/>
+          <a:p>
+            <a:pPr algn="l"/>
+            <a:r>
+              <a:rPr sz="1050" b="0">
                 <a:solidFill>
                   <a:srgbClr val="566573"/>
                 </a:solidFill>
-                <a:latin typeface="Meiryo" pitchFamily="34" charset="0"/>
-                <a:ea typeface="Meiryo" pitchFamily="34" charset="-122"/>
-                <a:cs typeface="Meiryo" pitchFamily="34" charset="-120"/>
-              </a:rPr>
-              <a:t>状態変化・生活課題のフィードバック</a:t>
-            </a:r>
-            <a:endParaRPr lang="en-US" sz="1350" dirty="0"/>
-          </a:p>
-        </p:txBody>
-      </p:sp>
-      <p:sp>
-        <p:nvSpPr>
-          <p:cNvPr id="15" name="Shape 13"/>
-          <p:cNvSpPr/>
-          <p:nvPr/>
-        </p:nvSpPr>
-        <p:spPr>
-          <a:xfrm>
-            <a:off x="7595464" y="2487168"/>
-            <a:ext cx="4029304" cy="676656"/>
-          </a:xfrm>
-          <a:prstGeom prst="roundRect">
-            <a:avLst>
-              <a:gd name="adj" fmla="val 6757"/>
-            </a:avLst>
-          </a:prstGeom>
-          <a:solidFill>
-            <a:srgbClr val="F4F8FA"/>
-          </a:solidFill>
-          <a:ln w="12700">
-            <a:solidFill>
-              <a:srgbClr val="F4F8FA"/>
-            </a:solidFill>
-            <a:prstDash val="solid"/>
-          </a:ln>
-        </p:spPr>
-        <p:txBody>
-          <a:bodyPr/>
-          <a:lstStyle/>
-          <a:p>
-            <a:endParaRPr lang="ja-JP" altLang="en-US"/>
-          </a:p>
-        </p:txBody>
-      </p:sp>
-      <p:sp>
-        <p:nvSpPr>
-          <p:cNvPr id="16" name="Text 14"/>
+                <a:latin typeface="Meiryo"/>
+              </a:rPr>
+              <a:t>ADLが保たれ、通所できる時期</a:t>
+            </a:r>
+          </a:p>
+        </p:txBody>
+      </p:sp>
+      <p:sp>
+        <p:nvSpPr>
+          <p:cNvPr id="31" name="TextBox 30"/>
           <p:cNvSpPr txBox="1"/>
           <p:nvPr/>
         </p:nvSpPr>
         <p:spPr>
           <a:xfrm>
-            <a:off x="7796632" y="2487168"/>
-            <a:ext cx="3626968" cy="676656"/>
+            <a:off x="7040880" y="5852160"/>
+            <a:ext cx="4572000" cy="274320"/>
           </a:xfrm>
           <a:prstGeom prst="rect">
             <a:avLst/>
           </a:prstGeom>
           <a:noFill/>
-          <a:ln/>
-        </p:spPr>
-        <p:txBody>
-          <a:bodyPr wrap="square" lIns="0" tIns="0" rIns="0" bIns="0" rtlCol="0" anchor="ctr"/>
-          <a:lstStyle/>
-          <a:p>
-            <a:pPr marL="0" indent="0">
-              <a:lnSpc>
-                <a:spcPct val="115000"/>
-              </a:lnSpc>
-              <a:buNone/>
-            </a:pPr>
-            <a:r>
-              <a:rPr lang="en-US" sz="1350" b="1" dirty="0">
-                <a:solidFill>
-                  <a:srgbClr val="1A5276"/>
-                </a:solidFill>
-                <a:latin typeface="Meiryo" pitchFamily="34" charset="0"/>
-                <a:ea typeface="Meiryo" pitchFamily="34" charset="-122"/>
-                <a:cs typeface="Meiryo" pitchFamily="34" charset="-120"/>
-              </a:rPr>
-              <a:t>デイサービス・訪問介護</a:t>
-            </a:r>
-            <a:endParaRPr lang="en-US" sz="1350" dirty="0"/>
-          </a:p>
-          <a:p>
-            <a:pPr marL="0" indent="0">
-              <a:lnSpc>
-                <a:spcPct val="115000"/>
-              </a:lnSpc>
-              <a:buNone/>
-            </a:pPr>
-            <a:r>
-              <a:rPr lang="en-US" sz="1000" dirty="0">
+        </p:spPr>
+        <p:txBody>
+          <a:bodyPr wrap="square" anchor="t" lIns="0" rIns="0" tIns="0" bIns="0">
+            <a:spAutoFit/>
+          </a:bodyPr>
+          <a:lstStyle/>
+          <a:p>
+            <a:pPr algn="r"/>
+            <a:r>
+              <a:rPr sz="1050" b="0">
                 <a:solidFill>
                   <a:srgbClr val="566573"/>
                 </a:solidFill>
-                <a:latin typeface="Meiryo" pitchFamily="34" charset="0"/>
-                <a:ea typeface="Meiryo" pitchFamily="34" charset="-122"/>
-                <a:cs typeface="Meiryo" pitchFamily="34" charset="-120"/>
-              </a:rPr>
-              <a:t>入浴日の分担／スキンケアの継続</a:t>
-            </a:r>
-            <a:endParaRPr lang="en-US" sz="1350" dirty="0"/>
-          </a:p>
-        </p:txBody>
-      </p:sp>
-      <p:sp>
-        <p:nvSpPr>
-          <p:cNvPr id="17" name="Shape 15"/>
-          <p:cNvSpPr/>
-          <p:nvPr/>
-        </p:nvSpPr>
-        <p:spPr>
-          <a:xfrm>
-            <a:off x="566928" y="3419856"/>
-            <a:ext cx="5382616" cy="1517904"/>
-          </a:xfrm>
-          <a:prstGeom prst="roundRect">
-            <a:avLst>
-              <a:gd name="adj" fmla="val 3614"/>
-            </a:avLst>
-          </a:prstGeom>
-          <a:solidFill>
-            <a:srgbClr val="F4F8FA"/>
-          </a:solidFill>
-          <a:ln w="12700">
-            <a:solidFill>
-              <a:srgbClr val="F4F8FA"/>
-            </a:solidFill>
-            <a:prstDash val="solid"/>
-          </a:ln>
-        </p:spPr>
-        <p:txBody>
-          <a:bodyPr/>
-          <a:lstStyle/>
-          <a:p>
-            <a:endParaRPr lang="ja-JP" altLang="en-US"/>
-          </a:p>
-        </p:txBody>
-      </p:sp>
-      <p:sp>
-        <p:nvSpPr>
-          <p:cNvPr id="18" name="Text 16"/>
+                <a:latin typeface="Meiryo"/>
+              </a:rPr>
+              <a:t>ADLが低下し、通所が難しくなる時期</a:t>
+            </a:r>
+          </a:p>
+        </p:txBody>
+      </p:sp>
+      <p:sp>
+        <p:nvSpPr>
+          <p:cNvPr id="32" name="TextBox 31"/>
           <p:cNvSpPr txBox="1"/>
           <p:nvPr/>
         </p:nvSpPr>
         <p:spPr>
           <a:xfrm>
-            <a:off x="786384" y="3602736"/>
-            <a:ext cx="4943704" cy="310896"/>
+            <a:off x="566928" y="6236208"/>
+            <a:ext cx="11045952" cy="365760"/>
           </a:xfrm>
           <a:prstGeom prst="rect">
             <a:avLst/>
           </a:prstGeom>
           <a:noFill/>
-          <a:ln/>
-        </p:spPr>
-        <p:txBody>
-          <a:bodyPr wrap="square" lIns="0" tIns="0" rIns="0" bIns="0" rtlCol="0" anchor="ctr"/>
-          <a:lstStyle/>
-          <a:p>
-            <a:pPr marL="0" indent="0">
-              <a:buNone/>
-            </a:pPr>
-            <a:r>
-              <a:rPr lang="en-US" sz="1600" b="1" dirty="0">
-                <a:solidFill>
-                  <a:srgbClr val="1A5276"/>
-                </a:solidFill>
-                <a:latin typeface="Meiryo" pitchFamily="34" charset="0"/>
-                <a:ea typeface="Meiryo" pitchFamily="34" charset="-122"/>
-                <a:cs typeface="Meiryo" pitchFamily="34" charset="-120"/>
-              </a:rPr>
-              <a:t>「競合」ではありません</a:t>
-            </a:r>
-            <a:endParaRPr lang="en-US" sz="1600" dirty="0"/>
-          </a:p>
-        </p:txBody>
-      </p:sp>
-      <p:sp>
-        <p:nvSpPr>
-          <p:cNvPr id="19" name="Text 17"/>
-          <p:cNvSpPr txBox="1"/>
-          <p:nvPr/>
-        </p:nvSpPr>
-        <p:spPr>
-          <a:xfrm>
-            <a:off x="786384" y="4005072"/>
-            <a:ext cx="4943704" cy="786384"/>
-          </a:xfrm>
-          <a:prstGeom prst="rect">
-            <a:avLst/>
-          </a:prstGeom>
-          <a:noFill/>
-          <a:ln/>
-        </p:spPr>
-        <p:txBody>
-          <a:bodyPr wrap="square" lIns="0" tIns="0" rIns="0" bIns="0" rtlCol="0" anchor="t"/>
-          <a:lstStyle/>
-          <a:p>
-            <a:pPr marL="0" indent="0">
-              <a:lnSpc>
-                <a:spcPct val="125000"/>
-              </a:lnSpc>
-              <a:buNone/>
-            </a:pPr>
-            <a:r>
-              <a:rPr lang="en-US" sz="1400" dirty="0">
-                <a:solidFill>
-                  <a:srgbClr val="1C2833"/>
-                </a:solidFill>
-                <a:latin typeface="Meiryo" pitchFamily="34" charset="0"/>
-                <a:ea typeface="Meiryo" pitchFamily="34" charset="-122"/>
-                <a:cs typeface="Meiryo" pitchFamily="34" charset="-120"/>
-              </a:rPr>
-              <a:t>デイサービスに通えている間はデイでの入浴を。</a:t>
-            </a:r>
-            <a:r>
-              <a:rPr lang="en-US" sz="1400" b="1" dirty="0">
+        </p:spPr>
+        <p:txBody>
+          <a:bodyPr wrap="square" anchor="t" lIns="0" rIns="0" tIns="0" bIns="0">
+            <a:spAutoFit/>
+          </a:bodyPr>
+          <a:lstStyle/>
+          <a:p>
+            <a:pPr algn="l"/>
+            <a:r>
+              <a:rPr sz="1350" b="1">
                 <a:solidFill>
                   <a:srgbClr val="1D9E75"/>
                 </a:solidFill>
-                <a:latin typeface="Meiryo" pitchFamily="34" charset="0"/>
-                <a:ea typeface="Meiryo" pitchFamily="34" charset="-122"/>
-                <a:cs typeface="Meiryo" pitchFamily="34" charset="-120"/>
-              </a:rPr>
-              <a:t>体調やADLの低下で通所が難しくなった時期</a:t>
-            </a:r>
-            <a:r>
-              <a:rPr lang="en-US" sz="1400" dirty="0">
-                <a:solidFill>
-                  <a:srgbClr val="1C2833"/>
-                </a:solidFill>
-                <a:latin typeface="Meiryo" pitchFamily="34" charset="0"/>
-                <a:ea typeface="Meiryo" pitchFamily="34" charset="-122"/>
-                <a:cs typeface="Meiryo" pitchFamily="34" charset="-120"/>
-              </a:rPr>
-              <a:t>に訪問入浴が引き継ぐ、という補完関係です。</a:t>
-            </a:r>
-            <a:endParaRPr lang="en-US" sz="1400" dirty="0"/>
-          </a:p>
-        </p:txBody>
-      </p:sp>
-      <p:sp>
-        <p:nvSpPr>
-          <p:cNvPr id="20" name="Shape 18"/>
-          <p:cNvSpPr/>
-          <p:nvPr/>
-        </p:nvSpPr>
-        <p:spPr>
-          <a:xfrm>
-            <a:off x="6242152" y="3419856"/>
-            <a:ext cx="5382616" cy="1517904"/>
-          </a:xfrm>
-          <a:prstGeom prst="roundRect">
-            <a:avLst>
-              <a:gd name="adj" fmla="val 3614"/>
-            </a:avLst>
-          </a:prstGeom>
-          <a:solidFill>
-            <a:srgbClr val="EAF7F1"/>
-          </a:solidFill>
-          <a:ln w="12700">
-            <a:solidFill>
-              <a:srgbClr val="EAF7F1"/>
-            </a:solidFill>
-            <a:prstDash val="solid"/>
-          </a:ln>
-        </p:spPr>
-        <p:txBody>
-          <a:bodyPr/>
-          <a:lstStyle/>
-          <a:p>
-            <a:endParaRPr lang="ja-JP" altLang="en-US"/>
-          </a:p>
-        </p:txBody>
-      </p:sp>
-      <p:sp>
-        <p:nvSpPr>
-          <p:cNvPr id="21" name="Text 19"/>
-          <p:cNvSpPr txBox="1"/>
-          <p:nvPr/>
-        </p:nvSpPr>
-        <p:spPr>
-          <a:xfrm>
-            <a:off x="6461608" y="3602736"/>
-            <a:ext cx="4943704" cy="310896"/>
-          </a:xfrm>
-          <a:prstGeom prst="rect">
-            <a:avLst/>
-          </a:prstGeom>
-          <a:noFill/>
-          <a:ln/>
-        </p:spPr>
-        <p:txBody>
-          <a:bodyPr wrap="square" lIns="0" tIns="0" rIns="0" bIns="0" rtlCol="0" anchor="ctr"/>
-          <a:lstStyle/>
-          <a:p>
-            <a:pPr marL="0" indent="0">
-              <a:buNone/>
-            </a:pPr>
-            <a:r>
-              <a:rPr lang="en-US" sz="1600" b="1" dirty="0">
-                <a:solidFill>
-                  <a:srgbClr val="1D9E75"/>
-                </a:solidFill>
-                <a:latin typeface="Meiryo" pitchFamily="34" charset="0"/>
-                <a:ea typeface="Meiryo" pitchFamily="34" charset="-122"/>
-                <a:cs typeface="Meiryo" pitchFamily="34" charset="-120"/>
-              </a:rPr>
-              <a:t>併用が最も現実的</a:t>
-            </a:r>
-            <a:endParaRPr lang="en-US" sz="1600" dirty="0"/>
-          </a:p>
-        </p:txBody>
-      </p:sp>
-      <p:sp>
-        <p:nvSpPr>
-          <p:cNvPr id="22" name="Text 20"/>
-          <p:cNvSpPr txBox="1"/>
-          <p:nvPr/>
-        </p:nvSpPr>
-        <p:spPr>
-          <a:xfrm>
-            <a:off x="6461608" y="4005072"/>
-            <a:ext cx="4943704" cy="786384"/>
-          </a:xfrm>
-          <a:prstGeom prst="rect">
-            <a:avLst/>
-          </a:prstGeom>
-          <a:noFill/>
-          <a:ln/>
-        </p:spPr>
-        <p:txBody>
-          <a:bodyPr wrap="square" lIns="0" tIns="0" rIns="0" bIns="0" rtlCol="0" anchor="t"/>
-          <a:lstStyle/>
-          <a:p>
-            <a:pPr marL="0" indent="0">
-              <a:lnSpc>
-                <a:spcPct val="125000"/>
-              </a:lnSpc>
-              <a:buNone/>
-            </a:pPr>
-            <a:r>
-              <a:rPr lang="en-US" sz="1400" dirty="0">
-                <a:solidFill>
-                  <a:srgbClr val="1C2833"/>
-                </a:solidFill>
-                <a:latin typeface="Meiryo" pitchFamily="34" charset="0"/>
-                <a:ea typeface="Meiryo" pitchFamily="34" charset="-122"/>
-                <a:cs typeface="Meiryo" pitchFamily="34" charset="-120"/>
-              </a:rPr>
-              <a:t>「デイ入浴＋訪問入浴」「訪問入浴の観察＋訪問看護の処置」。</a:t>
-            </a:r>
-            <a:r>
-              <a:rPr lang="en-US" sz="1400" b="1" dirty="0">
-                <a:solidFill>
-                  <a:srgbClr val="1D9E75"/>
-                </a:solidFill>
-                <a:latin typeface="Meiryo" pitchFamily="34" charset="0"/>
-                <a:ea typeface="Meiryo" pitchFamily="34" charset="-122"/>
-                <a:cs typeface="Meiryo" pitchFamily="34" charset="-120"/>
-              </a:rPr>
-              <a:t>役割を分け合うことで在宅の限界点が延びます。</a:t>
-            </a:r>
-            <a:endParaRPr lang="en-US" sz="1400" dirty="0"/>
+                <a:latin typeface="Meiryo"/>
+              </a:rPr>
+              <a:t>役割を分け合うことで、ご自宅で過ごせる期間が延びます。</a:t>
+            </a:r>
           </a:p>
         </p:txBody>
       </p:sp>

--- a/houmon-nyuyoku-slides.pptx
+++ b/houmon-nyuyoku-slides.pptx
@@ -856,8 +856,42 @@
           <a:lstStyle/>
           <a:p>
             <a:r>
-              <a:rPr lang="en-US" dirty="0"/>
-              <a:t>本日は訪問入浴介護についてお話しします。テーマは「自宅でお風呂に入る権利」。在宅で入浴が困難な方に、どう関わり、どう連携できるかをお伝えします。</a:t>
+              <a:t>［0:00〜2:00／2分］表紙</a:t>
+            </a:r>
+          </a:p>
+          <a:p>
+            <a:r>
+              <a:t>・あいさつ／看護師・管理者として地域で訪問入浴に携わっている</a:t>
+            </a:r>
+          </a:p>
+          <a:p>
+            <a:r>
+              <a:t>・「何か月もお風呂に入っていない方が実際にいる」→ ひと呼吸おく</a:t>
+            </a:r>
+          </a:p>
+          <a:p>
+            <a:r>
+              <a:t>・本日の流れ：動画7分 → スライド40分 → 質疑10分</a:t>
+            </a:r>
+          </a:p>
+          <a:p>
+            <a:r>
+              <a:t>・「それでは、まず動画をご覧ください」</a:t>
+            </a:r>
+          </a:p>
+          <a:p>
+            <a:r>
+              <a:t>【動画の前ふり】ご本人・ご家族の同意を得て撮影。浴槽の搬入からお帰りまで。</a:t>
+            </a:r>
+          </a:p>
+          <a:p>
+            <a:r>
+              <a:t>【再生中】スクリーンの脇に寄る。補足を入れない。</a:t>
+            </a:r>
+          </a:p>
+          <a:p>
+            <a:r>
+              <a:t>【再生後】「45分以内。その間ずっと看護師が全身を見ています」</a:t>
             </a:r>
           </a:p>
         </p:txBody>
@@ -950,8 +984,47 @@
           <a:lstStyle/>
           <a:p>
             <a:r>
-              <a:rPr lang="en-US" dirty="0"/>
-              <a:t>本日いちばんお願いしたい点です。特に訪問看護ステーションの方に向けて、同日訪問と事前相談をお願いしてください。</a:t>
+              <a:t>［35:00〜38:30／3分半］連携のお願い　★山場・今日の本題</a:t>
+            </a:r>
+          </a:p>
+          <a:p>
+            <a:r>
+              <a:t>・訪問看護の皆さまへ3つ（指を立てて数える）</a:t>
+            </a:r>
+          </a:p>
+          <a:p>
+            <a:r>
+              <a:t> ①訪問日を合わせてほしい＝入浴直後は皮膚が清潔で処置に最適</a:t>
+            </a:r>
+          </a:p>
+          <a:p>
+            <a:r>
+              <a:t>   「私たちにとってではなく、ご本人にとって一番いい形」</a:t>
+            </a:r>
+          </a:p>
+          <a:p>
+            <a:r>
+              <a:t> ②見てほしい部位を教えてほしい＝重点観察し、当日中にノート・電話・写真で返す</a:t>
+            </a:r>
+          </a:p>
+          <a:p>
+            <a:r>
+              <a:t> ③医療的ケアは事前相談＝気切・経管・在宅酸素も条件を整えれば入れる</a:t>
+            </a:r>
+          </a:p>
+          <a:p>
+            <a:r>
+              <a:t>・締め「この状態で入浴させてよいか──迷った時点でご連絡ください。</a:t>
+            </a:r>
+          </a:p>
+          <a:p>
+            <a:r>
+              <a:t>  一緒に判断させてください」← ここで一度止まる</a:t>
+            </a:r>
+          </a:p>
+          <a:p>
+            <a:r>
+              <a:t>・「できませんと答えるために伺うのではありません」</a:t>
             </a:r>
           </a:p>
         </p:txBody>
@@ -1044,8 +1117,47 @@
           <a:lstStyle/>
           <a:p>
             <a:r>
-              <a:rPr lang="en-US" dirty="0"/>
-              <a:t>デイサービスの方に特にお伝えしたい点です。奪い合いではなく、通所が難しくなった段階での受け皿としてお考えください。</a:t>
+              <a:t>［38:30〜41:30／3分］在宅チームの一員として</a:t>
+            </a:r>
+          </a:p>
+          <a:p>
+            <a:r>
+              <a:t>・上の図：主治医＝創部・全身状態／訪看＝観察所見／ケアマネ＝状態変化／</a:t>
+            </a:r>
+          </a:p>
+          <a:p>
+            <a:r>
+              <a:t>  デイ・訪問介護＝入浴日の分担</a:t>
+            </a:r>
+          </a:p>
+          <a:p>
+            <a:r>
+              <a:t>・下の図（手で示す）：左→右へADLが低下</a:t>
+            </a:r>
+          </a:p>
+          <a:p>
+            <a:r>
+              <a:t>  通所できる時期はデイが第一選択（社会参加の意味がある）</a:t>
+            </a:r>
+          </a:p>
+          <a:p>
+            <a:r>
+              <a:t>  通所が難しくなったら訪問入浴が引き継ぐ</a:t>
+            </a:r>
+          </a:p>
+          <a:p>
+            <a:r>
+              <a:t>  ★重なり＝併用期。「デイに週2回行けるが、体調の波で行けない週もある」</a:t>
+            </a:r>
+          </a:p>
+          <a:p>
+            <a:r>
+              <a:t>・「役割を分け合うことで、ご自宅で過ごせる期間が延びます」</a:t>
+            </a:r>
+          </a:p>
+          <a:p>
+            <a:r>
+              <a:t>・デイ職員へ：「そろそろ通所がきつい」と感じた時点で声をかけてほしい</a:t>
             </a:r>
           </a:p>
         </p:txBody>
@@ -1138,8 +1250,52 @@
           <a:lstStyle/>
           <a:p>
             <a:r>
-              <a:rPr lang="en-US" dirty="0"/>
-              <a:t>単位数が高いという指摘は当然あります。何が含まれているかを分解して説明できるようにしておきます。</a:t>
+              <a:t>［41:30〜44:30／3分］単位数</a:t>
+            </a:r>
+          </a:p>
+          <a:p>
+            <a:r>
+              <a:t>・訪問入浴介護費 1回1,266単位／清拭・部分浴 1,139単位</a:t>
+            </a:r>
+          </a:p>
+          <a:p>
+            <a:r>
+              <a:t>・初回加算200（月1回）／看取り連携体制加算64（2024新設）／</a:t>
+            </a:r>
+          </a:p>
+          <a:p>
+            <a:r>
+              <a:t>  認知症専門ケアⅠ3・Ⅱ4／処遇改善 加算Ⅱ（ロ）12.7%</a:t>
+            </a:r>
+          </a:p>
+          <a:p>
+            <a:r>
+              <a:t>・「正直に申し上げて、安くありません」← 自分から言う</a:t>
+            </a:r>
+          </a:p>
+          <a:p>
+            <a:r>
+              <a:t>・中身：省令の3名同時訪問／浴槽・給湯の持込みと設置撤収／</a:t>
+            </a:r>
+          </a:p>
+          <a:p>
+            <a:r>
+              <a:t>  清拭では届かない全身浴と洗髪／毎回のバイタルと全身観察／情報共有</a:t>
+            </a:r>
+          </a:p>
+          <a:p>
+            <a:r>
+              <a:t>・「入浴だけの報酬ではなく、看護アセスメントを含んだケアの対価」</a:t>
+            </a:r>
+          </a:p>
+          <a:p>
+            <a:r>
+              <a:t>・看取り連携体制加算の新設＝国の方向性</a:t>
+            </a:r>
+          </a:p>
+          <a:p>
+            <a:r>
+              <a:t>【注意】金額はその場で計算しない。「地域区分で変わるので個別にお出しします」</a:t>
             </a:r>
           </a:p>
         </p:txBody>
@@ -1232,8 +1388,37 @@
           <a:lstStyle/>
           <a:p>
             <a:r>
-              <a:rPr lang="en-US" dirty="0"/>
-              <a:t>数字では伝わらない部分です。ご家族の負担軽減という側面も強調してください。</a:t>
+              <a:t>［44:30〜46:30／2分］利用者・ご家族の声</a:t>
+            </a:r>
+          </a:p>
+          <a:p>
+            <a:r>
+              <a:t>・80代要介護5のご本人「毎週のお風呂が楽しみで、それだけで前向きに」</a:t>
+            </a:r>
+          </a:p>
+          <a:p>
+            <a:r>
+              <a:t>  →「"それだけで"とおっしゃった」</a:t>
+            </a:r>
+          </a:p>
+          <a:p>
+            <a:r>
+              <a:t>・70代ご家族「一人では絶対に無理でした。プロに任せることで安心して</a:t>
+            </a:r>
+          </a:p>
+          <a:p>
+            <a:r>
+              <a:t>  介護できるようになりました」</a:t>
+            </a:r>
+          </a:p>
+          <a:p>
+            <a:r>
+              <a:t>・ご本人のためだけでなく、ご家族のためのサービスでもある</a:t>
+            </a:r>
+          </a:p>
+          <a:p>
+            <a:r>
+              <a:t>【押していたら】このスライドを丸ごと飛ばす。−2分</a:t>
             </a:r>
           </a:p>
         </p:txBody>
@@ -1326,8 +1511,32 @@
           <a:lstStyle/>
           <a:p>
             <a:r>
-              <a:rPr lang="en-US" dirty="0"/>
-              <a:t>4点に整理しました。最後のメッセージ——迷った段階でご相談いただきたい、を強調して締めます。</a:t>
+              <a:t>［46:30〜48:30／2分］まとめ</a:t>
+            </a:r>
+          </a:p>
+          <a:p>
+            <a:r>
+              <a:t>・①空白地帯の受け皿　②4条件を同時に満たす唯一　</a:t>
+            </a:r>
+          </a:p>
+          <a:p>
+            <a:r>
+              <a:t>  ③週1〜2回の全身アセスメント　④見つけて、つなぐ</a:t>
+            </a:r>
+          </a:p>
+          <a:p>
+            <a:r>
+              <a:t>・「もう入浴は難しいかもしれない」と感じた時が検討のタイミング</a:t>
+            </a:r>
+          </a:p>
+          <a:p>
+            <a:r>
+              <a:t>・「もう無理だろう」と思われていた方が入れることは多い</a:t>
+            </a:r>
+          </a:p>
+          <a:p>
+            <a:r>
+              <a:t>・導入の可否のご相談だけでも構いません</a:t>
             </a:r>
           </a:p>
         </p:txBody>
@@ -1420,8 +1629,37 @@
           <a:lstStyle/>
           <a:p>
             <a:r>
-              <a:rPr lang="en-US" dirty="0"/>
-              <a:t>ご相談は電話が最も早いです。初回アセスメントは無料である点をお伝えください。</a:t>
+              <a:t>［48:30〜50:00／1分半］連絡先</a:t>
+            </a:r>
+          </a:p>
+          <a:p>
+            <a:r>
+              <a:t>・冨永／093-695-7766 ← ゆっくり、2回言う（スライドを見ずに）</a:t>
+            </a:r>
+          </a:p>
+          <a:p>
+            <a:r>
+              <a:t>・初回アセスメント無料。「この方、入れますか」だけで結構です</a:t>
+            </a:r>
+          </a:p>
+          <a:p>
+            <a:r>
+              <a:t>・他サービスとの組み合わせも含めて提案します</a:t>
+            </a:r>
+          </a:p>
+          <a:p>
+            <a:r>
+              <a:t>・一礼してから質疑へ</a:t>
+            </a:r>
+          </a:p>
+          <a:p>
+            <a:r>
+              <a:t>【質疑の構え】分からないことは即答しない。</a:t>
+            </a:r>
+          </a:p>
+          <a:p>
+            <a:r>
+              <a:t>「確認してご連絡します。お名刺をいただけますか」で十分。</a:t>
             </a:r>
           </a:p>
         </p:txBody>
@@ -1514,8 +1752,32 @@
           <a:lstStyle/>
           <a:p>
             <a:r>
-              <a:rPr lang="en-US" dirty="0"/>
-              <a:t>入浴困難は「できない理由」が複数重なって起こります。清拭だけでは代替できない意義があることを押さえてください。</a:t>
+              <a:t>［9:30〜13:00／3分半］在宅で入浴できない現実</a:t>
+            </a:r>
+          </a:p>
+          <a:p>
+            <a:r>
+              <a:t>・左＝入浴を阻む5つの壁。「思い当たる顔が浮かぶのでは」で会場を見渡す</a:t>
+            </a:r>
+          </a:p>
+          <a:p>
+            <a:r>
+              <a:t>・右＝入浴の意義。いちばん下「生きる意欲」を自分の言葉で</a:t>
+            </a:r>
+          </a:p>
+          <a:p>
+            <a:r>
+              <a:t>  （お湯に浸かって表情が戻る瞬間の話）</a:t>
+            </a:r>
+          </a:p>
+          <a:p>
+            <a:r>
+              <a:t>・結論「入浴は贅沢ではなく、在宅療養を支えるインフラ」</a:t>
+            </a:r>
+          </a:p>
+          <a:p>
+            <a:r>
+              <a:t>【押していたら】右の5つは読まず、結論だけ。−1分</a:t>
             </a:r>
           </a:p>
         </p:txBody>
@@ -1608,8 +1870,37 @@
           <a:lstStyle/>
           <a:p>
             <a:r>
-              <a:rPr lang="en-US" dirty="0"/>
-              <a:t>3つの選択肢それぞれに限界があること、そしてその間に空白地帯があることが今日の出発点です。</a:t>
+              <a:t>［13:00〜16:30／3分半］選択肢と限界</a:t>
+            </a:r>
+          </a:p>
+          <a:p>
+            <a:r>
+              <a:t>・①訪問介護・看護＝浴室環境に左右され1名対応</a:t>
+            </a:r>
+          </a:p>
+          <a:p>
+            <a:r>
+              <a:t>・②デイ入浴＝通所が前提。重度・医療的ケアで受け入れ困難</a:t>
+            </a:r>
+          </a:p>
+          <a:p>
+            <a:r>
+              <a:t>・③訪問入浴＝浴槽持込み、看護師同行、移動負担ゼロ</a:t>
+            </a:r>
+          </a:p>
+          <a:p>
+            <a:r>
+              <a:t>・「③が優れているという話ではありません」← はっきり言う</a:t>
+            </a:r>
+          </a:p>
+          <a:p>
+            <a:r>
+              <a:t>・結論＝空白地帯「デイには行けない、でも清拭では足りない」</a:t>
+            </a:r>
+          </a:p>
+          <a:p>
+            <a:r>
+              <a:t>  この谷間の方は自分から声を上げられない</a:t>
             </a:r>
           </a:p>
         </p:txBody>
@@ -1702,8 +1993,47 @@
           <a:lstStyle/>
           <a:p>
             <a:r>
-              <a:rPr lang="en-US" dirty="0"/>
-              <a:t>この表が本日の中心です。訪問看護・訪問介護の入浴介助も比較に入れました。訪問入浴の違いは、専用浴槽を持参するため浴室環境に左右されない点と、3名体制で移乗できる点です。</a:t>
+              <a:t>［16:30〜20:30／4分］比較表　★山場</a:t>
+            </a:r>
+          </a:p>
+          <a:p>
+            <a:r>
+              <a:t>・全部読まない。訪問入浴の「列」を見せる</a:t>
+            </a:r>
+          </a:p>
+          <a:p>
+            <a:r>
+              <a:t>・拾う行は3つだけ</a:t>
+            </a:r>
+          </a:p>
+          <a:p>
+            <a:r>
+              <a:t>  ①浴室環境に左右されない（浴槽ごと持参。二階でも寝室でも）</a:t>
+            </a:r>
+          </a:p>
+          <a:p>
+            <a:r>
+              <a:t>  ②複数名での移乗（3名＝転倒・皮膚剥離を防ぐ）</a:t>
+            </a:r>
+          </a:p>
+          <a:p>
+            <a:r>
+              <a:t>  ③看護師が同行（後で詳しく）</a:t>
+            </a:r>
+          </a:p>
+          <a:p>
+            <a:r>
+              <a:t>・下の注記：要介護5が48.2%、要介護4が25.1% ← ゆっくり</a:t>
+            </a:r>
+          </a:p>
+          <a:p>
+            <a:r>
+              <a:t>・「重度化した在宅療養者の、最後の入浴手段」</a:t>
+            </a:r>
+          </a:p>
+          <a:p>
+            <a:r>
+              <a:t>【ツッコミ対策】デイを低く見ていない。通所できる方はデイが第一選択</a:t>
             </a:r>
           </a:p>
         </p:txBody>
@@ -1796,8 +2126,32 @@
           <a:lstStyle/>
           <a:p>
             <a:r>
-              <a:rPr lang="en-US" dirty="0"/>
-              <a:t>4条件のうち3つまでなら他サービスでも満たせます。4つ同時、という点が訪問入浴の存在理由です。</a:t>
+              <a:t>［20:30〜23:00／2分半］4つの条件</a:t>
+            </a:r>
+          </a:p>
+          <a:p>
+            <a:r>
+              <a:t>・「自宅で」「全身浴を」「看護師付きで」「重度でも」</a:t>
+            </a:r>
+          </a:p>
+          <a:p>
+            <a:r>
+              <a:t>・どれか1つなら他でも代替できる。同時に満たすのが訪問入浴だけ</a:t>
+            </a:r>
+          </a:p>
+          <a:p>
+            <a:r>
+              <a:t>・「重度化しても、自宅のまま、湯船に浸かり続ける」</a:t>
+            </a:r>
+          </a:p>
+          <a:p>
+            <a:r>
+              <a:t>・入浴が決め手で施設入所を選ぶご家族を何度も見てきた</a:t>
+            </a:r>
+          </a:p>
+          <a:p>
+            <a:r>
+              <a:t>【押していたら】4語＋結論だけ。−1分半</a:t>
             </a:r>
           </a:p>
         </p:txBody>
@@ -1890,8 +2244,37 @@
           <a:lstStyle/>
           <a:p>
             <a:r>
-              <a:rPr lang="en-US" dirty="0"/>
-              <a:t>準備・入浴・片付けの3区分、各15分で計45分以内です。入浴可否の判断と記録・連絡が看護師の関わる部分になります。</a:t>
+              <a:t>［23:00〜25:30／2分半］訪問の流れ</a:t>
+            </a:r>
+          </a:p>
+          <a:p>
+            <a:r>
+              <a:t>・15分＋15分＋15分＝45分以内</a:t>
+            </a:r>
+          </a:p>
+          <a:p>
+            <a:r>
+              <a:t>・★左下：発熱・血圧変動時は清拭や部分浴に切替、中止も</a:t>
+            </a:r>
+          </a:p>
+          <a:p>
+            <a:r>
+              <a:t>  「無理に入れないことも私たちの仕事」中止理由も必ず報告</a:t>
+            </a:r>
+          </a:p>
+          <a:p>
+            <a:r>
+              <a:t>・右下：2畳あれば設置可。給湯は車両でも自宅設備でも。養生あり</a:t>
+            </a:r>
+          </a:p>
+          <a:p>
+            <a:r>
+              <a:t>・「うちは狭いから無理」と言われたお宅もほとんど入れる</a:t>
+            </a:r>
+          </a:p>
+          <a:p>
+            <a:r>
+              <a:t>【押していたら】左下と右下だけ。−1分</a:t>
             </a:r>
           </a:p>
         </p:txBody>
@@ -1984,8 +2367,37 @@
           <a:lstStyle/>
           <a:p>
             <a:r>
-              <a:rPr lang="en-US" dirty="0"/>
-              <a:t>なぜ3名なのか、という質問をよく受けます。安全確保と、看護師が観察に専念できる体制のためです。</a:t>
+              <a:t>［25:30〜28:00／2分半］3名体制</a:t>
+            </a:r>
+          </a:p>
+          <a:p>
+            <a:r>
+              <a:t>・看護師1＋介護2。事業所の方針ではなく厚生労働省令の要件</a:t>
+            </a:r>
+          </a:p>
+          <a:p>
+            <a:r>
+              <a:t>・訪問入浴を使えば必ず看護職員が来る</a:t>
+            </a:r>
+          </a:p>
+          <a:p>
+            <a:r>
+              <a:t>・看護師＝バイタル／可否判断／褥瘡の観察と記録／急変時連絡／情報提供</a:t>
+            </a:r>
+          </a:p>
+          <a:p>
+            <a:r>
+              <a:t>・「観察と記録はするが処置はしない」← 次の次で詳述</a:t>
+            </a:r>
+          </a:p>
+          <a:p>
+            <a:r>
+              <a:t>・介護2名が移乗を担うので、看護師は観察と判断に専念できる</a:t>
+            </a:r>
+          </a:p>
+          <a:p>
+            <a:r>
+              <a:t>【押していたら】省令の3名体制＋専念できる、の2点。−1分半</a:t>
             </a:r>
           </a:p>
         </p:txBody>
@@ -2078,8 +2490,42 @@
           <a:lstStyle/>
           <a:p>
             <a:r>
-              <a:rPr lang="en-US" dirty="0"/>
-              <a:t>ここが訪問入浴の医療的価値です。褥瘡の初期発赤を最初に見つけるのは、入浴の場面が非常に多いです。</a:t>
+              <a:t>［28:00〜31:30／3分半］入浴は全身をみる場　※今日の中心</a:t>
+            </a:r>
+          </a:p>
+          <a:p>
+            <a:r>
+              <a:t>・衣服を脱いだ全身を、明るい場所で、毎回</a:t>
+            </a:r>
+          </a:p>
+          <a:p>
+            <a:r>
+              <a:t>・訪問診療・訪問看護は必要部位を見る。入浴は全身が、湯で伸びた皮膚で見える</a:t>
+            </a:r>
+          </a:p>
+          <a:p>
+            <a:r>
+              <a:t>・左＝仙骨部・踵部の発赤／下腿・足背の浮腫／白癬・湿疹・スキンテア／</a:t>
+            </a:r>
+          </a:p>
+          <a:p>
+            <a:r>
+              <a:t>  内出血・打撲痕（転倒の兆候。家族が言い出せないことも）</a:t>
+            </a:r>
+          </a:p>
+          <a:p>
+            <a:r>
+              <a:t>・中＝体型変化・筋肉量・骨突出（褥瘡リスク上昇）</a:t>
+            </a:r>
+          </a:p>
+          <a:p>
+            <a:r>
+              <a:t>・右＝その日のうちに主治医・訪看・ケアマネへ。必要なら写真</a:t>
+            </a:r>
+          </a:p>
+          <a:p>
+            <a:r>
+              <a:t>・「週1〜2回の入浴は、週1〜2回の全身アセスメント」← 言い切って間</a:t>
             </a:r>
           </a:p>
         </p:txBody>
@@ -2172,8 +2618,42 @@
           <a:lstStyle/>
           <a:p>
             <a:r>
-              <a:rPr lang="en-US" dirty="0"/>
-              <a:t>訪問入浴は介護保険サービスなので医療行為はできません。だから訪問看護との連携が前提になります。この線引きを明確にお伝えしてください。</a:t>
+              <a:t>［31:30〜35:00／3分半］役割分担</a:t>
+            </a:r>
+          </a:p>
+          <a:p>
+            <a:r>
+              <a:t>・「訪問入浴は介護保険サービス。医療行為は行えません」← ごまかさない</a:t>
+            </a:r>
+          </a:p>
+          <a:p>
+            <a:r>
+              <a:t>・左＝私たち：バイタル／全身観察／洗身洗髪・保湿／記録と当日報告</a:t>
+            </a:r>
+          </a:p>
+          <a:p>
+            <a:r>
+              <a:t>・右＝訪問看護へ：創傷処置・薬剤／点滴注射採血／カテーテル・ストーマ／</a:t>
+            </a:r>
+          </a:p>
+          <a:p>
+            <a:r>
+              <a:t>  喀痰吸引・経管栄養／医師の指示による医療的ケア全般</a:t>
+            </a:r>
+          </a:p>
+          <a:p>
+            <a:r>
+              <a:t>・例：仙骨部の発赤を見つけても、軟膏は塗らない。記録して当日中に伝える</a:t>
+            </a:r>
+          </a:p>
+          <a:p>
+            <a:r>
+              <a:t>・「私も看護師なので手を出したくなる。でも線引きが安全につながる」</a:t>
+            </a:r>
+          </a:p>
+          <a:p>
+            <a:r>
+              <a:t>・「見つけて、つなぐ」</a:t>
             </a:r>
           </a:p>
         </p:txBody>

--- a/houmon-nyuyoku-slides.pptx
+++ b/houmon-nyuyoku-slides.pptx
@@ -866,12 +866,22 @@
           </a:p>
           <a:p>
             <a:r>
+              <a:t>・★スタッフ紹介「介護職員の高崎と、武末です」→ 2名が一礼</a:t>
+            </a:r>
+          </a:p>
+          <a:p>
+            <a:r>
+              <a:t>  「のちほど移乗を、この3人で実際にお見せします」</a:t>
+            </a:r>
+          </a:p>
+          <a:p>
+            <a:r>
               <a:t>・「何か月もお風呂に入っていない方が実際にいる」→ ひと呼吸おく</a:t>
             </a:r>
           </a:p>
           <a:p>
             <a:r>
-              <a:t>・本日の流れ：動画7分 → スライド40分 → 質疑10分</a:t>
+              <a:t>・流れ：動画7分 → スライド → 移乗の実演 → 質疑5分</a:t>
             </a:r>
           </a:p>
           <a:p>
@@ -984,7 +994,7 @@
           <a:lstStyle/>
           <a:p>
             <a:r>
-              <a:t>［35:00〜38:30／3分半］連携のお願い　★山場・今日の本題</a:t>
+              <a:t>［32:30〜36:00／3分半］連携のお願い　★山場・今日の本題</a:t>
             </a:r>
           </a:p>
           <a:p>
@@ -1117,7 +1127,7 @@
           <a:lstStyle/>
           <a:p>
             <a:r>
-              <a:t>［38:30〜41:30／3分］在宅チームの一員として</a:t>
+              <a:t>［36:00〜38:30／2分半］在宅チームの一員として</a:t>
             </a:r>
           </a:p>
           <a:p>
@@ -1250,7 +1260,7 @@
           <a:lstStyle/>
           <a:p>
             <a:r>
-              <a:t>［41:30〜44:30／3分］単位数</a:t>
+              <a:t>［38:30〜41:00／2分半］単位数</a:t>
             </a:r>
           </a:p>
           <a:p>
@@ -1388,27 +1398,17 @@
           <a:lstStyle/>
           <a:p>
             <a:r>
-              <a:t>［44:30〜46:30／2分］利用者・ご家族の声</a:t>
-            </a:r>
-          </a:p>
-          <a:p>
-            <a:r>
-              <a:t>・80代要介護5のご本人「毎週のお風呂が楽しみで、それだけで前向きに」</a:t>
-            </a:r>
-          </a:p>
-          <a:p>
-            <a:r>
-              <a:t>  →「"それだけで"とおっしゃった」</a:t>
-            </a:r>
-          </a:p>
-          <a:p>
-            <a:r>
-              <a:t>・70代ご家族「一人では絶対に無理でした。プロに任せることで安心して</a:t>
-            </a:r>
-          </a:p>
-          <a:p>
-            <a:r>
-              <a:t>  介護できるようになりました」</a:t>
+              <a:t>［41:00〜42:30／1分半］利用者・ご家族の声</a:t>
+            </a:r>
+          </a:p>
+          <a:p>
+            <a:r>
+              <a:t>・80代要介護5「毎週のお風呂が楽しみで、それだけで前向きに」</a:t>
+            </a:r>
+          </a:p>
+          <a:p>
+            <a:r>
+              <a:t>・70代ご家族「一人では絶対に無理でした。安心して介護できるように」</a:t>
             </a:r>
           </a:p>
           <a:p>
@@ -1418,7 +1418,32 @@
           </a:p>
           <a:p>
             <a:r>
-              <a:t>【押していたら】このスライドを丸ごと飛ばす。−2分</a:t>
+              <a:t>【この直後に★移乗デモ（8分）】</a:t>
+            </a:r>
+          </a:p>
+          <a:p>
+            <a:r>
+              <a:t>  冨永＝説明／高崎・武末＝実演</a:t>
+            </a:r>
+          </a:p>
+          <a:p>
+            <a:r>
+              <a:t>  抱き上げ／担架／上下移動／座位回転 … それぞれ「どんな方に使うか」を1文</a:t>
+            </a:r>
+          </a:p>
+          <a:p>
+            <a:r>
+              <a:t>  体験は挙手を待つ。指名しない。腰・首の既往を確認。1人だけ</a:t>
+            </a:r>
+          </a:p>
+          <a:p>
+            <a:r>
+              <a:t>  手が挙がらなければ、スタッフだけでお見せするに切り替える</a:t>
+            </a:r>
+          </a:p>
+          <a:p>
+            <a:r>
+              <a:t>【押していたら】このスライドを丸ごと飛ばす。−1分半</a:t>
             </a:r>
           </a:p>
         </p:txBody>
@@ -1511,7 +1536,7 @@
           <a:lstStyle/>
           <a:p>
             <a:r>
-              <a:t>［46:30〜48:30／2分］まとめ</a:t>
+              <a:t>［50:30〜52:30／2分］まとめ</a:t>
             </a:r>
           </a:p>
           <a:p>
@@ -1629,7 +1654,7 @@
           <a:lstStyle/>
           <a:p>
             <a:r>
-              <a:t>［48:30〜50:00／1分半］連絡先</a:t>
+              <a:t>［52:30〜54:00／1分半］連絡先</a:t>
             </a:r>
           </a:p>
           <a:p>
@@ -1752,7 +1777,7 @@
           <a:lstStyle/>
           <a:p>
             <a:r>
-              <a:t>［9:30〜13:00／3分半］在宅で入浴できない現実</a:t>
+              <a:t>［9:30〜12:30／3分］在宅で入浴できない現実</a:t>
             </a:r>
           </a:p>
           <a:p>
@@ -1870,7 +1895,7 @@
           <a:lstStyle/>
           <a:p>
             <a:r>
-              <a:t>［13:00〜16:30／3分半］選択肢と限界</a:t>
+              <a:t>［12:30〜15:30／3分］選択肢と限界</a:t>
             </a:r>
           </a:p>
           <a:p>
@@ -1993,7 +2018,7 @@
           <a:lstStyle/>
           <a:p>
             <a:r>
-              <a:t>［16:30〜20:30／4分］比較表　★山場</a:t>
+              <a:t>［15:30〜19:30／4分］比較表　★山場</a:t>
             </a:r>
           </a:p>
           <a:p>
@@ -2126,7 +2151,7 @@
           <a:lstStyle/>
           <a:p>
             <a:r>
-              <a:t>［20:30〜23:00／2分半］4つの条件</a:t>
+              <a:t>［19:30〜21:30／2分］4つの条件</a:t>
             </a:r>
           </a:p>
           <a:p>
@@ -2244,7 +2269,7 @@
           <a:lstStyle/>
           <a:p>
             <a:r>
-              <a:t>［23:00〜25:30／2分半］訪問の流れ</a:t>
+              <a:t>［21:30〜23:30／2分］訪問の流れ</a:t>
             </a:r>
           </a:p>
           <a:p>
@@ -2367,7 +2392,7 @@
           <a:lstStyle/>
           <a:p>
             <a:r>
-              <a:t>［25:30〜28:00／2分半］3名体制</a:t>
+              <a:t>［23:30〜25:30／2分］3名体制</a:t>
             </a:r>
           </a:p>
           <a:p>
@@ -2387,17 +2412,17 @@
           </a:p>
           <a:p>
             <a:r>
-              <a:t>・「観察と記録はするが処置はしない」← 次の次で詳述</a:t>
-            </a:r>
-          </a:p>
-          <a:p>
-            <a:r>
               <a:t>・介護2名が移乗を担うので、看護師は観察と判断に専念できる</a:t>
             </a:r>
           </a:p>
           <a:p>
             <a:r>
-              <a:t>【押していたら】省令の3名体制＋専念できる、の2点。−1分半</a:t>
+              <a:t>・★締めに予告「この移乗は、のちほど実際にお見せします」</a:t>
+            </a:r>
+          </a:p>
+          <a:p>
+            <a:r>
+              <a:t>【押していたら】省令の3名体制＋専念できる＋予告、の3点。−1分</a:t>
             </a:r>
           </a:p>
         </p:txBody>
@@ -2490,7 +2515,7 @@
           <a:lstStyle/>
           <a:p>
             <a:r>
-              <a:t>［28:00〜31:30／3分半］入浴は全身をみる場　※今日の中心</a:t>
+              <a:t>［25:30〜29:00／3分半］入浴は全身をみる場　※今日の中心</a:t>
             </a:r>
           </a:p>
           <a:p>
@@ -2618,12 +2643,17 @@
           <a:lstStyle/>
           <a:p>
             <a:r>
-              <a:t>［31:30〜35:00／3分半］役割分担</a:t>
-            </a:r>
-          </a:p>
-          <a:p>
-            <a:r>
-              <a:t>・「訪問入浴は介護保険サービス。医療行為は行えません」← ごまかさない</a:t>
+              <a:t>［29:00〜32:30／3分半］役割分担　※言い方を変更</a:t>
+            </a:r>
+          </a:p>
+          <a:p>
+            <a:r>
+              <a:t>・「医療行為は行えません」とは言わない。「役割が違う」で通す</a:t>
+            </a:r>
+          </a:p>
+          <a:p>
+            <a:r>
+              <a:t>・訪問入浴＝介護保険、訪問看護＝医療保険。担う範囲が違う</a:t>
             </a:r>
           </a:p>
           <a:p>
@@ -2633,27 +2663,47 @@
           </a:p>
           <a:p>
             <a:r>
-              <a:t>・右＝訪問看護へ：創傷処置・薬剤／点滴注射採血／カテーテル・ストーマ／</a:t>
-            </a:r>
-          </a:p>
-          <a:p>
-            <a:r>
-              <a:t>  喀痰吸引・経管栄養／医師の指示による医療的ケア全般</a:t>
-            </a:r>
-          </a:p>
-          <a:p>
-            <a:r>
-              <a:t>・例：仙骨部の発赤を見つけても、軟膏は塗らない。記録して当日中に伝える</a:t>
-            </a:r>
-          </a:p>
-          <a:p>
-            <a:r>
-              <a:t>・「私も看護師なので手を出したくなる。でも線引きが安全につながる」</a:t>
-            </a:r>
-          </a:p>
-          <a:p>
-            <a:r>
-              <a:t>・「見つけて、つなぐ」</a:t>
+              <a:t>・★その場でできることはしている</a:t>
+            </a:r>
+          </a:p>
+          <a:p>
+            <a:r>
+              <a:t>  - 保湿剤・処方された軟膏の塗布（褥瘡の処置を除く）＝医行為に当たらない</a:t>
+            </a:r>
+          </a:p>
+          <a:p>
+            <a:r>
+              <a:t>  - 急変時の応急対応、吸引にも対応する</a:t>
+            </a:r>
+          </a:p>
+          <a:p>
+            <a:r>
+              <a:t>  - 「できないのではなく、継続的に担うのが役割ではない」</a:t>
+            </a:r>
+          </a:p>
+          <a:p>
+            <a:r>
+              <a:t>・右＝訪問看護へ：創傷の継続的処置／点滴注射採血／カテーテル・ストーマ／</a:t>
+            </a:r>
+          </a:p>
+          <a:p>
+            <a:r>
+              <a:t>  経管栄養／医師の指示による計画的な医療的ケア</a:t>
+            </a:r>
+          </a:p>
+          <a:p>
+            <a:r>
+              <a:t>・例：仙骨部の発赤 → 当日中に訪看と主治医へ。処置の継続は訪看の役割</a:t>
+            </a:r>
+          </a:p>
+          <a:p>
+            <a:r>
+              <a:t>・「見つけて、つなぐ。そのうえで、その場でできることはする」</a:t>
+            </a:r>
+          </a:p>
+          <a:p>
+            <a:r>
+              <a:t>【注意】ふだん実際にやっていることだけを話す。根拠は平成17年の厚労省通知</a:t>
             </a:r>
           </a:p>
         </p:txBody>

--- a/houmon-nyuyoku-slides.pptx
+++ b/houmon-nyuyoku-slides.pptx
@@ -21,6 +21,7 @@
     <p:sldId id="266" r:id="rId12"/>
     <p:sldId id="267" r:id="rId13"/>
     <p:sldId id="268" r:id="rId14"/>
+    <p:sldId id="271" r:id="rId24"/>
     <p:sldId id="269" r:id="rId15"/>
     <p:sldId id="270" r:id="rId16"/>
   </p:sldIdLst>
@@ -1725,6 +1726,102 @@
 </p:notes>
 </file>
 
+<file path=ppt/notesSlides/notesSlide16.xml><?xml version="1.0" encoding="utf-8"?>
+<p:notes xmlns:a="http://schemas.openxmlformats.org/drawingml/2006/main" xmlns:p="http://schemas.openxmlformats.org/presentationml/2006/main" xmlns:r="http://schemas.openxmlformats.org/officeDocument/2006/relationships">
+  <p:cSld>
+    <p:spTree>
+      <p:nvGrpSpPr>
+        <p:cNvPr id="1" name=""/>
+        <p:cNvGrpSpPr/>
+        <p:nvPr/>
+      </p:nvGrpSpPr>
+      <p:grpSpPr>
+        <a:xfrm>
+          <a:off x="0" y="0"/>
+          <a:ext cx="0" cy="0"/>
+          <a:chOff x="0" y="0"/>
+          <a:chExt cx="0" cy="0"/>
+        </a:xfrm>
+      </p:grpSpPr>
+      <p:sp>
+        <p:nvSpPr>
+          <p:cNvPr id="3" name="Notes Placeholder 2"/>
+          <p:cNvSpPr>
+            <a:spLocks noGrp="1"/>
+          </p:cNvSpPr>
+          <p:nvPr>
+            <p:ph type="body" idx="1"/>
+          </p:nvPr>
+        </p:nvSpPr>
+        <p:spPr/>
+        <p:txBody>
+          <a:bodyPr/>
+          <a:lstStyle/>
+          <a:p>
+            <a:r>
+              <a:t>［42:30〜50:30／8分］★移乗デモンストレーション</a:t>
+            </a:r>
+          </a:p>
+          <a:p>
+            <a:r>
+              <a:t>・冨永＝説明と進行／高崎・武末＝実演</a:t>
+            </a:r>
+          </a:p>
+          <a:p>
+            <a:r>
+              <a:t>・導入「ここで少し、体を動かしていただきます」</a:t>
+            </a:r>
+          </a:p>
+          <a:p>
+            <a:r>
+              <a:t>・4つを実演しながら説明。名前だけでなく「どんな方に使うか」を必ず添える</a:t>
+            </a:r>
+          </a:p>
+          <a:p>
+            <a:r>
+              <a:t>  抱き上げ＝小柄・拘縮少ない／担架＝大柄・全介助／</a:t>
+            </a:r>
+          </a:p>
+          <a:p>
+            <a:r>
+              <a:t>  上下＝高さを合わせ水平に／座位回転＝座位が保てる方</a:t>
+            </a:r>
+          </a:p>
+          <a:p>
+            <a:r>
+              <a:t>・体験（3分）「どなたか、お体を預けてみていただけませんか」</a:t>
+            </a:r>
+          </a:p>
+          <a:p>
+            <a:r>
+              <a:t>  → 挙手を待つ。指名しない。腰・首の既往を確認。1人だけ。担架がおすすめ</a:t>
+            </a:r>
+          </a:p>
+          <a:p>
+            <a:r>
+              <a:t>  → 手が挙がらなければ「ではスタッフでお見せします」に即切り替え</a:t>
+            </a:r>
+          </a:p>
+          <a:p>
+            <a:r>
+              <a:t>・締め「持ち上げられる側は、怖いものです。だからその方ごとに決めています」</a:t>
+            </a:r>
+          </a:p>
+          <a:p>
+            <a:r>
+              <a:t>【押していたら】体験を省いて実演だけ −3分／2方法に絞る さらに−2分</a:t>
+            </a:r>
+          </a:p>
+        </p:txBody>
+      </p:sp>
+    </p:spTree>
+  </p:cSld>
+  <p:clrMapOvr>
+    <a:masterClrMapping/>
+  </p:clrMapOvr>
+</p:notes>
+</file>
+
 <file path=ppt/notesSlides/notesSlide2.xml><?xml version="1.0" encoding="utf-8"?>
 <p:notes xmlns:a="http://schemas.openxmlformats.org/drawingml/2006/main" xmlns:r="http://schemas.openxmlformats.org/officeDocument/2006/relationships" xmlns:p="http://schemas.openxmlformats.org/presentationml/2006/main">
   <p:cSld>
@@ -8612,6 +8709,1451 @@
               <a:t>初回アセスメントは無料でお伺いします。導入の可否判断からお手伝いします。</a:t>
             </a:r>
             <a:endParaRPr lang="en-US" sz="1200" dirty="0"/>
+          </a:p>
+        </p:txBody>
+      </p:sp>
+    </p:spTree>
+  </p:cSld>
+  <p:clrMapOvr>
+    <a:masterClrMapping/>
+  </p:clrMapOvr>
+</p:sld>
+</file>
+
+<file path=ppt/slides/slide16.xml><?xml version="1.0" encoding="utf-8"?>
+<p:sld xmlns:a="http://schemas.openxmlformats.org/drawingml/2006/main" xmlns:p="http://schemas.openxmlformats.org/presentationml/2006/main" xmlns:r="http://schemas.openxmlformats.org/officeDocument/2006/relationships">
+  <p:cSld>
+    <p:spTree>
+      <p:nvGrpSpPr>
+        <p:cNvPr id="1" name=""/>
+        <p:cNvGrpSpPr/>
+        <p:nvPr/>
+      </p:nvGrpSpPr>
+      <p:grpSpPr/>
+      <p:sp>
+        <p:nvSpPr>
+          <p:cNvPr id="2" name="Rounded Rectangle 1"/>
+          <p:cNvSpPr/>
+          <p:nvPr/>
+        </p:nvSpPr>
+        <p:spPr>
+          <a:xfrm>
+            <a:off x="566928" y="329184"/>
+            <a:ext cx="1481328" cy="310896"/>
+          </a:xfrm>
+          <a:prstGeom prst="roundRect">
+            <a:avLst>
+              <a:gd name="adj" fmla="val 14705"/>
+            </a:avLst>
+          </a:prstGeom>
+          <a:solidFill>
+            <a:srgbClr val="1D9E75"/>
+          </a:solidFill>
+          <a:ln>
+            <a:noFill/>
+          </a:ln>
+          <a:effectLst/>
+        </p:spPr>
+        <p:style>
+          <a:lnRef idx="1">
+            <a:schemeClr val="accent1"/>
+          </a:lnRef>
+          <a:fillRef idx="3">
+            <a:schemeClr val="accent1"/>
+          </a:fillRef>
+          <a:effectRef idx="2">
+            <a:schemeClr val="accent1"/>
+          </a:effectRef>
+          <a:fontRef idx="minor">
+            <a:schemeClr val="lt1"/>
+          </a:fontRef>
+        </p:style>
+        <p:txBody>
+          <a:bodyPr rtlCol="0" anchor="ctr"/>
+          <a:lstStyle/>
+          <a:p>
+            <a:pPr algn="ctr"/>
+          </a:p>
+        </p:txBody>
+      </p:sp>
+      <p:sp>
+        <p:nvSpPr>
+          <p:cNvPr id="3" name="TextBox 2"/>
+          <p:cNvSpPr txBox="1"/>
+          <p:nvPr/>
+        </p:nvSpPr>
+        <p:spPr>
+          <a:xfrm>
+            <a:off x="566928" y="329184"/>
+            <a:ext cx="1481328" cy="310896"/>
+          </a:xfrm>
+          <a:prstGeom prst="rect">
+            <a:avLst/>
+          </a:prstGeom>
+          <a:noFill/>
+        </p:spPr>
+        <p:txBody>
+          <a:bodyPr wrap="square" anchor="ctr" lIns="0" rIns="0" tIns="0" bIns="0">
+            <a:spAutoFit/>
+          </a:bodyPr>
+          <a:lstStyle/>
+          <a:p>
+            <a:pPr algn="ctr"/>
+            <a:r>
+              <a:rPr sz="1200" b="1">
+                <a:solidFill>
+                  <a:srgbClr val="FFFFFF"/>
+                </a:solidFill>
+                <a:latin typeface="Meiryo"/>
+              </a:rPr>
+              <a:t>DEMO</a:t>
+            </a:r>
+          </a:p>
+        </p:txBody>
+      </p:sp>
+      <p:sp>
+        <p:nvSpPr>
+          <p:cNvPr id="4" name="TextBox 3"/>
+          <p:cNvSpPr txBox="1"/>
+          <p:nvPr/>
+        </p:nvSpPr>
+        <p:spPr>
+          <a:xfrm>
+            <a:off x="2194560" y="329184"/>
+            <a:ext cx="5486400" cy="310896"/>
+          </a:xfrm>
+          <a:prstGeom prst="rect">
+            <a:avLst/>
+          </a:prstGeom>
+          <a:noFill/>
+        </p:spPr>
+        <p:txBody>
+          <a:bodyPr wrap="square" anchor="ctr" lIns="0" rIns="0" tIns="0" bIns="0">
+            <a:spAutoFit/>
+          </a:bodyPr>
+          <a:lstStyle/>
+          <a:p>
+            <a:pPr algn="l"/>
+            <a:r>
+              <a:rPr sz="1300" b="0">
+                <a:solidFill>
+                  <a:srgbClr val="566573"/>
+                </a:solidFill>
+                <a:latin typeface="Meiryo"/>
+              </a:rPr>
+              <a:t>移乗の実演</a:t>
+            </a:r>
+          </a:p>
+        </p:txBody>
+      </p:sp>
+      <p:sp>
+        <p:nvSpPr>
+          <p:cNvPr id="5" name="TextBox 4"/>
+          <p:cNvSpPr txBox="1"/>
+          <p:nvPr/>
+        </p:nvSpPr>
+        <p:spPr>
+          <a:xfrm>
+            <a:off x="566928" y="749808"/>
+            <a:ext cx="11055096" cy="566928"/>
+          </a:xfrm>
+          <a:prstGeom prst="rect">
+            <a:avLst/>
+          </a:prstGeom>
+          <a:noFill/>
+        </p:spPr>
+        <p:txBody>
+          <a:bodyPr wrap="square" anchor="t" lIns="0" rIns="0" tIns="0" bIns="0">
+            <a:spAutoFit/>
+          </a:bodyPr>
+          <a:lstStyle/>
+          <a:p>
+            <a:pPr algn="l"/>
+            <a:r>
+              <a:rPr sz="3400" b="1">
+                <a:solidFill>
+                  <a:srgbClr val="1A5276"/>
+                </a:solidFill>
+                <a:latin typeface="Meiryo"/>
+              </a:rPr>
+              <a:t>お体を、どうお運びするか</a:t>
+            </a:r>
+          </a:p>
+        </p:txBody>
+      </p:sp>
+      <p:sp>
+        <p:nvSpPr>
+          <p:cNvPr id="6" name="TextBox 5"/>
+          <p:cNvSpPr txBox="1"/>
+          <p:nvPr/>
+        </p:nvSpPr>
+        <p:spPr>
+          <a:xfrm>
+            <a:off x="566928" y="1463040"/>
+            <a:ext cx="11055096" cy="310896"/>
+          </a:xfrm>
+          <a:prstGeom prst="rect">
+            <a:avLst/>
+          </a:prstGeom>
+          <a:noFill/>
+        </p:spPr>
+        <p:txBody>
+          <a:bodyPr wrap="square" anchor="t" lIns="0" rIns="0" tIns="0" bIns="0">
+            <a:spAutoFit/>
+          </a:bodyPr>
+          <a:lstStyle/>
+          <a:p>
+            <a:pPr algn="l"/>
+            <a:r>
+              <a:rPr sz="1400" b="0">
+                <a:solidFill>
+                  <a:srgbClr val="566573"/>
+                </a:solidFill>
+                <a:latin typeface="Meiryo"/>
+              </a:rPr>
+              <a:t>浴槽へお移しする方法は4つ。その方の状態に合わせて選びます。</a:t>
+            </a:r>
+          </a:p>
+        </p:txBody>
+      </p:sp>
+      <p:sp>
+        <p:nvSpPr>
+          <p:cNvPr id="7" name="Rounded Rectangle 6"/>
+          <p:cNvSpPr/>
+          <p:nvPr/>
+        </p:nvSpPr>
+        <p:spPr>
+          <a:xfrm>
+            <a:off x="566928" y="2011680"/>
+            <a:ext cx="2697480" cy="2788920"/>
+          </a:xfrm>
+          <a:prstGeom prst="roundRect">
+            <a:avLst>
+              <a:gd name="adj" fmla="val 3389"/>
+            </a:avLst>
+          </a:prstGeom>
+          <a:solidFill>
+            <a:srgbClr val="F4F8FA"/>
+          </a:solidFill>
+          <a:ln>
+            <a:noFill/>
+          </a:ln>
+          <a:effectLst/>
+        </p:spPr>
+        <p:style>
+          <a:lnRef idx="1">
+            <a:schemeClr val="accent1"/>
+          </a:lnRef>
+          <a:fillRef idx="3">
+            <a:schemeClr val="accent1"/>
+          </a:fillRef>
+          <a:effectRef idx="2">
+            <a:schemeClr val="accent1"/>
+          </a:effectRef>
+          <a:fontRef idx="minor">
+            <a:schemeClr val="lt1"/>
+          </a:fontRef>
+        </p:style>
+        <p:txBody>
+          <a:bodyPr rtlCol="0" anchor="ctr"/>
+          <a:lstStyle/>
+          <a:p>
+            <a:pPr algn="ctr"/>
+          </a:p>
+        </p:txBody>
+      </p:sp>
+      <p:sp>
+        <p:nvSpPr>
+          <p:cNvPr id="8" name="Rounded Rectangle 7"/>
+          <p:cNvSpPr/>
+          <p:nvPr/>
+        </p:nvSpPr>
+        <p:spPr>
+          <a:xfrm>
+            <a:off x="566928" y="2011680"/>
+            <a:ext cx="2697480" cy="566928"/>
+          </a:xfrm>
+          <a:prstGeom prst="roundRect">
+            <a:avLst>
+              <a:gd name="adj" fmla="val 16129"/>
+            </a:avLst>
+          </a:prstGeom>
+          <a:solidFill>
+            <a:srgbClr val="1A5276"/>
+          </a:solidFill>
+          <a:ln>
+            <a:noFill/>
+          </a:ln>
+          <a:effectLst/>
+        </p:spPr>
+        <p:style>
+          <a:lnRef idx="1">
+            <a:schemeClr val="accent1"/>
+          </a:lnRef>
+          <a:fillRef idx="3">
+            <a:schemeClr val="accent1"/>
+          </a:fillRef>
+          <a:effectRef idx="2">
+            <a:schemeClr val="accent1"/>
+          </a:effectRef>
+          <a:fontRef idx="minor">
+            <a:schemeClr val="lt1"/>
+          </a:fontRef>
+        </p:style>
+        <p:txBody>
+          <a:bodyPr rtlCol="0" anchor="ctr"/>
+          <a:lstStyle/>
+          <a:p>
+            <a:pPr algn="ctr"/>
+          </a:p>
+        </p:txBody>
+      </p:sp>
+      <p:sp>
+        <p:nvSpPr>
+          <p:cNvPr id="9" name="TextBox 8"/>
+          <p:cNvSpPr txBox="1"/>
+          <p:nvPr/>
+        </p:nvSpPr>
+        <p:spPr>
+          <a:xfrm>
+            <a:off x="566928" y="2011680"/>
+            <a:ext cx="2697480" cy="566928"/>
+          </a:xfrm>
+          <a:prstGeom prst="rect">
+            <a:avLst/>
+          </a:prstGeom>
+          <a:noFill/>
+        </p:spPr>
+        <p:txBody>
+          <a:bodyPr wrap="square" anchor="ctr" lIns="0" rIns="0" tIns="0" bIns="0">
+            <a:spAutoFit/>
+          </a:bodyPr>
+          <a:lstStyle/>
+          <a:p>
+            <a:pPr algn="ctr"/>
+            <a:r>
+              <a:rPr sz="1700" b="1">
+                <a:solidFill>
+                  <a:srgbClr val="FFFFFF"/>
+                </a:solidFill>
+                <a:latin typeface="Meiryo"/>
+              </a:rPr>
+              <a:t>抱き上げ移動</a:t>
+            </a:r>
+          </a:p>
+        </p:txBody>
+      </p:sp>
+      <p:sp>
+        <p:nvSpPr>
+          <p:cNvPr id="10" name="TextBox 9"/>
+          <p:cNvSpPr txBox="1"/>
+          <p:nvPr/>
+        </p:nvSpPr>
+        <p:spPr>
+          <a:xfrm>
+            <a:off x="768096" y="2743200"/>
+            <a:ext cx="2295144" cy="237744"/>
+          </a:xfrm>
+          <a:prstGeom prst="rect">
+            <a:avLst/>
+          </a:prstGeom>
+          <a:noFill/>
+        </p:spPr>
+        <p:txBody>
+          <a:bodyPr wrap="square" anchor="t" lIns="0" rIns="0" tIns="0" bIns="0">
+            <a:spAutoFit/>
+          </a:bodyPr>
+          <a:lstStyle/>
+          <a:p>
+            <a:pPr algn="l"/>
+            <a:r>
+              <a:rPr sz="1100" b="1">
+                <a:solidFill>
+                  <a:srgbClr val="1D9E75"/>
+                </a:solidFill>
+                <a:latin typeface="Meiryo"/>
+              </a:rPr>
+              <a:t>こんな方に</a:t>
+            </a:r>
+          </a:p>
+        </p:txBody>
+      </p:sp>
+      <p:sp>
+        <p:nvSpPr>
+          <p:cNvPr id="11" name="TextBox 10"/>
+          <p:cNvSpPr txBox="1"/>
+          <p:nvPr/>
+        </p:nvSpPr>
+        <p:spPr>
+          <a:xfrm>
+            <a:off x="768096" y="3035808"/>
+            <a:ext cx="2295144" cy="1005840"/>
+          </a:xfrm>
+          <a:prstGeom prst="rect">
+            <a:avLst/>
+          </a:prstGeom>
+          <a:noFill/>
+        </p:spPr>
+        <p:txBody>
+          <a:bodyPr wrap="square" anchor="t" lIns="0" rIns="0" tIns="0" bIns="0">
+            <a:spAutoFit/>
+          </a:bodyPr>
+          <a:lstStyle/>
+          <a:p>
+            <a:pPr algn="l"/>
+            <a:r>
+              <a:rPr sz="1350" b="0">
+                <a:solidFill>
+                  <a:srgbClr val="1C2833"/>
+                </a:solidFill>
+                <a:latin typeface="Meiryo"/>
+              </a:rPr>
+              <a:t>体格が小さく、拘縮の</a:t>
+            </a:r>
+          </a:p>
+          <a:p>
+            <a:pPr algn="l">
+              <a:spcBef>
+                <a:spcPts val="400"/>
+              </a:spcBef>
+            </a:pPr>
+            <a:r>
+              <a:rPr sz="1350" b="0">
+                <a:solidFill>
+                  <a:srgbClr val="1C2833"/>
+                </a:solidFill>
+                <a:latin typeface="Meiryo"/>
+              </a:rPr>
+              <a:t>少ない方</a:t>
+            </a:r>
+          </a:p>
+        </p:txBody>
+      </p:sp>
+      <p:sp>
+        <p:nvSpPr>
+          <p:cNvPr id="12" name="Rounded Rectangle 11"/>
+          <p:cNvSpPr/>
+          <p:nvPr/>
+        </p:nvSpPr>
+        <p:spPr>
+          <a:xfrm>
+            <a:off x="768096" y="4096512"/>
+            <a:ext cx="2295144" cy="457200"/>
+          </a:xfrm>
+          <a:prstGeom prst="roundRect">
+            <a:avLst>
+              <a:gd name="adj" fmla="val 20000"/>
+            </a:avLst>
+          </a:prstGeom>
+          <a:solidFill>
+            <a:srgbClr val="EAF7F1"/>
+          </a:solidFill>
+          <a:ln>
+            <a:noFill/>
+          </a:ln>
+          <a:effectLst/>
+        </p:spPr>
+        <p:style>
+          <a:lnRef idx="1">
+            <a:schemeClr val="accent1"/>
+          </a:lnRef>
+          <a:fillRef idx="3">
+            <a:schemeClr val="accent1"/>
+          </a:fillRef>
+          <a:effectRef idx="2">
+            <a:schemeClr val="accent1"/>
+          </a:effectRef>
+          <a:fontRef idx="minor">
+            <a:schemeClr val="lt1"/>
+          </a:fontRef>
+        </p:style>
+        <p:txBody>
+          <a:bodyPr rtlCol="0" anchor="ctr"/>
+          <a:lstStyle/>
+          <a:p>
+            <a:pPr algn="ctr"/>
+          </a:p>
+        </p:txBody>
+      </p:sp>
+      <p:sp>
+        <p:nvSpPr>
+          <p:cNvPr id="13" name="TextBox 12"/>
+          <p:cNvSpPr txBox="1"/>
+          <p:nvPr/>
+        </p:nvSpPr>
+        <p:spPr>
+          <a:xfrm>
+            <a:off x="768096" y="4096512"/>
+            <a:ext cx="2295144" cy="457200"/>
+          </a:xfrm>
+          <a:prstGeom prst="rect">
+            <a:avLst/>
+          </a:prstGeom>
+          <a:noFill/>
+        </p:spPr>
+        <p:txBody>
+          <a:bodyPr wrap="square" anchor="ctr" lIns="0" rIns="0" tIns="0" bIns="0">
+            <a:spAutoFit/>
+          </a:bodyPr>
+          <a:lstStyle/>
+          <a:p>
+            <a:pPr algn="ctr"/>
+            <a:r>
+              <a:rPr sz="1300" b="1">
+                <a:solidFill>
+                  <a:srgbClr val="1D9E75"/>
+                </a:solidFill>
+                <a:latin typeface="Meiryo"/>
+              </a:rPr>
+              <a:t>いちばん短時間</a:t>
+            </a:r>
+          </a:p>
+        </p:txBody>
+      </p:sp>
+      <p:sp>
+        <p:nvSpPr>
+          <p:cNvPr id="14" name="Rounded Rectangle 13"/>
+          <p:cNvSpPr/>
+          <p:nvPr/>
+        </p:nvSpPr>
+        <p:spPr>
+          <a:xfrm>
+            <a:off x="3355848" y="2011680"/>
+            <a:ext cx="2697480" cy="2788920"/>
+          </a:xfrm>
+          <a:prstGeom prst="roundRect">
+            <a:avLst>
+              <a:gd name="adj" fmla="val 3389"/>
+            </a:avLst>
+          </a:prstGeom>
+          <a:solidFill>
+            <a:srgbClr val="F4F8FA"/>
+          </a:solidFill>
+          <a:ln>
+            <a:noFill/>
+          </a:ln>
+          <a:effectLst/>
+        </p:spPr>
+        <p:style>
+          <a:lnRef idx="1">
+            <a:schemeClr val="accent1"/>
+          </a:lnRef>
+          <a:fillRef idx="3">
+            <a:schemeClr val="accent1"/>
+          </a:fillRef>
+          <a:effectRef idx="2">
+            <a:schemeClr val="accent1"/>
+          </a:effectRef>
+          <a:fontRef idx="minor">
+            <a:schemeClr val="lt1"/>
+          </a:fontRef>
+        </p:style>
+        <p:txBody>
+          <a:bodyPr rtlCol="0" anchor="ctr"/>
+          <a:lstStyle/>
+          <a:p>
+            <a:pPr algn="ctr"/>
+          </a:p>
+        </p:txBody>
+      </p:sp>
+      <p:sp>
+        <p:nvSpPr>
+          <p:cNvPr id="15" name="Rounded Rectangle 14"/>
+          <p:cNvSpPr/>
+          <p:nvPr/>
+        </p:nvSpPr>
+        <p:spPr>
+          <a:xfrm>
+            <a:off x="3355848" y="2011680"/>
+            <a:ext cx="2697480" cy="566928"/>
+          </a:xfrm>
+          <a:prstGeom prst="roundRect">
+            <a:avLst>
+              <a:gd name="adj" fmla="val 16129"/>
+            </a:avLst>
+          </a:prstGeom>
+          <a:solidFill>
+            <a:srgbClr val="1A5276"/>
+          </a:solidFill>
+          <a:ln>
+            <a:noFill/>
+          </a:ln>
+          <a:effectLst/>
+        </p:spPr>
+        <p:style>
+          <a:lnRef idx="1">
+            <a:schemeClr val="accent1"/>
+          </a:lnRef>
+          <a:fillRef idx="3">
+            <a:schemeClr val="accent1"/>
+          </a:fillRef>
+          <a:effectRef idx="2">
+            <a:schemeClr val="accent1"/>
+          </a:effectRef>
+          <a:fontRef idx="minor">
+            <a:schemeClr val="lt1"/>
+          </a:fontRef>
+        </p:style>
+        <p:txBody>
+          <a:bodyPr rtlCol="0" anchor="ctr"/>
+          <a:lstStyle/>
+          <a:p>
+            <a:pPr algn="ctr"/>
+          </a:p>
+        </p:txBody>
+      </p:sp>
+      <p:sp>
+        <p:nvSpPr>
+          <p:cNvPr id="16" name="TextBox 15"/>
+          <p:cNvSpPr txBox="1"/>
+          <p:nvPr/>
+        </p:nvSpPr>
+        <p:spPr>
+          <a:xfrm>
+            <a:off x="3355848" y="2011680"/>
+            <a:ext cx="2697480" cy="566928"/>
+          </a:xfrm>
+          <a:prstGeom prst="rect">
+            <a:avLst/>
+          </a:prstGeom>
+          <a:noFill/>
+        </p:spPr>
+        <p:txBody>
+          <a:bodyPr wrap="square" anchor="ctr" lIns="0" rIns="0" tIns="0" bIns="0">
+            <a:spAutoFit/>
+          </a:bodyPr>
+          <a:lstStyle/>
+          <a:p>
+            <a:pPr algn="ctr"/>
+            <a:r>
+              <a:rPr sz="1700" b="1">
+                <a:solidFill>
+                  <a:srgbClr val="FFFFFF"/>
+                </a:solidFill>
+                <a:latin typeface="Meiryo"/>
+              </a:rPr>
+              <a:t>担架移動</a:t>
+            </a:r>
+          </a:p>
+        </p:txBody>
+      </p:sp>
+      <p:sp>
+        <p:nvSpPr>
+          <p:cNvPr id="17" name="TextBox 16"/>
+          <p:cNvSpPr txBox="1"/>
+          <p:nvPr/>
+        </p:nvSpPr>
+        <p:spPr>
+          <a:xfrm>
+            <a:off x="3557016" y="2743200"/>
+            <a:ext cx="2295144" cy="237744"/>
+          </a:xfrm>
+          <a:prstGeom prst="rect">
+            <a:avLst/>
+          </a:prstGeom>
+          <a:noFill/>
+        </p:spPr>
+        <p:txBody>
+          <a:bodyPr wrap="square" anchor="t" lIns="0" rIns="0" tIns="0" bIns="0">
+            <a:spAutoFit/>
+          </a:bodyPr>
+          <a:lstStyle/>
+          <a:p>
+            <a:pPr algn="l"/>
+            <a:r>
+              <a:rPr sz="1100" b="1">
+                <a:solidFill>
+                  <a:srgbClr val="1D9E75"/>
+                </a:solidFill>
+                <a:latin typeface="Meiryo"/>
+              </a:rPr>
+              <a:t>こんな方に</a:t>
+            </a:r>
+          </a:p>
+        </p:txBody>
+      </p:sp>
+      <p:sp>
+        <p:nvSpPr>
+          <p:cNvPr id="18" name="TextBox 17"/>
+          <p:cNvSpPr txBox="1"/>
+          <p:nvPr/>
+        </p:nvSpPr>
+        <p:spPr>
+          <a:xfrm>
+            <a:off x="3557016" y="3035808"/>
+            <a:ext cx="2295144" cy="1005840"/>
+          </a:xfrm>
+          <a:prstGeom prst="rect">
+            <a:avLst/>
+          </a:prstGeom>
+          <a:noFill/>
+        </p:spPr>
+        <p:txBody>
+          <a:bodyPr wrap="square" anchor="t" lIns="0" rIns="0" tIns="0" bIns="0">
+            <a:spAutoFit/>
+          </a:bodyPr>
+          <a:lstStyle/>
+          <a:p>
+            <a:pPr algn="l"/>
+            <a:r>
+              <a:rPr sz="1350" b="0">
+                <a:solidFill>
+                  <a:srgbClr val="1C2833"/>
+                </a:solidFill>
+                <a:latin typeface="Meiryo"/>
+              </a:rPr>
+              <a:t>体の大きい方、</a:t>
+            </a:r>
+          </a:p>
+          <a:p>
+            <a:pPr algn="l">
+              <a:spcBef>
+                <a:spcPts val="400"/>
+              </a:spcBef>
+            </a:pPr>
+            <a:r>
+              <a:rPr sz="1350" b="0">
+                <a:solidFill>
+                  <a:srgbClr val="1C2833"/>
+                </a:solidFill>
+                <a:latin typeface="Meiryo"/>
+              </a:rPr>
+              <a:t>全介助の方</a:t>
+            </a:r>
+          </a:p>
+        </p:txBody>
+      </p:sp>
+      <p:sp>
+        <p:nvSpPr>
+          <p:cNvPr id="19" name="Rounded Rectangle 18"/>
+          <p:cNvSpPr/>
+          <p:nvPr/>
+        </p:nvSpPr>
+        <p:spPr>
+          <a:xfrm>
+            <a:off x="3557016" y="4096512"/>
+            <a:ext cx="2295144" cy="457200"/>
+          </a:xfrm>
+          <a:prstGeom prst="roundRect">
+            <a:avLst>
+              <a:gd name="adj" fmla="val 20000"/>
+            </a:avLst>
+          </a:prstGeom>
+          <a:solidFill>
+            <a:srgbClr val="EAF7F1"/>
+          </a:solidFill>
+          <a:ln>
+            <a:noFill/>
+          </a:ln>
+          <a:effectLst/>
+        </p:spPr>
+        <p:style>
+          <a:lnRef idx="1">
+            <a:schemeClr val="accent1"/>
+          </a:lnRef>
+          <a:fillRef idx="3">
+            <a:schemeClr val="accent1"/>
+          </a:fillRef>
+          <a:effectRef idx="2">
+            <a:schemeClr val="accent1"/>
+          </a:effectRef>
+          <a:fontRef idx="minor">
+            <a:schemeClr val="lt1"/>
+          </a:fontRef>
+        </p:style>
+        <p:txBody>
+          <a:bodyPr rtlCol="0" anchor="ctr"/>
+          <a:lstStyle/>
+          <a:p>
+            <a:pPr algn="ctr"/>
+          </a:p>
+        </p:txBody>
+      </p:sp>
+      <p:sp>
+        <p:nvSpPr>
+          <p:cNvPr id="20" name="TextBox 19"/>
+          <p:cNvSpPr txBox="1"/>
+          <p:nvPr/>
+        </p:nvSpPr>
+        <p:spPr>
+          <a:xfrm>
+            <a:off x="3557016" y="4096512"/>
+            <a:ext cx="2295144" cy="457200"/>
+          </a:xfrm>
+          <a:prstGeom prst="rect">
+            <a:avLst/>
+          </a:prstGeom>
+          <a:noFill/>
+        </p:spPr>
+        <p:txBody>
+          <a:bodyPr wrap="square" anchor="ctr" lIns="0" rIns="0" tIns="0" bIns="0">
+            <a:spAutoFit/>
+          </a:bodyPr>
+          <a:lstStyle/>
+          <a:p>
+            <a:pPr algn="ctr"/>
+            <a:r>
+              <a:rPr sz="1300" b="1">
+                <a:solidFill>
+                  <a:srgbClr val="1D9E75"/>
+                </a:solidFill>
+                <a:latin typeface="Meiryo"/>
+              </a:rPr>
+              <a:t>いちばん安全</a:t>
+            </a:r>
+          </a:p>
+        </p:txBody>
+      </p:sp>
+      <p:sp>
+        <p:nvSpPr>
+          <p:cNvPr id="21" name="Rounded Rectangle 20"/>
+          <p:cNvSpPr/>
+          <p:nvPr/>
+        </p:nvSpPr>
+        <p:spPr>
+          <a:xfrm>
+            <a:off x="6144768" y="2011680"/>
+            <a:ext cx="2697480" cy="2788920"/>
+          </a:xfrm>
+          <a:prstGeom prst="roundRect">
+            <a:avLst>
+              <a:gd name="adj" fmla="val 3389"/>
+            </a:avLst>
+          </a:prstGeom>
+          <a:solidFill>
+            <a:srgbClr val="F4F8FA"/>
+          </a:solidFill>
+          <a:ln>
+            <a:noFill/>
+          </a:ln>
+          <a:effectLst/>
+        </p:spPr>
+        <p:style>
+          <a:lnRef idx="1">
+            <a:schemeClr val="accent1"/>
+          </a:lnRef>
+          <a:fillRef idx="3">
+            <a:schemeClr val="accent1"/>
+          </a:fillRef>
+          <a:effectRef idx="2">
+            <a:schemeClr val="accent1"/>
+          </a:effectRef>
+          <a:fontRef idx="minor">
+            <a:schemeClr val="lt1"/>
+          </a:fontRef>
+        </p:style>
+        <p:txBody>
+          <a:bodyPr rtlCol="0" anchor="ctr"/>
+          <a:lstStyle/>
+          <a:p>
+            <a:pPr algn="ctr"/>
+          </a:p>
+        </p:txBody>
+      </p:sp>
+      <p:sp>
+        <p:nvSpPr>
+          <p:cNvPr id="22" name="Rounded Rectangle 21"/>
+          <p:cNvSpPr/>
+          <p:nvPr/>
+        </p:nvSpPr>
+        <p:spPr>
+          <a:xfrm>
+            <a:off x="6144768" y="2011680"/>
+            <a:ext cx="2697480" cy="566928"/>
+          </a:xfrm>
+          <a:prstGeom prst="roundRect">
+            <a:avLst>
+              <a:gd name="adj" fmla="val 16129"/>
+            </a:avLst>
+          </a:prstGeom>
+          <a:solidFill>
+            <a:srgbClr val="1A5276"/>
+          </a:solidFill>
+          <a:ln>
+            <a:noFill/>
+          </a:ln>
+          <a:effectLst/>
+        </p:spPr>
+        <p:style>
+          <a:lnRef idx="1">
+            <a:schemeClr val="accent1"/>
+          </a:lnRef>
+          <a:fillRef idx="3">
+            <a:schemeClr val="accent1"/>
+          </a:fillRef>
+          <a:effectRef idx="2">
+            <a:schemeClr val="accent1"/>
+          </a:effectRef>
+          <a:fontRef idx="minor">
+            <a:schemeClr val="lt1"/>
+          </a:fontRef>
+        </p:style>
+        <p:txBody>
+          <a:bodyPr rtlCol="0" anchor="ctr"/>
+          <a:lstStyle/>
+          <a:p>
+            <a:pPr algn="ctr"/>
+          </a:p>
+        </p:txBody>
+      </p:sp>
+      <p:sp>
+        <p:nvSpPr>
+          <p:cNvPr id="23" name="TextBox 22"/>
+          <p:cNvSpPr txBox="1"/>
+          <p:nvPr/>
+        </p:nvSpPr>
+        <p:spPr>
+          <a:xfrm>
+            <a:off x="6144768" y="2011680"/>
+            <a:ext cx="2697480" cy="566928"/>
+          </a:xfrm>
+          <a:prstGeom prst="rect">
+            <a:avLst/>
+          </a:prstGeom>
+          <a:noFill/>
+        </p:spPr>
+        <p:txBody>
+          <a:bodyPr wrap="square" anchor="ctr" lIns="0" rIns="0" tIns="0" bIns="0">
+            <a:spAutoFit/>
+          </a:bodyPr>
+          <a:lstStyle/>
+          <a:p>
+            <a:pPr algn="ctr"/>
+            <a:r>
+              <a:rPr sz="1700" b="1">
+                <a:solidFill>
+                  <a:srgbClr val="FFFFFF"/>
+                </a:solidFill>
+                <a:latin typeface="Meiryo"/>
+              </a:rPr>
+              <a:t>上下移動</a:t>
+            </a:r>
+          </a:p>
+        </p:txBody>
+      </p:sp>
+      <p:sp>
+        <p:nvSpPr>
+          <p:cNvPr id="24" name="TextBox 23"/>
+          <p:cNvSpPr txBox="1"/>
+          <p:nvPr/>
+        </p:nvSpPr>
+        <p:spPr>
+          <a:xfrm>
+            <a:off x="6345936" y="2743200"/>
+            <a:ext cx="2295144" cy="237744"/>
+          </a:xfrm>
+          <a:prstGeom prst="rect">
+            <a:avLst/>
+          </a:prstGeom>
+          <a:noFill/>
+        </p:spPr>
+        <p:txBody>
+          <a:bodyPr wrap="square" anchor="t" lIns="0" rIns="0" tIns="0" bIns="0">
+            <a:spAutoFit/>
+          </a:bodyPr>
+          <a:lstStyle/>
+          <a:p>
+            <a:pPr algn="l"/>
+            <a:r>
+              <a:rPr sz="1100" b="1">
+                <a:solidFill>
+                  <a:srgbClr val="1D9E75"/>
+                </a:solidFill>
+                <a:latin typeface="Meiryo"/>
+              </a:rPr>
+              <a:t>こんな方に</a:t>
+            </a:r>
+          </a:p>
+        </p:txBody>
+      </p:sp>
+      <p:sp>
+        <p:nvSpPr>
+          <p:cNvPr id="25" name="TextBox 24"/>
+          <p:cNvSpPr txBox="1"/>
+          <p:nvPr/>
+        </p:nvSpPr>
+        <p:spPr>
+          <a:xfrm>
+            <a:off x="6345936" y="3035808"/>
+            <a:ext cx="2295144" cy="1005840"/>
+          </a:xfrm>
+          <a:prstGeom prst="rect">
+            <a:avLst/>
+          </a:prstGeom>
+          <a:noFill/>
+        </p:spPr>
+        <p:txBody>
+          <a:bodyPr wrap="square" anchor="t" lIns="0" rIns="0" tIns="0" bIns="0">
+            <a:spAutoFit/>
+          </a:bodyPr>
+          <a:lstStyle/>
+          <a:p>
+            <a:pPr algn="l"/>
+            <a:r>
+              <a:rPr sz="1350" b="0">
+                <a:solidFill>
+                  <a:srgbClr val="1C2833"/>
+                </a:solidFill>
+                <a:latin typeface="Meiryo"/>
+              </a:rPr>
+              <a:t>ベッドと浴槽の高さを</a:t>
+            </a:r>
+          </a:p>
+          <a:p>
+            <a:pPr algn="l">
+              <a:spcBef>
+                <a:spcPts val="400"/>
+              </a:spcBef>
+            </a:pPr>
+            <a:r>
+              <a:rPr sz="1350" b="0">
+                <a:solidFill>
+                  <a:srgbClr val="1C2833"/>
+                </a:solidFill>
+                <a:latin typeface="Meiryo"/>
+              </a:rPr>
+              <a:t>合わせ、水平に</a:t>
+            </a:r>
+          </a:p>
+        </p:txBody>
+      </p:sp>
+      <p:sp>
+        <p:nvSpPr>
+          <p:cNvPr id="26" name="Rounded Rectangle 25"/>
+          <p:cNvSpPr/>
+          <p:nvPr/>
+        </p:nvSpPr>
+        <p:spPr>
+          <a:xfrm>
+            <a:off x="6345936" y="4096512"/>
+            <a:ext cx="2295144" cy="457200"/>
+          </a:xfrm>
+          <a:prstGeom prst="roundRect">
+            <a:avLst>
+              <a:gd name="adj" fmla="val 20000"/>
+            </a:avLst>
+          </a:prstGeom>
+          <a:solidFill>
+            <a:srgbClr val="EAF7F1"/>
+          </a:solidFill>
+          <a:ln>
+            <a:noFill/>
+          </a:ln>
+          <a:effectLst/>
+        </p:spPr>
+        <p:style>
+          <a:lnRef idx="1">
+            <a:schemeClr val="accent1"/>
+          </a:lnRef>
+          <a:fillRef idx="3">
+            <a:schemeClr val="accent1"/>
+          </a:fillRef>
+          <a:effectRef idx="2">
+            <a:schemeClr val="accent1"/>
+          </a:effectRef>
+          <a:fontRef idx="minor">
+            <a:schemeClr val="lt1"/>
+          </a:fontRef>
+        </p:style>
+        <p:txBody>
+          <a:bodyPr rtlCol="0" anchor="ctr"/>
+          <a:lstStyle/>
+          <a:p>
+            <a:pPr algn="ctr"/>
+          </a:p>
+        </p:txBody>
+      </p:sp>
+      <p:sp>
+        <p:nvSpPr>
+          <p:cNvPr id="27" name="TextBox 26"/>
+          <p:cNvSpPr txBox="1"/>
+          <p:nvPr/>
+        </p:nvSpPr>
+        <p:spPr>
+          <a:xfrm>
+            <a:off x="6345936" y="4096512"/>
+            <a:ext cx="2295144" cy="457200"/>
+          </a:xfrm>
+          <a:prstGeom prst="rect">
+            <a:avLst/>
+          </a:prstGeom>
+          <a:noFill/>
+        </p:spPr>
+        <p:txBody>
+          <a:bodyPr wrap="square" anchor="ctr" lIns="0" rIns="0" tIns="0" bIns="0">
+            <a:spAutoFit/>
+          </a:bodyPr>
+          <a:lstStyle/>
+          <a:p>
+            <a:pPr algn="ctr"/>
+            <a:r>
+              <a:rPr sz="1300" b="1">
+                <a:solidFill>
+                  <a:srgbClr val="1D9E75"/>
+                </a:solidFill>
+                <a:latin typeface="Meiryo"/>
+              </a:rPr>
+              <a:t>体への負担が少ない</a:t>
+            </a:r>
+          </a:p>
+        </p:txBody>
+      </p:sp>
+      <p:sp>
+        <p:nvSpPr>
+          <p:cNvPr id="28" name="Rounded Rectangle 27"/>
+          <p:cNvSpPr/>
+          <p:nvPr/>
+        </p:nvSpPr>
+        <p:spPr>
+          <a:xfrm>
+            <a:off x="8933688" y="2011680"/>
+            <a:ext cx="2697480" cy="2788920"/>
+          </a:xfrm>
+          <a:prstGeom prst="roundRect">
+            <a:avLst>
+              <a:gd name="adj" fmla="val 3389"/>
+            </a:avLst>
+          </a:prstGeom>
+          <a:solidFill>
+            <a:srgbClr val="F4F8FA"/>
+          </a:solidFill>
+          <a:ln>
+            <a:noFill/>
+          </a:ln>
+          <a:effectLst/>
+        </p:spPr>
+        <p:style>
+          <a:lnRef idx="1">
+            <a:schemeClr val="accent1"/>
+          </a:lnRef>
+          <a:fillRef idx="3">
+            <a:schemeClr val="accent1"/>
+          </a:fillRef>
+          <a:effectRef idx="2">
+            <a:schemeClr val="accent1"/>
+          </a:effectRef>
+          <a:fontRef idx="minor">
+            <a:schemeClr val="lt1"/>
+          </a:fontRef>
+        </p:style>
+        <p:txBody>
+          <a:bodyPr rtlCol="0" anchor="ctr"/>
+          <a:lstStyle/>
+          <a:p>
+            <a:pPr algn="ctr"/>
+          </a:p>
+        </p:txBody>
+      </p:sp>
+      <p:sp>
+        <p:nvSpPr>
+          <p:cNvPr id="29" name="Rounded Rectangle 28"/>
+          <p:cNvSpPr/>
+          <p:nvPr/>
+        </p:nvSpPr>
+        <p:spPr>
+          <a:xfrm>
+            <a:off x="8933688" y="2011680"/>
+            <a:ext cx="2697480" cy="566928"/>
+          </a:xfrm>
+          <a:prstGeom prst="roundRect">
+            <a:avLst>
+              <a:gd name="adj" fmla="val 16129"/>
+            </a:avLst>
+          </a:prstGeom>
+          <a:solidFill>
+            <a:srgbClr val="1A5276"/>
+          </a:solidFill>
+          <a:ln>
+            <a:noFill/>
+          </a:ln>
+          <a:effectLst/>
+        </p:spPr>
+        <p:style>
+          <a:lnRef idx="1">
+            <a:schemeClr val="accent1"/>
+          </a:lnRef>
+          <a:fillRef idx="3">
+            <a:schemeClr val="accent1"/>
+          </a:fillRef>
+          <a:effectRef idx="2">
+            <a:schemeClr val="accent1"/>
+          </a:effectRef>
+          <a:fontRef idx="minor">
+            <a:schemeClr val="lt1"/>
+          </a:fontRef>
+        </p:style>
+        <p:txBody>
+          <a:bodyPr rtlCol="0" anchor="ctr"/>
+          <a:lstStyle/>
+          <a:p>
+            <a:pPr algn="ctr"/>
+          </a:p>
+        </p:txBody>
+      </p:sp>
+      <p:sp>
+        <p:nvSpPr>
+          <p:cNvPr id="30" name="TextBox 29"/>
+          <p:cNvSpPr txBox="1"/>
+          <p:nvPr/>
+        </p:nvSpPr>
+        <p:spPr>
+          <a:xfrm>
+            <a:off x="8933688" y="2011680"/>
+            <a:ext cx="2697480" cy="566928"/>
+          </a:xfrm>
+          <a:prstGeom prst="rect">
+            <a:avLst/>
+          </a:prstGeom>
+          <a:noFill/>
+        </p:spPr>
+        <p:txBody>
+          <a:bodyPr wrap="square" anchor="ctr" lIns="0" rIns="0" tIns="0" bIns="0">
+            <a:spAutoFit/>
+          </a:bodyPr>
+          <a:lstStyle/>
+          <a:p>
+            <a:pPr algn="ctr"/>
+            <a:r>
+              <a:rPr sz="1700" b="1">
+                <a:solidFill>
+                  <a:srgbClr val="FFFFFF"/>
+                </a:solidFill>
+                <a:latin typeface="Meiryo"/>
+              </a:rPr>
+              <a:t>座位回転</a:t>
+            </a:r>
+          </a:p>
+        </p:txBody>
+      </p:sp>
+      <p:sp>
+        <p:nvSpPr>
+          <p:cNvPr id="31" name="TextBox 30"/>
+          <p:cNvSpPr txBox="1"/>
+          <p:nvPr/>
+        </p:nvSpPr>
+        <p:spPr>
+          <a:xfrm>
+            <a:off x="9134856" y="2743200"/>
+            <a:ext cx="2295144" cy="237744"/>
+          </a:xfrm>
+          <a:prstGeom prst="rect">
+            <a:avLst/>
+          </a:prstGeom>
+          <a:noFill/>
+        </p:spPr>
+        <p:txBody>
+          <a:bodyPr wrap="square" anchor="t" lIns="0" rIns="0" tIns="0" bIns="0">
+            <a:spAutoFit/>
+          </a:bodyPr>
+          <a:lstStyle/>
+          <a:p>
+            <a:pPr algn="l"/>
+            <a:r>
+              <a:rPr sz="1100" b="1">
+                <a:solidFill>
+                  <a:srgbClr val="1D9E75"/>
+                </a:solidFill>
+                <a:latin typeface="Meiryo"/>
+              </a:rPr>
+              <a:t>こんな方に</a:t>
+            </a:r>
+          </a:p>
+        </p:txBody>
+      </p:sp>
+      <p:sp>
+        <p:nvSpPr>
+          <p:cNvPr id="32" name="TextBox 31"/>
+          <p:cNvSpPr txBox="1"/>
+          <p:nvPr/>
+        </p:nvSpPr>
+        <p:spPr>
+          <a:xfrm>
+            <a:off x="9134856" y="3035808"/>
+            <a:ext cx="2295144" cy="1005840"/>
+          </a:xfrm>
+          <a:prstGeom prst="rect">
+            <a:avLst/>
+          </a:prstGeom>
+          <a:noFill/>
+        </p:spPr>
+        <p:txBody>
+          <a:bodyPr wrap="square" anchor="t" lIns="0" rIns="0" tIns="0" bIns="0">
+            <a:spAutoFit/>
+          </a:bodyPr>
+          <a:lstStyle/>
+          <a:p>
+            <a:pPr algn="l"/>
+            <a:r>
+              <a:rPr sz="1350" b="0">
+                <a:solidFill>
+                  <a:srgbClr val="1C2833"/>
+                </a:solidFill>
+                <a:latin typeface="Meiryo"/>
+              </a:rPr>
+              <a:t>座位が保てる方</a:t>
+            </a:r>
+          </a:p>
+        </p:txBody>
+      </p:sp>
+      <p:sp>
+        <p:nvSpPr>
+          <p:cNvPr id="33" name="Rounded Rectangle 32"/>
+          <p:cNvSpPr/>
+          <p:nvPr/>
+        </p:nvSpPr>
+        <p:spPr>
+          <a:xfrm>
+            <a:off x="9134856" y="4096512"/>
+            <a:ext cx="2295144" cy="457200"/>
+          </a:xfrm>
+          <a:prstGeom prst="roundRect">
+            <a:avLst>
+              <a:gd name="adj" fmla="val 20000"/>
+            </a:avLst>
+          </a:prstGeom>
+          <a:solidFill>
+            <a:srgbClr val="EAF7F1"/>
+          </a:solidFill>
+          <a:ln>
+            <a:noFill/>
+          </a:ln>
+          <a:effectLst/>
+        </p:spPr>
+        <p:style>
+          <a:lnRef idx="1">
+            <a:schemeClr val="accent1"/>
+          </a:lnRef>
+          <a:fillRef idx="3">
+            <a:schemeClr val="accent1"/>
+          </a:fillRef>
+          <a:effectRef idx="2">
+            <a:schemeClr val="accent1"/>
+          </a:effectRef>
+          <a:fontRef idx="minor">
+            <a:schemeClr val="lt1"/>
+          </a:fontRef>
+        </p:style>
+        <p:txBody>
+          <a:bodyPr rtlCol="0" anchor="ctr"/>
+          <a:lstStyle/>
+          <a:p>
+            <a:pPr algn="ctr"/>
+          </a:p>
+        </p:txBody>
+      </p:sp>
+      <p:sp>
+        <p:nvSpPr>
+          <p:cNvPr id="34" name="TextBox 33"/>
+          <p:cNvSpPr txBox="1"/>
+          <p:nvPr/>
+        </p:nvSpPr>
+        <p:spPr>
+          <a:xfrm>
+            <a:off x="9134856" y="4096512"/>
+            <a:ext cx="2295144" cy="457200"/>
+          </a:xfrm>
+          <a:prstGeom prst="rect">
+            <a:avLst/>
+          </a:prstGeom>
+          <a:noFill/>
+        </p:spPr>
+        <p:txBody>
+          <a:bodyPr wrap="square" anchor="ctr" lIns="0" rIns="0" tIns="0" bIns="0">
+            <a:spAutoFit/>
+          </a:bodyPr>
+          <a:lstStyle/>
+          <a:p>
+            <a:pPr algn="ctr"/>
+            <a:r>
+              <a:rPr sz="1300" b="1">
+                <a:solidFill>
+                  <a:srgbClr val="1D9E75"/>
+                </a:solidFill>
+                <a:latin typeface="Meiryo"/>
+              </a:rPr>
+              <a:t>ご本人の力を残す</a:t>
+            </a:r>
+          </a:p>
+        </p:txBody>
+      </p:sp>
+      <p:sp>
+        <p:nvSpPr>
+          <p:cNvPr id="35" name="Rounded Rectangle 34"/>
+          <p:cNvSpPr/>
+          <p:nvPr/>
+        </p:nvSpPr>
+        <p:spPr>
+          <a:xfrm>
+            <a:off x="566928" y="5120640"/>
+            <a:ext cx="11055096" cy="658368"/>
+          </a:xfrm>
+          <a:prstGeom prst="roundRect">
+            <a:avLst>
+              <a:gd name="adj" fmla="val 13888"/>
+            </a:avLst>
+          </a:prstGeom>
+          <a:solidFill>
+            <a:srgbClr val="1D9E75"/>
+          </a:solidFill>
+          <a:ln>
+            <a:noFill/>
+          </a:ln>
+          <a:effectLst/>
+        </p:spPr>
+        <p:style>
+          <a:lnRef idx="1">
+            <a:schemeClr val="accent1"/>
+          </a:lnRef>
+          <a:fillRef idx="3">
+            <a:schemeClr val="accent1"/>
+          </a:fillRef>
+          <a:effectRef idx="2">
+            <a:schemeClr val="accent1"/>
+          </a:effectRef>
+          <a:fontRef idx="minor">
+            <a:schemeClr val="lt1"/>
+          </a:fontRef>
+        </p:style>
+        <p:txBody>
+          <a:bodyPr rtlCol="0" anchor="ctr"/>
+          <a:lstStyle/>
+          <a:p>
+            <a:pPr algn="ctr"/>
+          </a:p>
+        </p:txBody>
+      </p:sp>
+      <p:sp>
+        <p:nvSpPr>
+          <p:cNvPr id="36" name="TextBox 35"/>
+          <p:cNvSpPr txBox="1"/>
+          <p:nvPr/>
+        </p:nvSpPr>
+        <p:spPr>
+          <a:xfrm>
+            <a:off x="566928" y="5120640"/>
+            <a:ext cx="11055096" cy="658368"/>
+          </a:xfrm>
+          <a:prstGeom prst="rect">
+            <a:avLst/>
+          </a:prstGeom>
+          <a:noFill/>
+        </p:spPr>
+        <p:txBody>
+          <a:bodyPr wrap="square" anchor="ctr" lIns="0" rIns="0" tIns="0" bIns="0">
+            <a:spAutoFit/>
+          </a:bodyPr>
+          <a:lstStyle/>
+          <a:p>
+            <a:pPr algn="ctr"/>
+            <a:r>
+              <a:rPr sz="1800" b="1">
+                <a:solidFill>
+                  <a:srgbClr val="FFFFFF"/>
+                </a:solidFill>
+                <a:latin typeface="Meiryo"/>
+              </a:rPr>
+              <a:t>どの方法でお運びするかを、お一人おひとり決めています。安全に、楽に。</a:t>
+            </a:r>
           </a:p>
         </p:txBody>
       </p:sp>

--- a/houmon-nyuyoku-slides.pptx
+++ b/houmon-nyuyoku-slides.pptx
@@ -1764,52 +1764,96 @@
           </a:p>
           <a:p>
             <a:r>
-              <a:t>・冨永＝説明と進行／高崎・武末＝実演</a:t>
-            </a:r>
-          </a:p>
-          <a:p>
-            <a:r>
-              <a:t>・導入「ここで少し、体を動かしていただきます」</a:t>
-            </a:r>
-          </a:p>
-          <a:p>
-            <a:r>
-              <a:t>・4つを実演しながら説明。名前だけでなく「どんな方に使うか」を必ず添える</a:t>
-            </a:r>
-          </a:p>
-          <a:p>
-            <a:r>
-              <a:t>  抱き上げ＝小柄・拘縮少ない／担架＝大柄・全介助／</a:t>
-            </a:r>
-          </a:p>
-          <a:p>
-            <a:r>
-              <a:t>  上下＝高さを合わせ水平に／座位回転＝座位が保てる方</a:t>
-            </a:r>
-          </a:p>
-          <a:p>
-            <a:r>
-              <a:t>・体験（3分）「どなたか、お体を預けてみていただけませんか」</a:t>
-            </a:r>
-          </a:p>
-          <a:p>
-            <a:r>
-              <a:t>  → 挙手を待つ。指名しない。腰・首の既往を確認。1人だけ。担架がおすすめ</a:t>
-            </a:r>
-          </a:p>
-          <a:p>
-            <a:r>
-              <a:t>  → 手が挙がらなければ「ではスタッフでお見せします」に即切り替え</a:t>
-            </a:r>
-          </a:p>
-          <a:p>
-            <a:r>
-              <a:t>・締め「持ち上げられる側は、怖いものです。だからその方ごとに決めています」</a:t>
-            </a:r>
-          </a:p>
-          <a:p>
-            <a:r>
-              <a:t>【押していたら】体験を省いて実演だけ −3分／2方法に絞る さらに−2分</a:t>
+              <a:t>・冨永＝説明と進行／高崎・武末＝実演　※いずれも3名で行うことを先に言う</a:t>
+            </a:r>
+          </a:p>
+          <a:p/>
+          <a:p>
+            <a:r>
+              <a:t>【実演するのは3つ】</a:t>
+            </a:r>
+          </a:p>
+          <a:p>
+            <a:r>
+              <a:t> 1 抱き上げ　… スタッフ同士で見せる（会場の方は持ち上げない）</a:t>
+            </a:r>
+          </a:p>
+          <a:p>
+            <a:r>
+              <a:t> 2 担架　　　… ★ここだけ会場の方に体験していただく</a:t>
+            </a:r>
+          </a:p>
+          <a:p>
+            <a:r>
+              <a:t> 3 上下移動　… スタッフ同士で見せる（車椅子を用意）</a:t>
+            </a:r>
+          </a:p>
+          <a:p>
+            <a:r>
+              <a:t> ※座位回転はスライドと口頭だけ。「立てる方にはこちら」で足ります</a:t>
+            </a:r>
+          </a:p>
+          <a:p/>
+          <a:p>
+            <a:r>
+              <a:t>【担架のときに必ず言う】</a:t>
+            </a:r>
+          </a:p>
+          <a:p>
+            <a:r>
+              <a:t> 人工呼吸器を外せない方は、必ず担架です。</a:t>
+            </a:r>
+          </a:p>
+          <a:p>
+            <a:r>
+              <a:t> ほかの方法だと回路が引っ張られて、外れる恐れがあるので。</a:t>
+            </a:r>
+          </a:p>
+          <a:p>
+            <a:r>
+              <a:t> 気管切開の方も、頸部を安定させたいので担架を選びます。</a:t>
+            </a:r>
+          </a:p>
+          <a:p/>
+          <a:p>
+            <a:r>
+              <a:t>【締め＝今日いちばん伝えたいこと】</a:t>
+            </a:r>
+          </a:p>
+          <a:p>
+            <a:r>
+              <a:t> 方法は固定ではありません。事前訪問で決めて、やってみて</a:t>
+            </a:r>
+          </a:p>
+          <a:p>
+            <a:r>
+              <a:t> より安全・安楽な方へ変えます。ADLが上がれば座位回転へ。</a:t>
+            </a:r>
+          </a:p>
+          <a:p>
+            <a:r>
+              <a:t> 変更のつど、ご本人とご家族に確認しています。</a:t>
+            </a:r>
+          </a:p>
+          <a:p/>
+          <a:p>
+            <a:r>
+              <a:t>【体験の進め方】</a:t>
+            </a:r>
+          </a:p>
+          <a:p>
+            <a:r>
+              <a:t> 挙手を待つ。指名しない。腰・首の既往を確認。1人だけ。</a:t>
+            </a:r>
+          </a:p>
+          <a:p>
+            <a:r>
+              <a:t> 手が挙がらなければ「ではスタッフでお見せします」に即切り替え。</a:t>
+            </a:r>
+          </a:p>
+          <a:p>
+            <a:r>
+              <a:t>【押していたら】体験を省いて実演だけ −3分／抱き上げと担架の2つに絞る さらに−2分</a:t>
             </a:r>
           </a:p>
         </p:txBody>
@@ -7764,6 +7808,1818 @@
 </file>
 
 <file path=ppt/slides/slide14.xml><?xml version="1.0" encoding="utf-8"?>
+<p:sld xmlns:a="http://schemas.openxmlformats.org/drawingml/2006/main" xmlns:p="http://schemas.openxmlformats.org/presentationml/2006/main" xmlns:r="http://schemas.openxmlformats.org/officeDocument/2006/relationships">
+  <p:cSld>
+    <p:spTree>
+      <p:nvGrpSpPr>
+        <p:cNvPr id="1" name=""/>
+        <p:cNvGrpSpPr/>
+        <p:nvPr/>
+      </p:nvGrpSpPr>
+      <p:grpSpPr/>
+      <p:sp>
+        <p:nvSpPr>
+          <p:cNvPr id="2" name="Rounded Rectangle 1"/>
+          <p:cNvSpPr/>
+          <p:nvPr/>
+        </p:nvSpPr>
+        <p:spPr>
+          <a:xfrm>
+            <a:off x="566928" y="329184"/>
+            <a:ext cx="1481328" cy="310896"/>
+          </a:xfrm>
+          <a:prstGeom prst="roundRect">
+            <a:avLst>
+              <a:gd name="adj" fmla="val 14705"/>
+            </a:avLst>
+          </a:prstGeom>
+          <a:solidFill>
+            <a:srgbClr val="1D9E75"/>
+          </a:solidFill>
+          <a:ln>
+            <a:noFill/>
+          </a:ln>
+          <a:effectLst/>
+        </p:spPr>
+        <p:style>
+          <a:lnRef idx="1">
+            <a:schemeClr val="accent1"/>
+          </a:lnRef>
+          <a:fillRef idx="3">
+            <a:schemeClr val="accent1"/>
+          </a:fillRef>
+          <a:effectRef idx="2">
+            <a:schemeClr val="accent1"/>
+          </a:effectRef>
+          <a:fontRef idx="minor">
+            <a:schemeClr val="lt1"/>
+          </a:fontRef>
+        </p:style>
+        <p:txBody>
+          <a:bodyPr rtlCol="0" anchor="ctr"/>
+          <a:lstStyle/>
+          <a:p>
+            <a:pPr algn="ctr"/>
+          </a:p>
+        </p:txBody>
+      </p:sp>
+      <p:sp>
+        <p:nvSpPr>
+          <p:cNvPr id="3" name="TextBox 2"/>
+          <p:cNvSpPr txBox="1"/>
+          <p:nvPr/>
+        </p:nvSpPr>
+        <p:spPr>
+          <a:xfrm>
+            <a:off x="566928" y="329184"/>
+            <a:ext cx="1481328" cy="310896"/>
+          </a:xfrm>
+          <a:prstGeom prst="rect">
+            <a:avLst/>
+          </a:prstGeom>
+          <a:noFill/>
+        </p:spPr>
+        <p:txBody>
+          <a:bodyPr wrap="square" anchor="ctr" lIns="0" rIns="0" tIns="0" bIns="0">
+            <a:spAutoFit/>
+          </a:bodyPr>
+          <a:lstStyle/>
+          <a:p>
+            <a:pPr algn="ctr">
+              <a:lnSpc>
+                <a:spcPct val="115000"/>
+              </a:lnSpc>
+            </a:pPr>
+            <a:r>
+              <a:rPr sz="1200" b="1">
+                <a:solidFill>
+                  <a:srgbClr val="FFFFFF"/>
+                </a:solidFill>
+                <a:latin typeface="Meiryo"/>
+              </a:rPr>
+              <a:t>DEMO</a:t>
+            </a:r>
+          </a:p>
+        </p:txBody>
+      </p:sp>
+      <p:sp>
+        <p:nvSpPr>
+          <p:cNvPr id="4" name="TextBox 3"/>
+          <p:cNvSpPr txBox="1"/>
+          <p:nvPr/>
+        </p:nvSpPr>
+        <p:spPr>
+          <a:xfrm>
+            <a:off x="2194560" y="329184"/>
+            <a:ext cx="5486400" cy="310896"/>
+          </a:xfrm>
+          <a:prstGeom prst="rect">
+            <a:avLst/>
+          </a:prstGeom>
+          <a:noFill/>
+        </p:spPr>
+        <p:txBody>
+          <a:bodyPr wrap="square" anchor="ctr" lIns="0" rIns="0" tIns="0" bIns="0">
+            <a:spAutoFit/>
+          </a:bodyPr>
+          <a:lstStyle/>
+          <a:p>
+            <a:pPr algn="l">
+              <a:lnSpc>
+                <a:spcPct val="115000"/>
+              </a:lnSpc>
+            </a:pPr>
+            <a:r>
+              <a:rPr sz="1300" b="0">
+                <a:solidFill>
+                  <a:srgbClr val="566573"/>
+                </a:solidFill>
+                <a:latin typeface="Meiryo"/>
+              </a:rPr>
+              <a:t>移乗の実演</a:t>
+            </a:r>
+          </a:p>
+        </p:txBody>
+      </p:sp>
+      <p:sp>
+        <p:nvSpPr>
+          <p:cNvPr id="5" name="TextBox 4"/>
+          <p:cNvSpPr txBox="1"/>
+          <p:nvPr/>
+        </p:nvSpPr>
+        <p:spPr>
+          <a:xfrm>
+            <a:off x="566928" y="713232"/>
+            <a:ext cx="11055096" cy="548640"/>
+          </a:xfrm>
+          <a:prstGeom prst="rect">
+            <a:avLst/>
+          </a:prstGeom>
+          <a:noFill/>
+        </p:spPr>
+        <p:txBody>
+          <a:bodyPr wrap="square" anchor="t" lIns="0" rIns="0" tIns="0" bIns="0">
+            <a:spAutoFit/>
+          </a:bodyPr>
+          <a:lstStyle/>
+          <a:p>
+            <a:pPr algn="l">
+              <a:lnSpc>
+                <a:spcPct val="115000"/>
+              </a:lnSpc>
+            </a:pPr>
+            <a:r>
+              <a:rPr sz="3200" b="1">
+                <a:solidFill>
+                  <a:srgbClr val="1A5276"/>
+                </a:solidFill>
+                <a:latin typeface="Meiryo"/>
+              </a:rPr>
+              <a:t>お体を、どうお運びするか</a:t>
+            </a:r>
+          </a:p>
+        </p:txBody>
+      </p:sp>
+      <p:sp>
+        <p:nvSpPr>
+          <p:cNvPr id="6" name="TextBox 5"/>
+          <p:cNvSpPr txBox="1"/>
+          <p:nvPr/>
+        </p:nvSpPr>
+        <p:spPr>
+          <a:xfrm>
+            <a:off x="566928" y="1389888"/>
+            <a:ext cx="11055096" cy="292608"/>
+          </a:xfrm>
+          <a:prstGeom prst="rect">
+            <a:avLst/>
+          </a:prstGeom>
+          <a:noFill/>
+        </p:spPr>
+        <p:txBody>
+          <a:bodyPr wrap="square" anchor="t" lIns="0" rIns="0" tIns="0" bIns="0">
+            <a:spAutoFit/>
+          </a:bodyPr>
+          <a:lstStyle/>
+          <a:p>
+            <a:pPr algn="l">
+              <a:lnSpc>
+                <a:spcPct val="115000"/>
+              </a:lnSpc>
+            </a:pPr>
+            <a:r>
+              <a:rPr sz="1350" b="0">
+                <a:solidFill>
+                  <a:srgbClr val="566573"/>
+                </a:solidFill>
+                <a:latin typeface="Meiryo"/>
+              </a:rPr>
+              <a:t>浴槽へお移しする方法は4つ。いずれも3名で行い、その方の状態に合わせて選びます。</a:t>
+            </a:r>
+          </a:p>
+        </p:txBody>
+      </p:sp>
+      <p:sp>
+        <p:nvSpPr>
+          <p:cNvPr id="7" name="Rounded Rectangle 6"/>
+          <p:cNvSpPr/>
+          <p:nvPr/>
+        </p:nvSpPr>
+        <p:spPr>
+          <a:xfrm>
+            <a:off x="566928" y="1874519"/>
+            <a:ext cx="2697480" cy="3154680"/>
+          </a:xfrm>
+          <a:prstGeom prst="roundRect">
+            <a:avLst>
+              <a:gd name="adj" fmla="val 3389"/>
+            </a:avLst>
+          </a:prstGeom>
+          <a:solidFill>
+            <a:srgbClr val="F4F8FA"/>
+          </a:solidFill>
+          <a:ln>
+            <a:noFill/>
+          </a:ln>
+          <a:effectLst/>
+        </p:spPr>
+        <p:style>
+          <a:lnRef idx="1">
+            <a:schemeClr val="accent1"/>
+          </a:lnRef>
+          <a:fillRef idx="3">
+            <a:schemeClr val="accent1"/>
+          </a:fillRef>
+          <a:effectRef idx="2">
+            <a:schemeClr val="accent1"/>
+          </a:effectRef>
+          <a:fontRef idx="minor">
+            <a:schemeClr val="lt1"/>
+          </a:fontRef>
+        </p:style>
+        <p:txBody>
+          <a:bodyPr rtlCol="0" anchor="ctr"/>
+          <a:lstStyle/>
+          <a:p>
+            <a:pPr algn="ctr"/>
+          </a:p>
+        </p:txBody>
+      </p:sp>
+      <p:sp>
+        <p:nvSpPr>
+          <p:cNvPr id="8" name="Rounded Rectangle 7"/>
+          <p:cNvSpPr/>
+          <p:nvPr/>
+        </p:nvSpPr>
+        <p:spPr>
+          <a:xfrm>
+            <a:off x="566928" y="1874519"/>
+            <a:ext cx="2697480" cy="530352"/>
+          </a:xfrm>
+          <a:prstGeom prst="roundRect">
+            <a:avLst>
+              <a:gd name="adj" fmla="val 17241"/>
+            </a:avLst>
+          </a:prstGeom>
+          <a:solidFill>
+            <a:srgbClr val="1A5276"/>
+          </a:solidFill>
+          <a:ln>
+            <a:noFill/>
+          </a:ln>
+          <a:effectLst/>
+        </p:spPr>
+        <p:style>
+          <a:lnRef idx="1">
+            <a:schemeClr val="accent1"/>
+          </a:lnRef>
+          <a:fillRef idx="3">
+            <a:schemeClr val="accent1"/>
+          </a:fillRef>
+          <a:effectRef idx="2">
+            <a:schemeClr val="accent1"/>
+          </a:effectRef>
+          <a:fontRef idx="minor">
+            <a:schemeClr val="lt1"/>
+          </a:fontRef>
+        </p:style>
+        <p:txBody>
+          <a:bodyPr rtlCol="0" anchor="ctr"/>
+          <a:lstStyle/>
+          <a:p>
+            <a:pPr algn="ctr"/>
+          </a:p>
+        </p:txBody>
+      </p:sp>
+      <p:sp>
+        <p:nvSpPr>
+          <p:cNvPr id="9" name="TextBox 8"/>
+          <p:cNvSpPr txBox="1"/>
+          <p:nvPr/>
+        </p:nvSpPr>
+        <p:spPr>
+          <a:xfrm>
+            <a:off x="566928" y="1874519"/>
+            <a:ext cx="2697480" cy="530352"/>
+          </a:xfrm>
+          <a:prstGeom prst="rect">
+            <a:avLst/>
+          </a:prstGeom>
+          <a:noFill/>
+        </p:spPr>
+        <p:txBody>
+          <a:bodyPr wrap="square" anchor="ctr" lIns="0" rIns="0" tIns="0" bIns="0">
+            <a:spAutoFit/>
+          </a:bodyPr>
+          <a:lstStyle/>
+          <a:p>
+            <a:pPr algn="ctr">
+              <a:lnSpc>
+                <a:spcPct val="115000"/>
+              </a:lnSpc>
+            </a:pPr>
+            <a:r>
+              <a:rPr sz="1700" b="1">
+                <a:solidFill>
+                  <a:srgbClr val="FFFFFF"/>
+                </a:solidFill>
+                <a:latin typeface="Meiryo"/>
+              </a:rPr>
+              <a:t>抱き上げ移動</a:t>
+            </a:r>
+          </a:p>
+        </p:txBody>
+      </p:sp>
+      <p:sp>
+        <p:nvSpPr>
+          <p:cNvPr id="10" name="TextBox 9"/>
+          <p:cNvSpPr txBox="1"/>
+          <p:nvPr/>
+        </p:nvSpPr>
+        <p:spPr>
+          <a:xfrm>
+            <a:off x="749808" y="2532887"/>
+            <a:ext cx="2331720" cy="219456"/>
+          </a:xfrm>
+          <a:prstGeom prst="rect">
+            <a:avLst/>
+          </a:prstGeom>
+          <a:noFill/>
+        </p:spPr>
+        <p:txBody>
+          <a:bodyPr wrap="square" anchor="t" lIns="0" rIns="0" tIns="0" bIns="0">
+            <a:spAutoFit/>
+          </a:bodyPr>
+          <a:lstStyle/>
+          <a:p>
+            <a:pPr algn="l">
+              <a:lnSpc>
+                <a:spcPct val="115000"/>
+              </a:lnSpc>
+            </a:pPr>
+            <a:r>
+              <a:rPr sz="1050" b="1">
+                <a:solidFill>
+                  <a:srgbClr val="1D9E75"/>
+                </a:solidFill>
+                <a:latin typeface="Meiryo"/>
+              </a:rPr>
+              <a:t>こんな方に</a:t>
+            </a:r>
+          </a:p>
+        </p:txBody>
+      </p:sp>
+      <p:sp>
+        <p:nvSpPr>
+          <p:cNvPr id="11" name="TextBox 10"/>
+          <p:cNvSpPr txBox="1"/>
+          <p:nvPr/>
+        </p:nvSpPr>
+        <p:spPr>
+          <a:xfrm>
+            <a:off x="749808" y="2788920"/>
+            <a:ext cx="2331720" cy="713232"/>
+          </a:xfrm>
+          <a:prstGeom prst="rect">
+            <a:avLst/>
+          </a:prstGeom>
+          <a:noFill/>
+        </p:spPr>
+        <p:txBody>
+          <a:bodyPr wrap="square" anchor="t" lIns="0" rIns="0" tIns="0" bIns="0">
+            <a:spAutoFit/>
+          </a:bodyPr>
+          <a:lstStyle/>
+          <a:p>
+            <a:pPr algn="l">
+              <a:lnSpc>
+                <a:spcPct val="115000"/>
+              </a:lnSpc>
+            </a:pPr>
+            <a:r>
+              <a:rPr sz="1250" b="0">
+                <a:solidFill>
+                  <a:srgbClr val="1C2833"/>
+                </a:solidFill>
+                <a:latin typeface="Meiryo"/>
+              </a:rPr>
+              <a:t>体格が小さく、拘縮の少ない方</a:t>
+            </a:r>
+          </a:p>
+        </p:txBody>
+      </p:sp>
+      <p:sp>
+        <p:nvSpPr>
+          <p:cNvPr id="12" name="TextBox 11"/>
+          <p:cNvSpPr txBox="1"/>
+          <p:nvPr/>
+        </p:nvSpPr>
+        <p:spPr>
+          <a:xfrm>
+            <a:off x="749808" y="3575304"/>
+            <a:ext cx="2331720" cy="219456"/>
+          </a:xfrm>
+          <a:prstGeom prst="rect">
+            <a:avLst/>
+          </a:prstGeom>
+          <a:noFill/>
+        </p:spPr>
+        <p:txBody>
+          <a:bodyPr wrap="square" anchor="t" lIns="0" rIns="0" tIns="0" bIns="0">
+            <a:spAutoFit/>
+          </a:bodyPr>
+          <a:lstStyle/>
+          <a:p>
+            <a:pPr algn="l">
+              <a:lnSpc>
+                <a:spcPct val="115000"/>
+              </a:lnSpc>
+            </a:pPr>
+            <a:r>
+              <a:rPr sz="1050" b="1">
+                <a:solidFill>
+                  <a:srgbClr val="1A5276"/>
+                </a:solidFill>
+                <a:latin typeface="Meiryo"/>
+              </a:rPr>
+              <a:t>選ばないのは</a:t>
+            </a:r>
+          </a:p>
+        </p:txBody>
+      </p:sp>
+      <p:sp>
+        <p:nvSpPr>
+          <p:cNvPr id="13" name="TextBox 12"/>
+          <p:cNvSpPr txBox="1"/>
+          <p:nvPr/>
+        </p:nvSpPr>
+        <p:spPr>
+          <a:xfrm>
+            <a:off x="749808" y="3831335"/>
+            <a:ext cx="2331720" cy="713232"/>
+          </a:xfrm>
+          <a:prstGeom prst="rect">
+            <a:avLst/>
+          </a:prstGeom>
+          <a:noFill/>
+        </p:spPr>
+        <p:txBody>
+          <a:bodyPr wrap="square" anchor="t" lIns="0" rIns="0" tIns="0" bIns="0">
+            <a:spAutoFit/>
+          </a:bodyPr>
+          <a:lstStyle/>
+          <a:p>
+            <a:pPr algn="l">
+              <a:lnSpc>
+                <a:spcPct val="115000"/>
+              </a:lnSpc>
+            </a:pPr>
+            <a:r>
+              <a:rPr sz="1200" b="0">
+                <a:solidFill>
+                  <a:srgbClr val="566573"/>
+                </a:solidFill>
+                <a:latin typeface="Meiryo"/>
+              </a:rPr>
+              <a:t>体重の重い方</a:t>
+            </a:r>
+          </a:p>
+        </p:txBody>
+      </p:sp>
+      <p:sp>
+        <p:nvSpPr>
+          <p:cNvPr id="14" name="Rounded Rectangle 13"/>
+          <p:cNvSpPr/>
+          <p:nvPr/>
+        </p:nvSpPr>
+        <p:spPr>
+          <a:xfrm>
+            <a:off x="749808" y="4544568"/>
+            <a:ext cx="2331720" cy="402336"/>
+          </a:xfrm>
+          <a:prstGeom prst="roundRect">
+            <a:avLst>
+              <a:gd name="adj" fmla="val 22727"/>
+            </a:avLst>
+          </a:prstGeom>
+          <a:solidFill>
+            <a:srgbClr val="EAF7F1"/>
+          </a:solidFill>
+          <a:ln>
+            <a:noFill/>
+          </a:ln>
+          <a:effectLst/>
+        </p:spPr>
+        <p:style>
+          <a:lnRef idx="1">
+            <a:schemeClr val="accent1"/>
+          </a:lnRef>
+          <a:fillRef idx="3">
+            <a:schemeClr val="accent1"/>
+          </a:fillRef>
+          <a:effectRef idx="2">
+            <a:schemeClr val="accent1"/>
+          </a:effectRef>
+          <a:fontRef idx="minor">
+            <a:schemeClr val="lt1"/>
+          </a:fontRef>
+        </p:style>
+        <p:txBody>
+          <a:bodyPr rtlCol="0" anchor="ctr"/>
+          <a:lstStyle/>
+          <a:p>
+            <a:pPr algn="ctr"/>
+          </a:p>
+        </p:txBody>
+      </p:sp>
+      <p:sp>
+        <p:nvSpPr>
+          <p:cNvPr id="15" name="TextBox 14"/>
+          <p:cNvSpPr txBox="1"/>
+          <p:nvPr/>
+        </p:nvSpPr>
+        <p:spPr>
+          <a:xfrm>
+            <a:off x="749808" y="4544568"/>
+            <a:ext cx="2331720" cy="402336"/>
+          </a:xfrm>
+          <a:prstGeom prst="rect">
+            <a:avLst/>
+          </a:prstGeom>
+          <a:noFill/>
+        </p:spPr>
+        <p:txBody>
+          <a:bodyPr wrap="square" anchor="ctr" lIns="0" rIns="0" tIns="0" bIns="0">
+            <a:spAutoFit/>
+          </a:bodyPr>
+          <a:lstStyle/>
+          <a:p>
+            <a:pPr algn="ctr">
+              <a:lnSpc>
+                <a:spcPct val="115000"/>
+              </a:lnSpc>
+            </a:pPr>
+            <a:r>
+              <a:rPr sz="1250" b="1">
+                <a:solidFill>
+                  <a:srgbClr val="1D9E75"/>
+                </a:solidFill>
+                <a:latin typeface="Meiryo"/>
+              </a:rPr>
+              <a:t>いちばん短時間</a:t>
+            </a:r>
+          </a:p>
+        </p:txBody>
+      </p:sp>
+      <p:sp>
+        <p:nvSpPr>
+          <p:cNvPr id="16" name="Rounded Rectangle 15"/>
+          <p:cNvSpPr/>
+          <p:nvPr/>
+        </p:nvSpPr>
+        <p:spPr>
+          <a:xfrm>
+            <a:off x="3355848" y="1874519"/>
+            <a:ext cx="2697480" cy="3154680"/>
+          </a:xfrm>
+          <a:prstGeom prst="roundRect">
+            <a:avLst>
+              <a:gd name="adj" fmla="val 3389"/>
+            </a:avLst>
+          </a:prstGeom>
+          <a:solidFill>
+            <a:srgbClr val="F4F8FA"/>
+          </a:solidFill>
+          <a:ln>
+            <a:noFill/>
+          </a:ln>
+          <a:effectLst/>
+        </p:spPr>
+        <p:style>
+          <a:lnRef idx="1">
+            <a:schemeClr val="accent1"/>
+          </a:lnRef>
+          <a:fillRef idx="3">
+            <a:schemeClr val="accent1"/>
+          </a:fillRef>
+          <a:effectRef idx="2">
+            <a:schemeClr val="accent1"/>
+          </a:effectRef>
+          <a:fontRef idx="minor">
+            <a:schemeClr val="lt1"/>
+          </a:fontRef>
+        </p:style>
+        <p:txBody>
+          <a:bodyPr rtlCol="0" anchor="ctr"/>
+          <a:lstStyle/>
+          <a:p>
+            <a:pPr algn="ctr"/>
+          </a:p>
+        </p:txBody>
+      </p:sp>
+      <p:sp>
+        <p:nvSpPr>
+          <p:cNvPr id="17" name="Rounded Rectangle 16"/>
+          <p:cNvSpPr/>
+          <p:nvPr/>
+        </p:nvSpPr>
+        <p:spPr>
+          <a:xfrm>
+            <a:off x="3355848" y="1874519"/>
+            <a:ext cx="2697480" cy="530352"/>
+          </a:xfrm>
+          <a:prstGeom prst="roundRect">
+            <a:avLst>
+              <a:gd name="adj" fmla="val 17241"/>
+            </a:avLst>
+          </a:prstGeom>
+          <a:solidFill>
+            <a:srgbClr val="1A5276"/>
+          </a:solidFill>
+          <a:ln>
+            <a:noFill/>
+          </a:ln>
+          <a:effectLst/>
+        </p:spPr>
+        <p:style>
+          <a:lnRef idx="1">
+            <a:schemeClr val="accent1"/>
+          </a:lnRef>
+          <a:fillRef idx="3">
+            <a:schemeClr val="accent1"/>
+          </a:fillRef>
+          <a:effectRef idx="2">
+            <a:schemeClr val="accent1"/>
+          </a:effectRef>
+          <a:fontRef idx="minor">
+            <a:schemeClr val="lt1"/>
+          </a:fontRef>
+        </p:style>
+        <p:txBody>
+          <a:bodyPr rtlCol="0" anchor="ctr"/>
+          <a:lstStyle/>
+          <a:p>
+            <a:pPr algn="ctr"/>
+          </a:p>
+        </p:txBody>
+      </p:sp>
+      <p:sp>
+        <p:nvSpPr>
+          <p:cNvPr id="18" name="TextBox 17"/>
+          <p:cNvSpPr txBox="1"/>
+          <p:nvPr/>
+        </p:nvSpPr>
+        <p:spPr>
+          <a:xfrm>
+            <a:off x="3355848" y="1874519"/>
+            <a:ext cx="2697480" cy="530352"/>
+          </a:xfrm>
+          <a:prstGeom prst="rect">
+            <a:avLst/>
+          </a:prstGeom>
+          <a:noFill/>
+        </p:spPr>
+        <p:txBody>
+          <a:bodyPr wrap="square" anchor="ctr" lIns="0" rIns="0" tIns="0" bIns="0">
+            <a:spAutoFit/>
+          </a:bodyPr>
+          <a:lstStyle/>
+          <a:p>
+            <a:pPr algn="ctr">
+              <a:lnSpc>
+                <a:spcPct val="115000"/>
+              </a:lnSpc>
+            </a:pPr>
+            <a:r>
+              <a:rPr sz="1700" b="1">
+                <a:solidFill>
+                  <a:srgbClr val="FFFFFF"/>
+                </a:solidFill>
+                <a:latin typeface="Meiryo"/>
+              </a:rPr>
+              <a:t>担架移動</a:t>
+            </a:r>
+          </a:p>
+        </p:txBody>
+      </p:sp>
+      <p:sp>
+        <p:nvSpPr>
+          <p:cNvPr id="19" name="TextBox 18"/>
+          <p:cNvSpPr txBox="1"/>
+          <p:nvPr/>
+        </p:nvSpPr>
+        <p:spPr>
+          <a:xfrm>
+            <a:off x="3538728" y="2532887"/>
+            <a:ext cx="2331720" cy="219456"/>
+          </a:xfrm>
+          <a:prstGeom prst="rect">
+            <a:avLst/>
+          </a:prstGeom>
+          <a:noFill/>
+        </p:spPr>
+        <p:txBody>
+          <a:bodyPr wrap="square" anchor="t" lIns="0" rIns="0" tIns="0" bIns="0">
+            <a:spAutoFit/>
+          </a:bodyPr>
+          <a:lstStyle/>
+          <a:p>
+            <a:pPr algn="l">
+              <a:lnSpc>
+                <a:spcPct val="115000"/>
+              </a:lnSpc>
+            </a:pPr>
+            <a:r>
+              <a:rPr sz="1050" b="1">
+                <a:solidFill>
+                  <a:srgbClr val="1D9E75"/>
+                </a:solidFill>
+                <a:latin typeface="Meiryo"/>
+              </a:rPr>
+              <a:t>こんな方に</a:t>
+            </a:r>
+          </a:p>
+        </p:txBody>
+      </p:sp>
+      <p:sp>
+        <p:nvSpPr>
+          <p:cNvPr id="20" name="TextBox 19"/>
+          <p:cNvSpPr txBox="1"/>
+          <p:nvPr/>
+        </p:nvSpPr>
+        <p:spPr>
+          <a:xfrm>
+            <a:off x="3538728" y="2788920"/>
+            <a:ext cx="2331720" cy="713232"/>
+          </a:xfrm>
+          <a:prstGeom prst="rect">
+            <a:avLst/>
+          </a:prstGeom>
+          <a:noFill/>
+        </p:spPr>
+        <p:txBody>
+          <a:bodyPr wrap="square" anchor="t" lIns="0" rIns="0" tIns="0" bIns="0">
+            <a:spAutoFit/>
+          </a:bodyPr>
+          <a:lstStyle/>
+          <a:p>
+            <a:pPr algn="l">
+              <a:lnSpc>
+                <a:spcPct val="115000"/>
+              </a:lnSpc>
+            </a:pPr>
+            <a:r>
+              <a:rPr sz="1250" b="0">
+                <a:solidFill>
+                  <a:srgbClr val="1C2833"/>
+                </a:solidFill>
+                <a:latin typeface="Meiryo"/>
+              </a:rPr>
+              <a:t>体の大きい方、気管切開の方、全介助の方</a:t>
+            </a:r>
+          </a:p>
+        </p:txBody>
+      </p:sp>
+      <p:sp>
+        <p:nvSpPr>
+          <p:cNvPr id="21" name="TextBox 20"/>
+          <p:cNvSpPr txBox="1"/>
+          <p:nvPr/>
+        </p:nvSpPr>
+        <p:spPr>
+          <a:xfrm>
+            <a:off x="3538728" y="3575304"/>
+            <a:ext cx="2331720" cy="219456"/>
+          </a:xfrm>
+          <a:prstGeom prst="rect">
+            <a:avLst/>
+          </a:prstGeom>
+          <a:noFill/>
+        </p:spPr>
+        <p:txBody>
+          <a:bodyPr wrap="square" anchor="t" lIns="0" rIns="0" tIns="0" bIns="0">
+            <a:spAutoFit/>
+          </a:bodyPr>
+          <a:lstStyle/>
+          <a:p>
+            <a:pPr algn="l">
+              <a:lnSpc>
+                <a:spcPct val="115000"/>
+              </a:lnSpc>
+            </a:pPr>
+            <a:r>
+              <a:rPr sz="1050" b="1">
+                <a:solidFill>
+                  <a:srgbClr val="1A5276"/>
+                </a:solidFill>
+                <a:latin typeface="Meiryo"/>
+              </a:rPr>
+              <a:t>必ずこの方法</a:t>
+            </a:r>
+          </a:p>
+        </p:txBody>
+      </p:sp>
+      <p:sp>
+        <p:nvSpPr>
+          <p:cNvPr id="22" name="TextBox 21"/>
+          <p:cNvSpPr txBox="1"/>
+          <p:nvPr/>
+        </p:nvSpPr>
+        <p:spPr>
+          <a:xfrm>
+            <a:off x="3538728" y="3831335"/>
+            <a:ext cx="2331720" cy="713232"/>
+          </a:xfrm>
+          <a:prstGeom prst="rect">
+            <a:avLst/>
+          </a:prstGeom>
+          <a:noFill/>
+        </p:spPr>
+        <p:txBody>
+          <a:bodyPr wrap="square" anchor="t" lIns="0" rIns="0" tIns="0" bIns="0">
+            <a:spAutoFit/>
+          </a:bodyPr>
+          <a:lstStyle/>
+          <a:p>
+            <a:pPr algn="l">
+              <a:lnSpc>
+                <a:spcPct val="115000"/>
+              </a:lnSpc>
+            </a:pPr>
+            <a:r>
+              <a:rPr sz="1200" b="0">
+                <a:solidFill>
+                  <a:srgbClr val="566573"/>
+                </a:solidFill>
+                <a:latin typeface="Meiryo"/>
+              </a:rPr>
+              <a:t>人工呼吸器を外せない方。回路が引っ張られないように</a:t>
+            </a:r>
+          </a:p>
+        </p:txBody>
+      </p:sp>
+      <p:sp>
+        <p:nvSpPr>
+          <p:cNvPr id="23" name="Rounded Rectangle 22"/>
+          <p:cNvSpPr/>
+          <p:nvPr/>
+        </p:nvSpPr>
+        <p:spPr>
+          <a:xfrm>
+            <a:off x="3538728" y="4544568"/>
+            <a:ext cx="2331720" cy="402336"/>
+          </a:xfrm>
+          <a:prstGeom prst="roundRect">
+            <a:avLst>
+              <a:gd name="adj" fmla="val 22727"/>
+            </a:avLst>
+          </a:prstGeom>
+          <a:solidFill>
+            <a:srgbClr val="EAF7F1"/>
+          </a:solidFill>
+          <a:ln>
+            <a:noFill/>
+          </a:ln>
+          <a:effectLst/>
+        </p:spPr>
+        <p:style>
+          <a:lnRef idx="1">
+            <a:schemeClr val="accent1"/>
+          </a:lnRef>
+          <a:fillRef idx="3">
+            <a:schemeClr val="accent1"/>
+          </a:fillRef>
+          <a:effectRef idx="2">
+            <a:schemeClr val="accent1"/>
+          </a:effectRef>
+          <a:fontRef idx="minor">
+            <a:schemeClr val="lt1"/>
+          </a:fontRef>
+        </p:style>
+        <p:txBody>
+          <a:bodyPr rtlCol="0" anchor="ctr"/>
+          <a:lstStyle/>
+          <a:p>
+            <a:pPr algn="ctr"/>
+          </a:p>
+        </p:txBody>
+      </p:sp>
+      <p:sp>
+        <p:nvSpPr>
+          <p:cNvPr id="24" name="TextBox 23"/>
+          <p:cNvSpPr txBox="1"/>
+          <p:nvPr/>
+        </p:nvSpPr>
+        <p:spPr>
+          <a:xfrm>
+            <a:off x="3538728" y="4544568"/>
+            <a:ext cx="2331720" cy="402336"/>
+          </a:xfrm>
+          <a:prstGeom prst="rect">
+            <a:avLst/>
+          </a:prstGeom>
+          <a:noFill/>
+        </p:spPr>
+        <p:txBody>
+          <a:bodyPr wrap="square" anchor="ctr" lIns="0" rIns="0" tIns="0" bIns="0">
+            <a:spAutoFit/>
+          </a:bodyPr>
+          <a:lstStyle/>
+          <a:p>
+            <a:pPr algn="ctr">
+              <a:lnSpc>
+                <a:spcPct val="115000"/>
+              </a:lnSpc>
+            </a:pPr>
+            <a:r>
+              <a:rPr sz="1250" b="1">
+                <a:solidFill>
+                  <a:srgbClr val="1D9E75"/>
+                </a:solidFill>
+                <a:latin typeface="Meiryo"/>
+              </a:rPr>
+              <a:t>いちばん安全</a:t>
+            </a:r>
+          </a:p>
+        </p:txBody>
+      </p:sp>
+      <p:sp>
+        <p:nvSpPr>
+          <p:cNvPr id="25" name="Rounded Rectangle 24"/>
+          <p:cNvSpPr/>
+          <p:nvPr/>
+        </p:nvSpPr>
+        <p:spPr>
+          <a:xfrm>
+            <a:off x="6144768" y="1874519"/>
+            <a:ext cx="2697480" cy="3154680"/>
+          </a:xfrm>
+          <a:prstGeom prst="roundRect">
+            <a:avLst>
+              <a:gd name="adj" fmla="val 3389"/>
+            </a:avLst>
+          </a:prstGeom>
+          <a:solidFill>
+            <a:srgbClr val="F4F8FA"/>
+          </a:solidFill>
+          <a:ln>
+            <a:noFill/>
+          </a:ln>
+          <a:effectLst/>
+        </p:spPr>
+        <p:style>
+          <a:lnRef idx="1">
+            <a:schemeClr val="accent1"/>
+          </a:lnRef>
+          <a:fillRef idx="3">
+            <a:schemeClr val="accent1"/>
+          </a:fillRef>
+          <a:effectRef idx="2">
+            <a:schemeClr val="accent1"/>
+          </a:effectRef>
+          <a:fontRef idx="minor">
+            <a:schemeClr val="lt1"/>
+          </a:fontRef>
+        </p:style>
+        <p:txBody>
+          <a:bodyPr rtlCol="0" anchor="ctr"/>
+          <a:lstStyle/>
+          <a:p>
+            <a:pPr algn="ctr"/>
+          </a:p>
+        </p:txBody>
+      </p:sp>
+      <p:sp>
+        <p:nvSpPr>
+          <p:cNvPr id="26" name="Rounded Rectangle 25"/>
+          <p:cNvSpPr/>
+          <p:nvPr/>
+        </p:nvSpPr>
+        <p:spPr>
+          <a:xfrm>
+            <a:off x="6144768" y="1874519"/>
+            <a:ext cx="2697480" cy="530352"/>
+          </a:xfrm>
+          <a:prstGeom prst="roundRect">
+            <a:avLst>
+              <a:gd name="adj" fmla="val 17241"/>
+            </a:avLst>
+          </a:prstGeom>
+          <a:solidFill>
+            <a:srgbClr val="1A5276"/>
+          </a:solidFill>
+          <a:ln>
+            <a:noFill/>
+          </a:ln>
+          <a:effectLst/>
+        </p:spPr>
+        <p:style>
+          <a:lnRef idx="1">
+            <a:schemeClr val="accent1"/>
+          </a:lnRef>
+          <a:fillRef idx="3">
+            <a:schemeClr val="accent1"/>
+          </a:fillRef>
+          <a:effectRef idx="2">
+            <a:schemeClr val="accent1"/>
+          </a:effectRef>
+          <a:fontRef idx="minor">
+            <a:schemeClr val="lt1"/>
+          </a:fontRef>
+        </p:style>
+        <p:txBody>
+          <a:bodyPr rtlCol="0" anchor="ctr"/>
+          <a:lstStyle/>
+          <a:p>
+            <a:pPr algn="ctr"/>
+          </a:p>
+        </p:txBody>
+      </p:sp>
+      <p:sp>
+        <p:nvSpPr>
+          <p:cNvPr id="27" name="TextBox 26"/>
+          <p:cNvSpPr txBox="1"/>
+          <p:nvPr/>
+        </p:nvSpPr>
+        <p:spPr>
+          <a:xfrm>
+            <a:off x="6144768" y="1874519"/>
+            <a:ext cx="2697480" cy="530352"/>
+          </a:xfrm>
+          <a:prstGeom prst="rect">
+            <a:avLst/>
+          </a:prstGeom>
+          <a:noFill/>
+        </p:spPr>
+        <p:txBody>
+          <a:bodyPr wrap="square" anchor="ctr" lIns="0" rIns="0" tIns="0" bIns="0">
+            <a:spAutoFit/>
+          </a:bodyPr>
+          <a:lstStyle/>
+          <a:p>
+            <a:pPr algn="ctr">
+              <a:lnSpc>
+                <a:spcPct val="115000"/>
+              </a:lnSpc>
+            </a:pPr>
+            <a:r>
+              <a:rPr sz="1700" b="1">
+                <a:solidFill>
+                  <a:srgbClr val="FFFFFF"/>
+                </a:solidFill>
+                <a:latin typeface="Meiryo"/>
+              </a:rPr>
+              <a:t>上下移動</a:t>
+            </a:r>
+          </a:p>
+        </p:txBody>
+      </p:sp>
+      <p:sp>
+        <p:nvSpPr>
+          <p:cNvPr id="28" name="TextBox 27"/>
+          <p:cNvSpPr txBox="1"/>
+          <p:nvPr/>
+        </p:nvSpPr>
+        <p:spPr>
+          <a:xfrm>
+            <a:off x="6327648" y="2532887"/>
+            <a:ext cx="2331720" cy="219456"/>
+          </a:xfrm>
+          <a:prstGeom prst="rect">
+            <a:avLst/>
+          </a:prstGeom>
+          <a:noFill/>
+        </p:spPr>
+        <p:txBody>
+          <a:bodyPr wrap="square" anchor="t" lIns="0" rIns="0" tIns="0" bIns="0">
+            <a:spAutoFit/>
+          </a:bodyPr>
+          <a:lstStyle/>
+          <a:p>
+            <a:pPr algn="l">
+              <a:lnSpc>
+                <a:spcPct val="115000"/>
+              </a:lnSpc>
+            </a:pPr>
+            <a:r>
+              <a:rPr sz="1050" b="1">
+                <a:solidFill>
+                  <a:srgbClr val="1D9E75"/>
+                </a:solidFill>
+                <a:latin typeface="Meiryo"/>
+              </a:rPr>
+              <a:t>こんな方に</a:t>
+            </a:r>
+          </a:p>
+        </p:txBody>
+      </p:sp>
+      <p:sp>
+        <p:nvSpPr>
+          <p:cNvPr id="29" name="TextBox 28"/>
+          <p:cNvSpPr txBox="1"/>
+          <p:nvPr/>
+        </p:nvSpPr>
+        <p:spPr>
+          <a:xfrm>
+            <a:off x="6327648" y="2788920"/>
+            <a:ext cx="2331720" cy="713232"/>
+          </a:xfrm>
+          <a:prstGeom prst="rect">
+            <a:avLst/>
+          </a:prstGeom>
+          <a:noFill/>
+        </p:spPr>
+        <p:txBody>
+          <a:bodyPr wrap="square" anchor="t" lIns="0" rIns="0" tIns="0" bIns="0">
+            <a:spAutoFit/>
+          </a:bodyPr>
+          <a:lstStyle/>
+          <a:p>
+            <a:pPr algn="l">
+              <a:lnSpc>
+                <a:spcPct val="115000"/>
+              </a:lnSpc>
+            </a:pPr>
+            <a:r>
+              <a:rPr sz="1250" b="0">
+                <a:solidFill>
+                  <a:srgbClr val="1C2833"/>
+                </a:solidFill>
+                <a:latin typeface="Meiryo"/>
+              </a:rPr>
+              <a:t>車椅子で生活されている方</a:t>
+            </a:r>
+          </a:p>
+        </p:txBody>
+      </p:sp>
+      <p:sp>
+        <p:nvSpPr>
+          <p:cNvPr id="30" name="TextBox 29"/>
+          <p:cNvSpPr txBox="1"/>
+          <p:nvPr/>
+        </p:nvSpPr>
+        <p:spPr>
+          <a:xfrm>
+            <a:off x="6327648" y="3575304"/>
+            <a:ext cx="2331720" cy="219456"/>
+          </a:xfrm>
+          <a:prstGeom prst="rect">
+            <a:avLst/>
+          </a:prstGeom>
+          <a:noFill/>
+        </p:spPr>
+        <p:txBody>
+          <a:bodyPr wrap="square" anchor="t" lIns="0" rIns="0" tIns="0" bIns="0">
+            <a:spAutoFit/>
+          </a:bodyPr>
+          <a:lstStyle/>
+          <a:p>
+            <a:pPr algn="l">
+              <a:lnSpc>
+                <a:spcPct val="115000"/>
+              </a:lnSpc>
+            </a:pPr>
+            <a:r>
+              <a:rPr sz="1050" b="1">
+                <a:solidFill>
+                  <a:srgbClr val="1A5276"/>
+                </a:solidFill>
+                <a:latin typeface="Meiryo"/>
+              </a:rPr>
+              <a:t>支え方</a:t>
+            </a:r>
+          </a:p>
+        </p:txBody>
+      </p:sp>
+      <p:sp>
+        <p:nvSpPr>
+          <p:cNvPr id="31" name="TextBox 30"/>
+          <p:cNvSpPr txBox="1"/>
+          <p:nvPr/>
+        </p:nvSpPr>
+        <p:spPr>
+          <a:xfrm>
+            <a:off x="6327648" y="3831335"/>
+            <a:ext cx="2331720" cy="713232"/>
+          </a:xfrm>
+          <a:prstGeom prst="rect">
+            <a:avLst/>
+          </a:prstGeom>
+          <a:noFill/>
+        </p:spPr>
+        <p:txBody>
+          <a:bodyPr wrap="square" anchor="t" lIns="0" rIns="0" tIns="0" bIns="0">
+            <a:spAutoFit/>
+          </a:bodyPr>
+          <a:lstStyle/>
+          <a:p>
+            <a:pPr algn="l">
+              <a:lnSpc>
+                <a:spcPct val="115000"/>
+              </a:lnSpc>
+            </a:pPr>
+            <a:r>
+              <a:rPr sz="1200" b="0">
+                <a:solidFill>
+                  <a:srgbClr val="566573"/>
+                </a:solidFill>
+                <a:latin typeface="Meiryo"/>
+              </a:rPr>
+              <a:t>上半身・臀部・下肢を3名で支え、高さを合わせます</a:t>
+            </a:r>
+          </a:p>
+        </p:txBody>
+      </p:sp>
+      <p:sp>
+        <p:nvSpPr>
+          <p:cNvPr id="32" name="Rounded Rectangle 31"/>
+          <p:cNvSpPr/>
+          <p:nvPr/>
+        </p:nvSpPr>
+        <p:spPr>
+          <a:xfrm>
+            <a:off x="6327648" y="4544568"/>
+            <a:ext cx="2331720" cy="402336"/>
+          </a:xfrm>
+          <a:prstGeom prst="roundRect">
+            <a:avLst>
+              <a:gd name="adj" fmla="val 22727"/>
+            </a:avLst>
+          </a:prstGeom>
+          <a:solidFill>
+            <a:srgbClr val="EAF7F1"/>
+          </a:solidFill>
+          <a:ln>
+            <a:noFill/>
+          </a:ln>
+          <a:effectLst/>
+        </p:spPr>
+        <p:style>
+          <a:lnRef idx="1">
+            <a:schemeClr val="accent1"/>
+          </a:lnRef>
+          <a:fillRef idx="3">
+            <a:schemeClr val="accent1"/>
+          </a:fillRef>
+          <a:effectRef idx="2">
+            <a:schemeClr val="accent1"/>
+          </a:effectRef>
+          <a:fontRef idx="minor">
+            <a:schemeClr val="lt1"/>
+          </a:fontRef>
+        </p:style>
+        <p:txBody>
+          <a:bodyPr rtlCol="0" anchor="ctr"/>
+          <a:lstStyle/>
+          <a:p>
+            <a:pPr algn="ctr"/>
+          </a:p>
+        </p:txBody>
+      </p:sp>
+      <p:sp>
+        <p:nvSpPr>
+          <p:cNvPr id="33" name="TextBox 32"/>
+          <p:cNvSpPr txBox="1"/>
+          <p:nvPr/>
+        </p:nvSpPr>
+        <p:spPr>
+          <a:xfrm>
+            <a:off x="6327648" y="4544568"/>
+            <a:ext cx="2331720" cy="402336"/>
+          </a:xfrm>
+          <a:prstGeom prst="rect">
+            <a:avLst/>
+          </a:prstGeom>
+          <a:noFill/>
+        </p:spPr>
+        <p:txBody>
+          <a:bodyPr wrap="square" anchor="ctr" lIns="0" rIns="0" tIns="0" bIns="0">
+            <a:spAutoFit/>
+          </a:bodyPr>
+          <a:lstStyle/>
+          <a:p>
+            <a:pPr algn="ctr">
+              <a:lnSpc>
+                <a:spcPct val="115000"/>
+              </a:lnSpc>
+            </a:pPr>
+            <a:r>
+              <a:rPr sz="1250" b="1">
+                <a:solidFill>
+                  <a:srgbClr val="1D9E75"/>
+                </a:solidFill>
+                <a:latin typeface="Meiryo"/>
+              </a:rPr>
+              <a:t>車椅子から直接</a:t>
+            </a:r>
+          </a:p>
+        </p:txBody>
+      </p:sp>
+      <p:sp>
+        <p:nvSpPr>
+          <p:cNvPr id="34" name="Rounded Rectangle 33"/>
+          <p:cNvSpPr/>
+          <p:nvPr/>
+        </p:nvSpPr>
+        <p:spPr>
+          <a:xfrm>
+            <a:off x="8933688" y="1874519"/>
+            <a:ext cx="2697480" cy="3154680"/>
+          </a:xfrm>
+          <a:prstGeom prst="roundRect">
+            <a:avLst>
+              <a:gd name="adj" fmla="val 3389"/>
+            </a:avLst>
+          </a:prstGeom>
+          <a:solidFill>
+            <a:srgbClr val="F4F8FA"/>
+          </a:solidFill>
+          <a:ln>
+            <a:noFill/>
+          </a:ln>
+          <a:effectLst/>
+        </p:spPr>
+        <p:style>
+          <a:lnRef idx="1">
+            <a:schemeClr val="accent1"/>
+          </a:lnRef>
+          <a:fillRef idx="3">
+            <a:schemeClr val="accent1"/>
+          </a:fillRef>
+          <a:effectRef idx="2">
+            <a:schemeClr val="accent1"/>
+          </a:effectRef>
+          <a:fontRef idx="minor">
+            <a:schemeClr val="lt1"/>
+          </a:fontRef>
+        </p:style>
+        <p:txBody>
+          <a:bodyPr rtlCol="0" anchor="ctr"/>
+          <a:lstStyle/>
+          <a:p>
+            <a:pPr algn="ctr"/>
+          </a:p>
+        </p:txBody>
+      </p:sp>
+      <p:sp>
+        <p:nvSpPr>
+          <p:cNvPr id="35" name="Rounded Rectangle 34"/>
+          <p:cNvSpPr/>
+          <p:nvPr/>
+        </p:nvSpPr>
+        <p:spPr>
+          <a:xfrm>
+            <a:off x="8933688" y="1874519"/>
+            <a:ext cx="2697480" cy="530352"/>
+          </a:xfrm>
+          <a:prstGeom prst="roundRect">
+            <a:avLst>
+              <a:gd name="adj" fmla="val 17241"/>
+            </a:avLst>
+          </a:prstGeom>
+          <a:solidFill>
+            <a:srgbClr val="1A5276"/>
+          </a:solidFill>
+          <a:ln>
+            <a:noFill/>
+          </a:ln>
+          <a:effectLst/>
+        </p:spPr>
+        <p:style>
+          <a:lnRef idx="1">
+            <a:schemeClr val="accent1"/>
+          </a:lnRef>
+          <a:fillRef idx="3">
+            <a:schemeClr val="accent1"/>
+          </a:fillRef>
+          <a:effectRef idx="2">
+            <a:schemeClr val="accent1"/>
+          </a:effectRef>
+          <a:fontRef idx="minor">
+            <a:schemeClr val="lt1"/>
+          </a:fontRef>
+        </p:style>
+        <p:txBody>
+          <a:bodyPr rtlCol="0" anchor="ctr"/>
+          <a:lstStyle/>
+          <a:p>
+            <a:pPr algn="ctr"/>
+          </a:p>
+        </p:txBody>
+      </p:sp>
+      <p:sp>
+        <p:nvSpPr>
+          <p:cNvPr id="36" name="TextBox 35"/>
+          <p:cNvSpPr txBox="1"/>
+          <p:nvPr/>
+        </p:nvSpPr>
+        <p:spPr>
+          <a:xfrm>
+            <a:off x="8933688" y="1874519"/>
+            <a:ext cx="2697480" cy="530352"/>
+          </a:xfrm>
+          <a:prstGeom prst="rect">
+            <a:avLst/>
+          </a:prstGeom>
+          <a:noFill/>
+        </p:spPr>
+        <p:txBody>
+          <a:bodyPr wrap="square" anchor="ctr" lIns="0" rIns="0" tIns="0" bIns="0">
+            <a:spAutoFit/>
+          </a:bodyPr>
+          <a:lstStyle/>
+          <a:p>
+            <a:pPr algn="ctr">
+              <a:lnSpc>
+                <a:spcPct val="115000"/>
+              </a:lnSpc>
+            </a:pPr>
+            <a:r>
+              <a:rPr sz="1700" b="1">
+                <a:solidFill>
+                  <a:srgbClr val="FFFFFF"/>
+                </a:solidFill>
+                <a:latin typeface="Meiryo"/>
+              </a:rPr>
+              <a:t>座位回転</a:t>
+            </a:r>
+          </a:p>
+        </p:txBody>
+      </p:sp>
+      <p:sp>
+        <p:nvSpPr>
+          <p:cNvPr id="37" name="TextBox 36"/>
+          <p:cNvSpPr txBox="1"/>
+          <p:nvPr/>
+        </p:nvSpPr>
+        <p:spPr>
+          <a:xfrm>
+            <a:off x="9116567" y="2532887"/>
+            <a:ext cx="2331720" cy="219456"/>
+          </a:xfrm>
+          <a:prstGeom prst="rect">
+            <a:avLst/>
+          </a:prstGeom>
+          <a:noFill/>
+        </p:spPr>
+        <p:txBody>
+          <a:bodyPr wrap="square" anchor="t" lIns="0" rIns="0" tIns="0" bIns="0">
+            <a:spAutoFit/>
+          </a:bodyPr>
+          <a:lstStyle/>
+          <a:p>
+            <a:pPr algn="l">
+              <a:lnSpc>
+                <a:spcPct val="115000"/>
+              </a:lnSpc>
+            </a:pPr>
+            <a:r>
+              <a:rPr sz="1050" b="1">
+                <a:solidFill>
+                  <a:srgbClr val="1D9E75"/>
+                </a:solidFill>
+                <a:latin typeface="Meiryo"/>
+              </a:rPr>
+              <a:t>こんな方に</a:t>
+            </a:r>
+          </a:p>
+        </p:txBody>
+      </p:sp>
+      <p:sp>
+        <p:nvSpPr>
+          <p:cNvPr id="38" name="TextBox 37"/>
+          <p:cNvSpPr txBox="1"/>
+          <p:nvPr/>
+        </p:nvSpPr>
+        <p:spPr>
+          <a:xfrm>
+            <a:off x="9116567" y="2788920"/>
+            <a:ext cx="2331720" cy="713232"/>
+          </a:xfrm>
+          <a:prstGeom prst="rect">
+            <a:avLst/>
+          </a:prstGeom>
+          <a:noFill/>
+        </p:spPr>
+        <p:txBody>
+          <a:bodyPr wrap="square" anchor="t" lIns="0" rIns="0" tIns="0" bIns="0">
+            <a:spAutoFit/>
+          </a:bodyPr>
+          <a:lstStyle/>
+          <a:p>
+            <a:pPr algn="l">
+              <a:lnSpc>
+                <a:spcPct val="115000"/>
+              </a:lnSpc>
+            </a:pPr>
+            <a:r>
+              <a:rPr sz="1250" b="0">
+                <a:solidFill>
+                  <a:srgbClr val="1C2833"/>
+                </a:solidFill>
+                <a:latin typeface="Meiryo"/>
+              </a:rPr>
+              <a:t>介助で立位がとれ、少し歩ける方</a:t>
+            </a:r>
+          </a:p>
+        </p:txBody>
+      </p:sp>
+      <p:sp>
+        <p:nvSpPr>
+          <p:cNvPr id="39" name="TextBox 38"/>
+          <p:cNvSpPr txBox="1"/>
+          <p:nvPr/>
+        </p:nvSpPr>
+        <p:spPr>
+          <a:xfrm>
+            <a:off x="9116567" y="3575304"/>
+            <a:ext cx="2331720" cy="219456"/>
+          </a:xfrm>
+          <a:prstGeom prst="rect">
+            <a:avLst/>
+          </a:prstGeom>
+          <a:noFill/>
+        </p:spPr>
+        <p:txBody>
+          <a:bodyPr wrap="square" anchor="t" lIns="0" rIns="0" tIns="0" bIns="0">
+            <a:spAutoFit/>
+          </a:bodyPr>
+          <a:lstStyle/>
+          <a:p>
+            <a:pPr algn="l">
+              <a:lnSpc>
+                <a:spcPct val="115000"/>
+              </a:lnSpc>
+            </a:pPr>
+            <a:r>
+              <a:rPr sz="1050" b="1">
+                <a:solidFill>
+                  <a:srgbClr val="1A5276"/>
+                </a:solidFill>
+                <a:latin typeface="Meiryo"/>
+              </a:rPr>
+              <a:t>選ばないのは</a:t>
+            </a:r>
+          </a:p>
+        </p:txBody>
+      </p:sp>
+      <p:sp>
+        <p:nvSpPr>
+          <p:cNvPr id="40" name="TextBox 39"/>
+          <p:cNvSpPr txBox="1"/>
+          <p:nvPr/>
+        </p:nvSpPr>
+        <p:spPr>
+          <a:xfrm>
+            <a:off x="9116567" y="3831335"/>
+            <a:ext cx="2331720" cy="713232"/>
+          </a:xfrm>
+          <a:prstGeom prst="rect">
+            <a:avLst/>
+          </a:prstGeom>
+          <a:noFill/>
+        </p:spPr>
+        <p:txBody>
+          <a:bodyPr wrap="square" anchor="t" lIns="0" rIns="0" tIns="0" bIns="0">
+            <a:spAutoFit/>
+          </a:bodyPr>
+          <a:lstStyle/>
+          <a:p>
+            <a:pPr algn="l">
+              <a:lnSpc>
+                <a:spcPct val="115000"/>
+              </a:lnSpc>
+            </a:pPr>
+            <a:r>
+              <a:rPr sz="1200" b="0">
+                <a:solidFill>
+                  <a:srgbClr val="566573"/>
+                </a:solidFill>
+                <a:latin typeface="Meiryo"/>
+              </a:rPr>
+              <a:t>立位がとれない方</a:t>
+            </a:r>
+          </a:p>
+        </p:txBody>
+      </p:sp>
+      <p:sp>
+        <p:nvSpPr>
+          <p:cNvPr id="41" name="Rounded Rectangle 40"/>
+          <p:cNvSpPr/>
+          <p:nvPr/>
+        </p:nvSpPr>
+        <p:spPr>
+          <a:xfrm>
+            <a:off x="9116567" y="4544568"/>
+            <a:ext cx="2331720" cy="402336"/>
+          </a:xfrm>
+          <a:prstGeom prst="roundRect">
+            <a:avLst>
+              <a:gd name="adj" fmla="val 22727"/>
+            </a:avLst>
+          </a:prstGeom>
+          <a:solidFill>
+            <a:srgbClr val="EAF7F1"/>
+          </a:solidFill>
+          <a:ln>
+            <a:noFill/>
+          </a:ln>
+          <a:effectLst/>
+        </p:spPr>
+        <p:style>
+          <a:lnRef idx="1">
+            <a:schemeClr val="accent1"/>
+          </a:lnRef>
+          <a:fillRef idx="3">
+            <a:schemeClr val="accent1"/>
+          </a:fillRef>
+          <a:effectRef idx="2">
+            <a:schemeClr val="accent1"/>
+          </a:effectRef>
+          <a:fontRef idx="minor">
+            <a:schemeClr val="lt1"/>
+          </a:fontRef>
+        </p:style>
+        <p:txBody>
+          <a:bodyPr rtlCol="0" anchor="ctr"/>
+          <a:lstStyle/>
+          <a:p>
+            <a:pPr algn="ctr"/>
+          </a:p>
+        </p:txBody>
+      </p:sp>
+      <p:sp>
+        <p:nvSpPr>
+          <p:cNvPr id="42" name="TextBox 41"/>
+          <p:cNvSpPr txBox="1"/>
+          <p:nvPr/>
+        </p:nvSpPr>
+        <p:spPr>
+          <a:xfrm>
+            <a:off x="9116567" y="4544568"/>
+            <a:ext cx="2331720" cy="402336"/>
+          </a:xfrm>
+          <a:prstGeom prst="rect">
+            <a:avLst/>
+          </a:prstGeom>
+          <a:noFill/>
+        </p:spPr>
+        <p:txBody>
+          <a:bodyPr wrap="square" anchor="ctr" lIns="0" rIns="0" tIns="0" bIns="0">
+            <a:spAutoFit/>
+          </a:bodyPr>
+          <a:lstStyle/>
+          <a:p>
+            <a:pPr algn="ctr">
+              <a:lnSpc>
+                <a:spcPct val="115000"/>
+              </a:lnSpc>
+            </a:pPr>
+            <a:r>
+              <a:rPr sz="1250" b="1">
+                <a:solidFill>
+                  <a:srgbClr val="1D9E75"/>
+                </a:solidFill>
+                <a:latin typeface="Meiryo"/>
+              </a:rPr>
+              <a:t>ご本人の力を残す</a:t>
+            </a:r>
+          </a:p>
+        </p:txBody>
+      </p:sp>
+      <p:sp>
+        <p:nvSpPr>
+          <p:cNvPr id="43" name="Rounded Rectangle 42"/>
+          <p:cNvSpPr/>
+          <p:nvPr/>
+        </p:nvSpPr>
+        <p:spPr>
+          <a:xfrm>
+            <a:off x="566928" y="5230368"/>
+            <a:ext cx="11055096" cy="914400"/>
+          </a:xfrm>
+          <a:prstGeom prst="roundRect">
+            <a:avLst>
+              <a:gd name="adj" fmla="val 10000"/>
+            </a:avLst>
+          </a:prstGeom>
+          <a:solidFill>
+            <a:srgbClr val="1D9E75"/>
+          </a:solidFill>
+          <a:ln>
+            <a:noFill/>
+          </a:ln>
+          <a:effectLst/>
+        </p:spPr>
+        <p:style>
+          <a:lnRef idx="1">
+            <a:schemeClr val="accent1"/>
+          </a:lnRef>
+          <a:fillRef idx="3">
+            <a:schemeClr val="accent1"/>
+          </a:fillRef>
+          <a:effectRef idx="2">
+            <a:schemeClr val="accent1"/>
+          </a:effectRef>
+          <a:fontRef idx="minor">
+            <a:schemeClr val="lt1"/>
+          </a:fontRef>
+        </p:style>
+        <p:txBody>
+          <a:bodyPr rtlCol="0" anchor="ctr"/>
+          <a:lstStyle/>
+          <a:p>
+            <a:pPr algn="ctr"/>
+          </a:p>
+        </p:txBody>
+      </p:sp>
+      <p:sp>
+        <p:nvSpPr>
+          <p:cNvPr id="44" name="TextBox 43"/>
+          <p:cNvSpPr txBox="1"/>
+          <p:nvPr/>
+        </p:nvSpPr>
+        <p:spPr>
+          <a:xfrm>
+            <a:off x="841248" y="5230368"/>
+            <a:ext cx="10506456" cy="914400"/>
+          </a:xfrm>
+          <a:prstGeom prst="rect">
+            <a:avLst/>
+          </a:prstGeom>
+          <a:noFill/>
+        </p:spPr>
+        <p:txBody>
+          <a:bodyPr wrap="square" anchor="ctr" lIns="0" rIns="0" tIns="0" bIns="0">
+            <a:spAutoFit/>
+          </a:bodyPr>
+          <a:lstStyle/>
+          <a:p>
+            <a:pPr algn="l">
+              <a:lnSpc>
+                <a:spcPct val="115000"/>
+              </a:lnSpc>
+            </a:pPr>
+            <a:r>
+              <a:rPr sz="1700" b="1">
+                <a:solidFill>
+                  <a:srgbClr val="FFFFFF"/>
+                </a:solidFill>
+                <a:latin typeface="Meiryo"/>
+              </a:rPr>
+              <a:t>方法は固定ではありません。</a:t>
+            </a:r>
+          </a:p>
+          <a:p>
+            <a:pPr algn="l">
+              <a:lnSpc>
+                <a:spcPct val="115000"/>
+              </a:lnSpc>
+              <a:spcBef>
+                <a:spcPts val="500"/>
+              </a:spcBef>
+            </a:pPr>
+            <a:r>
+              <a:rPr sz="1350" b="0">
+                <a:solidFill>
+                  <a:srgbClr val="FFFFFF"/>
+                </a:solidFill>
+                <a:latin typeface="Meiryo"/>
+              </a:rPr>
+              <a:t>事前訪問で決め、やってみてより安全・安楽な方へ変えます。ADLが上がれば座位回転へ。変更のつど、ご本人とご家族に確認しています。</a:t>
+            </a:r>
+          </a:p>
+        </p:txBody>
+      </p:sp>
+    </p:spTree>
+  </p:cSld>
+  <p:clrMapOvr>
+    <a:masterClrMapping/>
+  </p:clrMapOvr>
+</p:sld>
+</file>
+
+<file path=ppt/slides/slide15.xml><?xml version="1.0" encoding="utf-8"?>
 <p:sld xmlns:a="http://schemas.openxmlformats.org/drawingml/2006/main" xmlns:r="http://schemas.openxmlformats.org/officeDocument/2006/relationships" xmlns:p="http://schemas.openxmlformats.org/presentationml/2006/main">
   <p:cSld name="Slide 14">
     <p:spTree>
@@ -8224,7 +10080,7 @@
 </p:sld>
 </file>
 
-<file path=ppt/slides/slide15.xml><?xml version="1.0" encoding="utf-8"?>
+<file path=ppt/slides/slide16.xml><?xml version="1.0" encoding="utf-8"?>
 <p:sld xmlns:a="http://schemas.openxmlformats.org/drawingml/2006/main" xmlns:r="http://schemas.openxmlformats.org/officeDocument/2006/relationships" xmlns:p="http://schemas.openxmlformats.org/presentationml/2006/main">
   <p:cSld name="Slide 15">
     <p:bg>
@@ -8709,1451 +10565,6 @@
               <a:t>初回アセスメントは無料でお伺いします。導入の可否判断からお手伝いします。</a:t>
             </a:r>
             <a:endParaRPr lang="en-US" sz="1200" dirty="0"/>
-          </a:p>
-        </p:txBody>
-      </p:sp>
-    </p:spTree>
-  </p:cSld>
-  <p:clrMapOvr>
-    <a:masterClrMapping/>
-  </p:clrMapOvr>
-</p:sld>
-</file>
-
-<file path=ppt/slides/slide16.xml><?xml version="1.0" encoding="utf-8"?>
-<p:sld xmlns:a="http://schemas.openxmlformats.org/drawingml/2006/main" xmlns:p="http://schemas.openxmlformats.org/presentationml/2006/main" xmlns:r="http://schemas.openxmlformats.org/officeDocument/2006/relationships">
-  <p:cSld>
-    <p:spTree>
-      <p:nvGrpSpPr>
-        <p:cNvPr id="1" name=""/>
-        <p:cNvGrpSpPr/>
-        <p:nvPr/>
-      </p:nvGrpSpPr>
-      <p:grpSpPr/>
-      <p:sp>
-        <p:nvSpPr>
-          <p:cNvPr id="2" name="Rounded Rectangle 1"/>
-          <p:cNvSpPr/>
-          <p:nvPr/>
-        </p:nvSpPr>
-        <p:spPr>
-          <a:xfrm>
-            <a:off x="566928" y="329184"/>
-            <a:ext cx="1481328" cy="310896"/>
-          </a:xfrm>
-          <a:prstGeom prst="roundRect">
-            <a:avLst>
-              <a:gd name="adj" fmla="val 14705"/>
-            </a:avLst>
-          </a:prstGeom>
-          <a:solidFill>
-            <a:srgbClr val="1D9E75"/>
-          </a:solidFill>
-          <a:ln>
-            <a:noFill/>
-          </a:ln>
-          <a:effectLst/>
-        </p:spPr>
-        <p:style>
-          <a:lnRef idx="1">
-            <a:schemeClr val="accent1"/>
-          </a:lnRef>
-          <a:fillRef idx="3">
-            <a:schemeClr val="accent1"/>
-          </a:fillRef>
-          <a:effectRef idx="2">
-            <a:schemeClr val="accent1"/>
-          </a:effectRef>
-          <a:fontRef idx="minor">
-            <a:schemeClr val="lt1"/>
-          </a:fontRef>
-        </p:style>
-        <p:txBody>
-          <a:bodyPr rtlCol="0" anchor="ctr"/>
-          <a:lstStyle/>
-          <a:p>
-            <a:pPr algn="ctr"/>
-          </a:p>
-        </p:txBody>
-      </p:sp>
-      <p:sp>
-        <p:nvSpPr>
-          <p:cNvPr id="3" name="TextBox 2"/>
-          <p:cNvSpPr txBox="1"/>
-          <p:nvPr/>
-        </p:nvSpPr>
-        <p:spPr>
-          <a:xfrm>
-            <a:off x="566928" y="329184"/>
-            <a:ext cx="1481328" cy="310896"/>
-          </a:xfrm>
-          <a:prstGeom prst="rect">
-            <a:avLst/>
-          </a:prstGeom>
-          <a:noFill/>
-        </p:spPr>
-        <p:txBody>
-          <a:bodyPr wrap="square" anchor="ctr" lIns="0" rIns="0" tIns="0" bIns="0">
-            <a:spAutoFit/>
-          </a:bodyPr>
-          <a:lstStyle/>
-          <a:p>
-            <a:pPr algn="ctr"/>
-            <a:r>
-              <a:rPr sz="1200" b="1">
-                <a:solidFill>
-                  <a:srgbClr val="FFFFFF"/>
-                </a:solidFill>
-                <a:latin typeface="Meiryo"/>
-              </a:rPr>
-              <a:t>DEMO</a:t>
-            </a:r>
-          </a:p>
-        </p:txBody>
-      </p:sp>
-      <p:sp>
-        <p:nvSpPr>
-          <p:cNvPr id="4" name="TextBox 3"/>
-          <p:cNvSpPr txBox="1"/>
-          <p:nvPr/>
-        </p:nvSpPr>
-        <p:spPr>
-          <a:xfrm>
-            <a:off x="2194560" y="329184"/>
-            <a:ext cx="5486400" cy="310896"/>
-          </a:xfrm>
-          <a:prstGeom prst="rect">
-            <a:avLst/>
-          </a:prstGeom>
-          <a:noFill/>
-        </p:spPr>
-        <p:txBody>
-          <a:bodyPr wrap="square" anchor="ctr" lIns="0" rIns="0" tIns="0" bIns="0">
-            <a:spAutoFit/>
-          </a:bodyPr>
-          <a:lstStyle/>
-          <a:p>
-            <a:pPr algn="l"/>
-            <a:r>
-              <a:rPr sz="1300" b="0">
-                <a:solidFill>
-                  <a:srgbClr val="566573"/>
-                </a:solidFill>
-                <a:latin typeface="Meiryo"/>
-              </a:rPr>
-              <a:t>移乗の実演</a:t>
-            </a:r>
-          </a:p>
-        </p:txBody>
-      </p:sp>
-      <p:sp>
-        <p:nvSpPr>
-          <p:cNvPr id="5" name="TextBox 4"/>
-          <p:cNvSpPr txBox="1"/>
-          <p:nvPr/>
-        </p:nvSpPr>
-        <p:spPr>
-          <a:xfrm>
-            <a:off x="566928" y="749808"/>
-            <a:ext cx="11055096" cy="566928"/>
-          </a:xfrm>
-          <a:prstGeom prst="rect">
-            <a:avLst/>
-          </a:prstGeom>
-          <a:noFill/>
-        </p:spPr>
-        <p:txBody>
-          <a:bodyPr wrap="square" anchor="t" lIns="0" rIns="0" tIns="0" bIns="0">
-            <a:spAutoFit/>
-          </a:bodyPr>
-          <a:lstStyle/>
-          <a:p>
-            <a:pPr algn="l"/>
-            <a:r>
-              <a:rPr sz="3400" b="1">
-                <a:solidFill>
-                  <a:srgbClr val="1A5276"/>
-                </a:solidFill>
-                <a:latin typeface="Meiryo"/>
-              </a:rPr>
-              <a:t>お体を、どうお運びするか</a:t>
-            </a:r>
-          </a:p>
-        </p:txBody>
-      </p:sp>
-      <p:sp>
-        <p:nvSpPr>
-          <p:cNvPr id="6" name="TextBox 5"/>
-          <p:cNvSpPr txBox="1"/>
-          <p:nvPr/>
-        </p:nvSpPr>
-        <p:spPr>
-          <a:xfrm>
-            <a:off x="566928" y="1463040"/>
-            <a:ext cx="11055096" cy="310896"/>
-          </a:xfrm>
-          <a:prstGeom prst="rect">
-            <a:avLst/>
-          </a:prstGeom>
-          <a:noFill/>
-        </p:spPr>
-        <p:txBody>
-          <a:bodyPr wrap="square" anchor="t" lIns="0" rIns="0" tIns="0" bIns="0">
-            <a:spAutoFit/>
-          </a:bodyPr>
-          <a:lstStyle/>
-          <a:p>
-            <a:pPr algn="l"/>
-            <a:r>
-              <a:rPr sz="1400" b="0">
-                <a:solidFill>
-                  <a:srgbClr val="566573"/>
-                </a:solidFill>
-                <a:latin typeface="Meiryo"/>
-              </a:rPr>
-              <a:t>浴槽へお移しする方法は4つ。その方の状態に合わせて選びます。</a:t>
-            </a:r>
-          </a:p>
-        </p:txBody>
-      </p:sp>
-      <p:sp>
-        <p:nvSpPr>
-          <p:cNvPr id="7" name="Rounded Rectangle 6"/>
-          <p:cNvSpPr/>
-          <p:nvPr/>
-        </p:nvSpPr>
-        <p:spPr>
-          <a:xfrm>
-            <a:off x="566928" y="2011680"/>
-            <a:ext cx="2697480" cy="2788920"/>
-          </a:xfrm>
-          <a:prstGeom prst="roundRect">
-            <a:avLst>
-              <a:gd name="adj" fmla="val 3389"/>
-            </a:avLst>
-          </a:prstGeom>
-          <a:solidFill>
-            <a:srgbClr val="F4F8FA"/>
-          </a:solidFill>
-          <a:ln>
-            <a:noFill/>
-          </a:ln>
-          <a:effectLst/>
-        </p:spPr>
-        <p:style>
-          <a:lnRef idx="1">
-            <a:schemeClr val="accent1"/>
-          </a:lnRef>
-          <a:fillRef idx="3">
-            <a:schemeClr val="accent1"/>
-          </a:fillRef>
-          <a:effectRef idx="2">
-            <a:schemeClr val="accent1"/>
-          </a:effectRef>
-          <a:fontRef idx="minor">
-            <a:schemeClr val="lt1"/>
-          </a:fontRef>
-        </p:style>
-        <p:txBody>
-          <a:bodyPr rtlCol="0" anchor="ctr"/>
-          <a:lstStyle/>
-          <a:p>
-            <a:pPr algn="ctr"/>
-          </a:p>
-        </p:txBody>
-      </p:sp>
-      <p:sp>
-        <p:nvSpPr>
-          <p:cNvPr id="8" name="Rounded Rectangle 7"/>
-          <p:cNvSpPr/>
-          <p:nvPr/>
-        </p:nvSpPr>
-        <p:spPr>
-          <a:xfrm>
-            <a:off x="566928" y="2011680"/>
-            <a:ext cx="2697480" cy="566928"/>
-          </a:xfrm>
-          <a:prstGeom prst="roundRect">
-            <a:avLst>
-              <a:gd name="adj" fmla="val 16129"/>
-            </a:avLst>
-          </a:prstGeom>
-          <a:solidFill>
-            <a:srgbClr val="1A5276"/>
-          </a:solidFill>
-          <a:ln>
-            <a:noFill/>
-          </a:ln>
-          <a:effectLst/>
-        </p:spPr>
-        <p:style>
-          <a:lnRef idx="1">
-            <a:schemeClr val="accent1"/>
-          </a:lnRef>
-          <a:fillRef idx="3">
-            <a:schemeClr val="accent1"/>
-          </a:fillRef>
-          <a:effectRef idx="2">
-            <a:schemeClr val="accent1"/>
-          </a:effectRef>
-          <a:fontRef idx="minor">
-            <a:schemeClr val="lt1"/>
-          </a:fontRef>
-        </p:style>
-        <p:txBody>
-          <a:bodyPr rtlCol="0" anchor="ctr"/>
-          <a:lstStyle/>
-          <a:p>
-            <a:pPr algn="ctr"/>
-          </a:p>
-        </p:txBody>
-      </p:sp>
-      <p:sp>
-        <p:nvSpPr>
-          <p:cNvPr id="9" name="TextBox 8"/>
-          <p:cNvSpPr txBox="1"/>
-          <p:nvPr/>
-        </p:nvSpPr>
-        <p:spPr>
-          <a:xfrm>
-            <a:off x="566928" y="2011680"/>
-            <a:ext cx="2697480" cy="566928"/>
-          </a:xfrm>
-          <a:prstGeom prst="rect">
-            <a:avLst/>
-          </a:prstGeom>
-          <a:noFill/>
-        </p:spPr>
-        <p:txBody>
-          <a:bodyPr wrap="square" anchor="ctr" lIns="0" rIns="0" tIns="0" bIns="0">
-            <a:spAutoFit/>
-          </a:bodyPr>
-          <a:lstStyle/>
-          <a:p>
-            <a:pPr algn="ctr"/>
-            <a:r>
-              <a:rPr sz="1700" b="1">
-                <a:solidFill>
-                  <a:srgbClr val="FFFFFF"/>
-                </a:solidFill>
-                <a:latin typeface="Meiryo"/>
-              </a:rPr>
-              <a:t>抱き上げ移動</a:t>
-            </a:r>
-          </a:p>
-        </p:txBody>
-      </p:sp>
-      <p:sp>
-        <p:nvSpPr>
-          <p:cNvPr id="10" name="TextBox 9"/>
-          <p:cNvSpPr txBox="1"/>
-          <p:nvPr/>
-        </p:nvSpPr>
-        <p:spPr>
-          <a:xfrm>
-            <a:off x="768096" y="2743200"/>
-            <a:ext cx="2295144" cy="237744"/>
-          </a:xfrm>
-          <a:prstGeom prst="rect">
-            <a:avLst/>
-          </a:prstGeom>
-          <a:noFill/>
-        </p:spPr>
-        <p:txBody>
-          <a:bodyPr wrap="square" anchor="t" lIns="0" rIns="0" tIns="0" bIns="0">
-            <a:spAutoFit/>
-          </a:bodyPr>
-          <a:lstStyle/>
-          <a:p>
-            <a:pPr algn="l"/>
-            <a:r>
-              <a:rPr sz="1100" b="1">
-                <a:solidFill>
-                  <a:srgbClr val="1D9E75"/>
-                </a:solidFill>
-                <a:latin typeface="Meiryo"/>
-              </a:rPr>
-              <a:t>こんな方に</a:t>
-            </a:r>
-          </a:p>
-        </p:txBody>
-      </p:sp>
-      <p:sp>
-        <p:nvSpPr>
-          <p:cNvPr id="11" name="TextBox 10"/>
-          <p:cNvSpPr txBox="1"/>
-          <p:nvPr/>
-        </p:nvSpPr>
-        <p:spPr>
-          <a:xfrm>
-            <a:off x="768096" y="3035808"/>
-            <a:ext cx="2295144" cy="1005840"/>
-          </a:xfrm>
-          <a:prstGeom prst="rect">
-            <a:avLst/>
-          </a:prstGeom>
-          <a:noFill/>
-        </p:spPr>
-        <p:txBody>
-          <a:bodyPr wrap="square" anchor="t" lIns="0" rIns="0" tIns="0" bIns="0">
-            <a:spAutoFit/>
-          </a:bodyPr>
-          <a:lstStyle/>
-          <a:p>
-            <a:pPr algn="l"/>
-            <a:r>
-              <a:rPr sz="1350" b="0">
-                <a:solidFill>
-                  <a:srgbClr val="1C2833"/>
-                </a:solidFill>
-                <a:latin typeface="Meiryo"/>
-              </a:rPr>
-              <a:t>体格が小さく、拘縮の</a:t>
-            </a:r>
-          </a:p>
-          <a:p>
-            <a:pPr algn="l">
-              <a:spcBef>
-                <a:spcPts val="400"/>
-              </a:spcBef>
-            </a:pPr>
-            <a:r>
-              <a:rPr sz="1350" b="0">
-                <a:solidFill>
-                  <a:srgbClr val="1C2833"/>
-                </a:solidFill>
-                <a:latin typeface="Meiryo"/>
-              </a:rPr>
-              <a:t>少ない方</a:t>
-            </a:r>
-          </a:p>
-        </p:txBody>
-      </p:sp>
-      <p:sp>
-        <p:nvSpPr>
-          <p:cNvPr id="12" name="Rounded Rectangle 11"/>
-          <p:cNvSpPr/>
-          <p:nvPr/>
-        </p:nvSpPr>
-        <p:spPr>
-          <a:xfrm>
-            <a:off x="768096" y="4096512"/>
-            <a:ext cx="2295144" cy="457200"/>
-          </a:xfrm>
-          <a:prstGeom prst="roundRect">
-            <a:avLst>
-              <a:gd name="adj" fmla="val 20000"/>
-            </a:avLst>
-          </a:prstGeom>
-          <a:solidFill>
-            <a:srgbClr val="EAF7F1"/>
-          </a:solidFill>
-          <a:ln>
-            <a:noFill/>
-          </a:ln>
-          <a:effectLst/>
-        </p:spPr>
-        <p:style>
-          <a:lnRef idx="1">
-            <a:schemeClr val="accent1"/>
-          </a:lnRef>
-          <a:fillRef idx="3">
-            <a:schemeClr val="accent1"/>
-          </a:fillRef>
-          <a:effectRef idx="2">
-            <a:schemeClr val="accent1"/>
-          </a:effectRef>
-          <a:fontRef idx="minor">
-            <a:schemeClr val="lt1"/>
-          </a:fontRef>
-        </p:style>
-        <p:txBody>
-          <a:bodyPr rtlCol="0" anchor="ctr"/>
-          <a:lstStyle/>
-          <a:p>
-            <a:pPr algn="ctr"/>
-          </a:p>
-        </p:txBody>
-      </p:sp>
-      <p:sp>
-        <p:nvSpPr>
-          <p:cNvPr id="13" name="TextBox 12"/>
-          <p:cNvSpPr txBox="1"/>
-          <p:nvPr/>
-        </p:nvSpPr>
-        <p:spPr>
-          <a:xfrm>
-            <a:off x="768096" y="4096512"/>
-            <a:ext cx="2295144" cy="457200"/>
-          </a:xfrm>
-          <a:prstGeom prst="rect">
-            <a:avLst/>
-          </a:prstGeom>
-          <a:noFill/>
-        </p:spPr>
-        <p:txBody>
-          <a:bodyPr wrap="square" anchor="ctr" lIns="0" rIns="0" tIns="0" bIns="0">
-            <a:spAutoFit/>
-          </a:bodyPr>
-          <a:lstStyle/>
-          <a:p>
-            <a:pPr algn="ctr"/>
-            <a:r>
-              <a:rPr sz="1300" b="1">
-                <a:solidFill>
-                  <a:srgbClr val="1D9E75"/>
-                </a:solidFill>
-                <a:latin typeface="Meiryo"/>
-              </a:rPr>
-              <a:t>いちばん短時間</a:t>
-            </a:r>
-          </a:p>
-        </p:txBody>
-      </p:sp>
-      <p:sp>
-        <p:nvSpPr>
-          <p:cNvPr id="14" name="Rounded Rectangle 13"/>
-          <p:cNvSpPr/>
-          <p:nvPr/>
-        </p:nvSpPr>
-        <p:spPr>
-          <a:xfrm>
-            <a:off x="3355848" y="2011680"/>
-            <a:ext cx="2697480" cy="2788920"/>
-          </a:xfrm>
-          <a:prstGeom prst="roundRect">
-            <a:avLst>
-              <a:gd name="adj" fmla="val 3389"/>
-            </a:avLst>
-          </a:prstGeom>
-          <a:solidFill>
-            <a:srgbClr val="F4F8FA"/>
-          </a:solidFill>
-          <a:ln>
-            <a:noFill/>
-          </a:ln>
-          <a:effectLst/>
-        </p:spPr>
-        <p:style>
-          <a:lnRef idx="1">
-            <a:schemeClr val="accent1"/>
-          </a:lnRef>
-          <a:fillRef idx="3">
-            <a:schemeClr val="accent1"/>
-          </a:fillRef>
-          <a:effectRef idx="2">
-            <a:schemeClr val="accent1"/>
-          </a:effectRef>
-          <a:fontRef idx="minor">
-            <a:schemeClr val="lt1"/>
-          </a:fontRef>
-        </p:style>
-        <p:txBody>
-          <a:bodyPr rtlCol="0" anchor="ctr"/>
-          <a:lstStyle/>
-          <a:p>
-            <a:pPr algn="ctr"/>
-          </a:p>
-        </p:txBody>
-      </p:sp>
-      <p:sp>
-        <p:nvSpPr>
-          <p:cNvPr id="15" name="Rounded Rectangle 14"/>
-          <p:cNvSpPr/>
-          <p:nvPr/>
-        </p:nvSpPr>
-        <p:spPr>
-          <a:xfrm>
-            <a:off x="3355848" y="2011680"/>
-            <a:ext cx="2697480" cy="566928"/>
-          </a:xfrm>
-          <a:prstGeom prst="roundRect">
-            <a:avLst>
-              <a:gd name="adj" fmla="val 16129"/>
-            </a:avLst>
-          </a:prstGeom>
-          <a:solidFill>
-            <a:srgbClr val="1A5276"/>
-          </a:solidFill>
-          <a:ln>
-            <a:noFill/>
-          </a:ln>
-          <a:effectLst/>
-        </p:spPr>
-        <p:style>
-          <a:lnRef idx="1">
-            <a:schemeClr val="accent1"/>
-          </a:lnRef>
-          <a:fillRef idx="3">
-            <a:schemeClr val="accent1"/>
-          </a:fillRef>
-          <a:effectRef idx="2">
-            <a:schemeClr val="accent1"/>
-          </a:effectRef>
-          <a:fontRef idx="minor">
-            <a:schemeClr val="lt1"/>
-          </a:fontRef>
-        </p:style>
-        <p:txBody>
-          <a:bodyPr rtlCol="0" anchor="ctr"/>
-          <a:lstStyle/>
-          <a:p>
-            <a:pPr algn="ctr"/>
-          </a:p>
-        </p:txBody>
-      </p:sp>
-      <p:sp>
-        <p:nvSpPr>
-          <p:cNvPr id="16" name="TextBox 15"/>
-          <p:cNvSpPr txBox="1"/>
-          <p:nvPr/>
-        </p:nvSpPr>
-        <p:spPr>
-          <a:xfrm>
-            <a:off x="3355848" y="2011680"/>
-            <a:ext cx="2697480" cy="566928"/>
-          </a:xfrm>
-          <a:prstGeom prst="rect">
-            <a:avLst/>
-          </a:prstGeom>
-          <a:noFill/>
-        </p:spPr>
-        <p:txBody>
-          <a:bodyPr wrap="square" anchor="ctr" lIns="0" rIns="0" tIns="0" bIns="0">
-            <a:spAutoFit/>
-          </a:bodyPr>
-          <a:lstStyle/>
-          <a:p>
-            <a:pPr algn="ctr"/>
-            <a:r>
-              <a:rPr sz="1700" b="1">
-                <a:solidFill>
-                  <a:srgbClr val="FFFFFF"/>
-                </a:solidFill>
-                <a:latin typeface="Meiryo"/>
-              </a:rPr>
-              <a:t>担架移動</a:t>
-            </a:r>
-          </a:p>
-        </p:txBody>
-      </p:sp>
-      <p:sp>
-        <p:nvSpPr>
-          <p:cNvPr id="17" name="TextBox 16"/>
-          <p:cNvSpPr txBox="1"/>
-          <p:nvPr/>
-        </p:nvSpPr>
-        <p:spPr>
-          <a:xfrm>
-            <a:off x="3557016" y="2743200"/>
-            <a:ext cx="2295144" cy="237744"/>
-          </a:xfrm>
-          <a:prstGeom prst="rect">
-            <a:avLst/>
-          </a:prstGeom>
-          <a:noFill/>
-        </p:spPr>
-        <p:txBody>
-          <a:bodyPr wrap="square" anchor="t" lIns="0" rIns="0" tIns="0" bIns="0">
-            <a:spAutoFit/>
-          </a:bodyPr>
-          <a:lstStyle/>
-          <a:p>
-            <a:pPr algn="l"/>
-            <a:r>
-              <a:rPr sz="1100" b="1">
-                <a:solidFill>
-                  <a:srgbClr val="1D9E75"/>
-                </a:solidFill>
-                <a:latin typeface="Meiryo"/>
-              </a:rPr>
-              <a:t>こんな方に</a:t>
-            </a:r>
-          </a:p>
-        </p:txBody>
-      </p:sp>
-      <p:sp>
-        <p:nvSpPr>
-          <p:cNvPr id="18" name="TextBox 17"/>
-          <p:cNvSpPr txBox="1"/>
-          <p:nvPr/>
-        </p:nvSpPr>
-        <p:spPr>
-          <a:xfrm>
-            <a:off x="3557016" y="3035808"/>
-            <a:ext cx="2295144" cy="1005840"/>
-          </a:xfrm>
-          <a:prstGeom prst="rect">
-            <a:avLst/>
-          </a:prstGeom>
-          <a:noFill/>
-        </p:spPr>
-        <p:txBody>
-          <a:bodyPr wrap="square" anchor="t" lIns="0" rIns="0" tIns="0" bIns="0">
-            <a:spAutoFit/>
-          </a:bodyPr>
-          <a:lstStyle/>
-          <a:p>
-            <a:pPr algn="l"/>
-            <a:r>
-              <a:rPr sz="1350" b="0">
-                <a:solidFill>
-                  <a:srgbClr val="1C2833"/>
-                </a:solidFill>
-                <a:latin typeface="Meiryo"/>
-              </a:rPr>
-              <a:t>体の大きい方、</a:t>
-            </a:r>
-          </a:p>
-          <a:p>
-            <a:pPr algn="l">
-              <a:spcBef>
-                <a:spcPts val="400"/>
-              </a:spcBef>
-            </a:pPr>
-            <a:r>
-              <a:rPr sz="1350" b="0">
-                <a:solidFill>
-                  <a:srgbClr val="1C2833"/>
-                </a:solidFill>
-                <a:latin typeface="Meiryo"/>
-              </a:rPr>
-              <a:t>全介助の方</a:t>
-            </a:r>
-          </a:p>
-        </p:txBody>
-      </p:sp>
-      <p:sp>
-        <p:nvSpPr>
-          <p:cNvPr id="19" name="Rounded Rectangle 18"/>
-          <p:cNvSpPr/>
-          <p:nvPr/>
-        </p:nvSpPr>
-        <p:spPr>
-          <a:xfrm>
-            <a:off x="3557016" y="4096512"/>
-            <a:ext cx="2295144" cy="457200"/>
-          </a:xfrm>
-          <a:prstGeom prst="roundRect">
-            <a:avLst>
-              <a:gd name="adj" fmla="val 20000"/>
-            </a:avLst>
-          </a:prstGeom>
-          <a:solidFill>
-            <a:srgbClr val="EAF7F1"/>
-          </a:solidFill>
-          <a:ln>
-            <a:noFill/>
-          </a:ln>
-          <a:effectLst/>
-        </p:spPr>
-        <p:style>
-          <a:lnRef idx="1">
-            <a:schemeClr val="accent1"/>
-          </a:lnRef>
-          <a:fillRef idx="3">
-            <a:schemeClr val="accent1"/>
-          </a:fillRef>
-          <a:effectRef idx="2">
-            <a:schemeClr val="accent1"/>
-          </a:effectRef>
-          <a:fontRef idx="minor">
-            <a:schemeClr val="lt1"/>
-          </a:fontRef>
-        </p:style>
-        <p:txBody>
-          <a:bodyPr rtlCol="0" anchor="ctr"/>
-          <a:lstStyle/>
-          <a:p>
-            <a:pPr algn="ctr"/>
-          </a:p>
-        </p:txBody>
-      </p:sp>
-      <p:sp>
-        <p:nvSpPr>
-          <p:cNvPr id="20" name="TextBox 19"/>
-          <p:cNvSpPr txBox="1"/>
-          <p:nvPr/>
-        </p:nvSpPr>
-        <p:spPr>
-          <a:xfrm>
-            <a:off x="3557016" y="4096512"/>
-            <a:ext cx="2295144" cy="457200"/>
-          </a:xfrm>
-          <a:prstGeom prst="rect">
-            <a:avLst/>
-          </a:prstGeom>
-          <a:noFill/>
-        </p:spPr>
-        <p:txBody>
-          <a:bodyPr wrap="square" anchor="ctr" lIns="0" rIns="0" tIns="0" bIns="0">
-            <a:spAutoFit/>
-          </a:bodyPr>
-          <a:lstStyle/>
-          <a:p>
-            <a:pPr algn="ctr"/>
-            <a:r>
-              <a:rPr sz="1300" b="1">
-                <a:solidFill>
-                  <a:srgbClr val="1D9E75"/>
-                </a:solidFill>
-                <a:latin typeface="Meiryo"/>
-              </a:rPr>
-              <a:t>いちばん安全</a:t>
-            </a:r>
-          </a:p>
-        </p:txBody>
-      </p:sp>
-      <p:sp>
-        <p:nvSpPr>
-          <p:cNvPr id="21" name="Rounded Rectangle 20"/>
-          <p:cNvSpPr/>
-          <p:nvPr/>
-        </p:nvSpPr>
-        <p:spPr>
-          <a:xfrm>
-            <a:off x="6144768" y="2011680"/>
-            <a:ext cx="2697480" cy="2788920"/>
-          </a:xfrm>
-          <a:prstGeom prst="roundRect">
-            <a:avLst>
-              <a:gd name="adj" fmla="val 3389"/>
-            </a:avLst>
-          </a:prstGeom>
-          <a:solidFill>
-            <a:srgbClr val="F4F8FA"/>
-          </a:solidFill>
-          <a:ln>
-            <a:noFill/>
-          </a:ln>
-          <a:effectLst/>
-        </p:spPr>
-        <p:style>
-          <a:lnRef idx="1">
-            <a:schemeClr val="accent1"/>
-          </a:lnRef>
-          <a:fillRef idx="3">
-            <a:schemeClr val="accent1"/>
-          </a:fillRef>
-          <a:effectRef idx="2">
-            <a:schemeClr val="accent1"/>
-          </a:effectRef>
-          <a:fontRef idx="minor">
-            <a:schemeClr val="lt1"/>
-          </a:fontRef>
-        </p:style>
-        <p:txBody>
-          <a:bodyPr rtlCol="0" anchor="ctr"/>
-          <a:lstStyle/>
-          <a:p>
-            <a:pPr algn="ctr"/>
-          </a:p>
-        </p:txBody>
-      </p:sp>
-      <p:sp>
-        <p:nvSpPr>
-          <p:cNvPr id="22" name="Rounded Rectangle 21"/>
-          <p:cNvSpPr/>
-          <p:nvPr/>
-        </p:nvSpPr>
-        <p:spPr>
-          <a:xfrm>
-            <a:off x="6144768" y="2011680"/>
-            <a:ext cx="2697480" cy="566928"/>
-          </a:xfrm>
-          <a:prstGeom prst="roundRect">
-            <a:avLst>
-              <a:gd name="adj" fmla="val 16129"/>
-            </a:avLst>
-          </a:prstGeom>
-          <a:solidFill>
-            <a:srgbClr val="1A5276"/>
-          </a:solidFill>
-          <a:ln>
-            <a:noFill/>
-          </a:ln>
-          <a:effectLst/>
-        </p:spPr>
-        <p:style>
-          <a:lnRef idx="1">
-            <a:schemeClr val="accent1"/>
-          </a:lnRef>
-          <a:fillRef idx="3">
-            <a:schemeClr val="accent1"/>
-          </a:fillRef>
-          <a:effectRef idx="2">
-            <a:schemeClr val="accent1"/>
-          </a:effectRef>
-          <a:fontRef idx="minor">
-            <a:schemeClr val="lt1"/>
-          </a:fontRef>
-        </p:style>
-        <p:txBody>
-          <a:bodyPr rtlCol="0" anchor="ctr"/>
-          <a:lstStyle/>
-          <a:p>
-            <a:pPr algn="ctr"/>
-          </a:p>
-        </p:txBody>
-      </p:sp>
-      <p:sp>
-        <p:nvSpPr>
-          <p:cNvPr id="23" name="TextBox 22"/>
-          <p:cNvSpPr txBox="1"/>
-          <p:nvPr/>
-        </p:nvSpPr>
-        <p:spPr>
-          <a:xfrm>
-            <a:off x="6144768" y="2011680"/>
-            <a:ext cx="2697480" cy="566928"/>
-          </a:xfrm>
-          <a:prstGeom prst="rect">
-            <a:avLst/>
-          </a:prstGeom>
-          <a:noFill/>
-        </p:spPr>
-        <p:txBody>
-          <a:bodyPr wrap="square" anchor="ctr" lIns="0" rIns="0" tIns="0" bIns="0">
-            <a:spAutoFit/>
-          </a:bodyPr>
-          <a:lstStyle/>
-          <a:p>
-            <a:pPr algn="ctr"/>
-            <a:r>
-              <a:rPr sz="1700" b="1">
-                <a:solidFill>
-                  <a:srgbClr val="FFFFFF"/>
-                </a:solidFill>
-                <a:latin typeface="Meiryo"/>
-              </a:rPr>
-              <a:t>上下移動</a:t>
-            </a:r>
-          </a:p>
-        </p:txBody>
-      </p:sp>
-      <p:sp>
-        <p:nvSpPr>
-          <p:cNvPr id="24" name="TextBox 23"/>
-          <p:cNvSpPr txBox="1"/>
-          <p:nvPr/>
-        </p:nvSpPr>
-        <p:spPr>
-          <a:xfrm>
-            <a:off x="6345936" y="2743200"/>
-            <a:ext cx="2295144" cy="237744"/>
-          </a:xfrm>
-          <a:prstGeom prst="rect">
-            <a:avLst/>
-          </a:prstGeom>
-          <a:noFill/>
-        </p:spPr>
-        <p:txBody>
-          <a:bodyPr wrap="square" anchor="t" lIns="0" rIns="0" tIns="0" bIns="0">
-            <a:spAutoFit/>
-          </a:bodyPr>
-          <a:lstStyle/>
-          <a:p>
-            <a:pPr algn="l"/>
-            <a:r>
-              <a:rPr sz="1100" b="1">
-                <a:solidFill>
-                  <a:srgbClr val="1D9E75"/>
-                </a:solidFill>
-                <a:latin typeface="Meiryo"/>
-              </a:rPr>
-              <a:t>こんな方に</a:t>
-            </a:r>
-          </a:p>
-        </p:txBody>
-      </p:sp>
-      <p:sp>
-        <p:nvSpPr>
-          <p:cNvPr id="25" name="TextBox 24"/>
-          <p:cNvSpPr txBox="1"/>
-          <p:nvPr/>
-        </p:nvSpPr>
-        <p:spPr>
-          <a:xfrm>
-            <a:off x="6345936" y="3035808"/>
-            <a:ext cx="2295144" cy="1005840"/>
-          </a:xfrm>
-          <a:prstGeom prst="rect">
-            <a:avLst/>
-          </a:prstGeom>
-          <a:noFill/>
-        </p:spPr>
-        <p:txBody>
-          <a:bodyPr wrap="square" anchor="t" lIns="0" rIns="0" tIns="0" bIns="0">
-            <a:spAutoFit/>
-          </a:bodyPr>
-          <a:lstStyle/>
-          <a:p>
-            <a:pPr algn="l"/>
-            <a:r>
-              <a:rPr sz="1350" b="0">
-                <a:solidFill>
-                  <a:srgbClr val="1C2833"/>
-                </a:solidFill>
-                <a:latin typeface="Meiryo"/>
-              </a:rPr>
-              <a:t>ベッドと浴槽の高さを</a:t>
-            </a:r>
-          </a:p>
-          <a:p>
-            <a:pPr algn="l">
-              <a:spcBef>
-                <a:spcPts val="400"/>
-              </a:spcBef>
-            </a:pPr>
-            <a:r>
-              <a:rPr sz="1350" b="0">
-                <a:solidFill>
-                  <a:srgbClr val="1C2833"/>
-                </a:solidFill>
-                <a:latin typeface="Meiryo"/>
-              </a:rPr>
-              <a:t>合わせ、水平に</a:t>
-            </a:r>
-          </a:p>
-        </p:txBody>
-      </p:sp>
-      <p:sp>
-        <p:nvSpPr>
-          <p:cNvPr id="26" name="Rounded Rectangle 25"/>
-          <p:cNvSpPr/>
-          <p:nvPr/>
-        </p:nvSpPr>
-        <p:spPr>
-          <a:xfrm>
-            <a:off x="6345936" y="4096512"/>
-            <a:ext cx="2295144" cy="457200"/>
-          </a:xfrm>
-          <a:prstGeom prst="roundRect">
-            <a:avLst>
-              <a:gd name="adj" fmla="val 20000"/>
-            </a:avLst>
-          </a:prstGeom>
-          <a:solidFill>
-            <a:srgbClr val="EAF7F1"/>
-          </a:solidFill>
-          <a:ln>
-            <a:noFill/>
-          </a:ln>
-          <a:effectLst/>
-        </p:spPr>
-        <p:style>
-          <a:lnRef idx="1">
-            <a:schemeClr val="accent1"/>
-          </a:lnRef>
-          <a:fillRef idx="3">
-            <a:schemeClr val="accent1"/>
-          </a:fillRef>
-          <a:effectRef idx="2">
-            <a:schemeClr val="accent1"/>
-          </a:effectRef>
-          <a:fontRef idx="minor">
-            <a:schemeClr val="lt1"/>
-          </a:fontRef>
-        </p:style>
-        <p:txBody>
-          <a:bodyPr rtlCol="0" anchor="ctr"/>
-          <a:lstStyle/>
-          <a:p>
-            <a:pPr algn="ctr"/>
-          </a:p>
-        </p:txBody>
-      </p:sp>
-      <p:sp>
-        <p:nvSpPr>
-          <p:cNvPr id="27" name="TextBox 26"/>
-          <p:cNvSpPr txBox="1"/>
-          <p:nvPr/>
-        </p:nvSpPr>
-        <p:spPr>
-          <a:xfrm>
-            <a:off x="6345936" y="4096512"/>
-            <a:ext cx="2295144" cy="457200"/>
-          </a:xfrm>
-          <a:prstGeom prst="rect">
-            <a:avLst/>
-          </a:prstGeom>
-          <a:noFill/>
-        </p:spPr>
-        <p:txBody>
-          <a:bodyPr wrap="square" anchor="ctr" lIns="0" rIns="0" tIns="0" bIns="0">
-            <a:spAutoFit/>
-          </a:bodyPr>
-          <a:lstStyle/>
-          <a:p>
-            <a:pPr algn="ctr"/>
-            <a:r>
-              <a:rPr sz="1300" b="1">
-                <a:solidFill>
-                  <a:srgbClr val="1D9E75"/>
-                </a:solidFill>
-                <a:latin typeface="Meiryo"/>
-              </a:rPr>
-              <a:t>体への負担が少ない</a:t>
-            </a:r>
-          </a:p>
-        </p:txBody>
-      </p:sp>
-      <p:sp>
-        <p:nvSpPr>
-          <p:cNvPr id="28" name="Rounded Rectangle 27"/>
-          <p:cNvSpPr/>
-          <p:nvPr/>
-        </p:nvSpPr>
-        <p:spPr>
-          <a:xfrm>
-            <a:off x="8933688" y="2011680"/>
-            <a:ext cx="2697480" cy="2788920"/>
-          </a:xfrm>
-          <a:prstGeom prst="roundRect">
-            <a:avLst>
-              <a:gd name="adj" fmla="val 3389"/>
-            </a:avLst>
-          </a:prstGeom>
-          <a:solidFill>
-            <a:srgbClr val="F4F8FA"/>
-          </a:solidFill>
-          <a:ln>
-            <a:noFill/>
-          </a:ln>
-          <a:effectLst/>
-        </p:spPr>
-        <p:style>
-          <a:lnRef idx="1">
-            <a:schemeClr val="accent1"/>
-          </a:lnRef>
-          <a:fillRef idx="3">
-            <a:schemeClr val="accent1"/>
-          </a:fillRef>
-          <a:effectRef idx="2">
-            <a:schemeClr val="accent1"/>
-          </a:effectRef>
-          <a:fontRef idx="minor">
-            <a:schemeClr val="lt1"/>
-          </a:fontRef>
-        </p:style>
-        <p:txBody>
-          <a:bodyPr rtlCol="0" anchor="ctr"/>
-          <a:lstStyle/>
-          <a:p>
-            <a:pPr algn="ctr"/>
-          </a:p>
-        </p:txBody>
-      </p:sp>
-      <p:sp>
-        <p:nvSpPr>
-          <p:cNvPr id="29" name="Rounded Rectangle 28"/>
-          <p:cNvSpPr/>
-          <p:nvPr/>
-        </p:nvSpPr>
-        <p:spPr>
-          <a:xfrm>
-            <a:off x="8933688" y="2011680"/>
-            <a:ext cx="2697480" cy="566928"/>
-          </a:xfrm>
-          <a:prstGeom prst="roundRect">
-            <a:avLst>
-              <a:gd name="adj" fmla="val 16129"/>
-            </a:avLst>
-          </a:prstGeom>
-          <a:solidFill>
-            <a:srgbClr val="1A5276"/>
-          </a:solidFill>
-          <a:ln>
-            <a:noFill/>
-          </a:ln>
-          <a:effectLst/>
-        </p:spPr>
-        <p:style>
-          <a:lnRef idx="1">
-            <a:schemeClr val="accent1"/>
-          </a:lnRef>
-          <a:fillRef idx="3">
-            <a:schemeClr val="accent1"/>
-          </a:fillRef>
-          <a:effectRef idx="2">
-            <a:schemeClr val="accent1"/>
-          </a:effectRef>
-          <a:fontRef idx="minor">
-            <a:schemeClr val="lt1"/>
-          </a:fontRef>
-        </p:style>
-        <p:txBody>
-          <a:bodyPr rtlCol="0" anchor="ctr"/>
-          <a:lstStyle/>
-          <a:p>
-            <a:pPr algn="ctr"/>
-          </a:p>
-        </p:txBody>
-      </p:sp>
-      <p:sp>
-        <p:nvSpPr>
-          <p:cNvPr id="30" name="TextBox 29"/>
-          <p:cNvSpPr txBox="1"/>
-          <p:nvPr/>
-        </p:nvSpPr>
-        <p:spPr>
-          <a:xfrm>
-            <a:off x="8933688" y="2011680"/>
-            <a:ext cx="2697480" cy="566928"/>
-          </a:xfrm>
-          <a:prstGeom prst="rect">
-            <a:avLst/>
-          </a:prstGeom>
-          <a:noFill/>
-        </p:spPr>
-        <p:txBody>
-          <a:bodyPr wrap="square" anchor="ctr" lIns="0" rIns="0" tIns="0" bIns="0">
-            <a:spAutoFit/>
-          </a:bodyPr>
-          <a:lstStyle/>
-          <a:p>
-            <a:pPr algn="ctr"/>
-            <a:r>
-              <a:rPr sz="1700" b="1">
-                <a:solidFill>
-                  <a:srgbClr val="FFFFFF"/>
-                </a:solidFill>
-                <a:latin typeface="Meiryo"/>
-              </a:rPr>
-              <a:t>座位回転</a:t>
-            </a:r>
-          </a:p>
-        </p:txBody>
-      </p:sp>
-      <p:sp>
-        <p:nvSpPr>
-          <p:cNvPr id="31" name="TextBox 30"/>
-          <p:cNvSpPr txBox="1"/>
-          <p:nvPr/>
-        </p:nvSpPr>
-        <p:spPr>
-          <a:xfrm>
-            <a:off x="9134856" y="2743200"/>
-            <a:ext cx="2295144" cy="237744"/>
-          </a:xfrm>
-          <a:prstGeom prst="rect">
-            <a:avLst/>
-          </a:prstGeom>
-          <a:noFill/>
-        </p:spPr>
-        <p:txBody>
-          <a:bodyPr wrap="square" anchor="t" lIns="0" rIns="0" tIns="0" bIns="0">
-            <a:spAutoFit/>
-          </a:bodyPr>
-          <a:lstStyle/>
-          <a:p>
-            <a:pPr algn="l"/>
-            <a:r>
-              <a:rPr sz="1100" b="1">
-                <a:solidFill>
-                  <a:srgbClr val="1D9E75"/>
-                </a:solidFill>
-                <a:latin typeface="Meiryo"/>
-              </a:rPr>
-              <a:t>こんな方に</a:t>
-            </a:r>
-          </a:p>
-        </p:txBody>
-      </p:sp>
-      <p:sp>
-        <p:nvSpPr>
-          <p:cNvPr id="32" name="TextBox 31"/>
-          <p:cNvSpPr txBox="1"/>
-          <p:nvPr/>
-        </p:nvSpPr>
-        <p:spPr>
-          <a:xfrm>
-            <a:off x="9134856" y="3035808"/>
-            <a:ext cx="2295144" cy="1005840"/>
-          </a:xfrm>
-          <a:prstGeom prst="rect">
-            <a:avLst/>
-          </a:prstGeom>
-          <a:noFill/>
-        </p:spPr>
-        <p:txBody>
-          <a:bodyPr wrap="square" anchor="t" lIns="0" rIns="0" tIns="0" bIns="0">
-            <a:spAutoFit/>
-          </a:bodyPr>
-          <a:lstStyle/>
-          <a:p>
-            <a:pPr algn="l"/>
-            <a:r>
-              <a:rPr sz="1350" b="0">
-                <a:solidFill>
-                  <a:srgbClr val="1C2833"/>
-                </a:solidFill>
-                <a:latin typeface="Meiryo"/>
-              </a:rPr>
-              <a:t>座位が保てる方</a:t>
-            </a:r>
-          </a:p>
-        </p:txBody>
-      </p:sp>
-      <p:sp>
-        <p:nvSpPr>
-          <p:cNvPr id="33" name="Rounded Rectangle 32"/>
-          <p:cNvSpPr/>
-          <p:nvPr/>
-        </p:nvSpPr>
-        <p:spPr>
-          <a:xfrm>
-            <a:off x="9134856" y="4096512"/>
-            <a:ext cx="2295144" cy="457200"/>
-          </a:xfrm>
-          <a:prstGeom prst="roundRect">
-            <a:avLst>
-              <a:gd name="adj" fmla="val 20000"/>
-            </a:avLst>
-          </a:prstGeom>
-          <a:solidFill>
-            <a:srgbClr val="EAF7F1"/>
-          </a:solidFill>
-          <a:ln>
-            <a:noFill/>
-          </a:ln>
-          <a:effectLst/>
-        </p:spPr>
-        <p:style>
-          <a:lnRef idx="1">
-            <a:schemeClr val="accent1"/>
-          </a:lnRef>
-          <a:fillRef idx="3">
-            <a:schemeClr val="accent1"/>
-          </a:fillRef>
-          <a:effectRef idx="2">
-            <a:schemeClr val="accent1"/>
-          </a:effectRef>
-          <a:fontRef idx="minor">
-            <a:schemeClr val="lt1"/>
-          </a:fontRef>
-        </p:style>
-        <p:txBody>
-          <a:bodyPr rtlCol="0" anchor="ctr"/>
-          <a:lstStyle/>
-          <a:p>
-            <a:pPr algn="ctr"/>
-          </a:p>
-        </p:txBody>
-      </p:sp>
-      <p:sp>
-        <p:nvSpPr>
-          <p:cNvPr id="34" name="TextBox 33"/>
-          <p:cNvSpPr txBox="1"/>
-          <p:nvPr/>
-        </p:nvSpPr>
-        <p:spPr>
-          <a:xfrm>
-            <a:off x="9134856" y="4096512"/>
-            <a:ext cx="2295144" cy="457200"/>
-          </a:xfrm>
-          <a:prstGeom prst="rect">
-            <a:avLst/>
-          </a:prstGeom>
-          <a:noFill/>
-        </p:spPr>
-        <p:txBody>
-          <a:bodyPr wrap="square" anchor="ctr" lIns="0" rIns="0" tIns="0" bIns="0">
-            <a:spAutoFit/>
-          </a:bodyPr>
-          <a:lstStyle/>
-          <a:p>
-            <a:pPr algn="ctr"/>
-            <a:r>
-              <a:rPr sz="1300" b="1">
-                <a:solidFill>
-                  <a:srgbClr val="1D9E75"/>
-                </a:solidFill>
-                <a:latin typeface="Meiryo"/>
-              </a:rPr>
-              <a:t>ご本人の力を残す</a:t>
-            </a:r>
-          </a:p>
-        </p:txBody>
-      </p:sp>
-      <p:sp>
-        <p:nvSpPr>
-          <p:cNvPr id="35" name="Rounded Rectangle 34"/>
-          <p:cNvSpPr/>
-          <p:nvPr/>
-        </p:nvSpPr>
-        <p:spPr>
-          <a:xfrm>
-            <a:off x="566928" y="5120640"/>
-            <a:ext cx="11055096" cy="658368"/>
-          </a:xfrm>
-          <a:prstGeom prst="roundRect">
-            <a:avLst>
-              <a:gd name="adj" fmla="val 13888"/>
-            </a:avLst>
-          </a:prstGeom>
-          <a:solidFill>
-            <a:srgbClr val="1D9E75"/>
-          </a:solidFill>
-          <a:ln>
-            <a:noFill/>
-          </a:ln>
-          <a:effectLst/>
-        </p:spPr>
-        <p:style>
-          <a:lnRef idx="1">
-            <a:schemeClr val="accent1"/>
-          </a:lnRef>
-          <a:fillRef idx="3">
-            <a:schemeClr val="accent1"/>
-          </a:fillRef>
-          <a:effectRef idx="2">
-            <a:schemeClr val="accent1"/>
-          </a:effectRef>
-          <a:fontRef idx="minor">
-            <a:schemeClr val="lt1"/>
-          </a:fontRef>
-        </p:style>
-        <p:txBody>
-          <a:bodyPr rtlCol="0" anchor="ctr"/>
-          <a:lstStyle/>
-          <a:p>
-            <a:pPr algn="ctr"/>
-          </a:p>
-        </p:txBody>
-      </p:sp>
-      <p:sp>
-        <p:nvSpPr>
-          <p:cNvPr id="36" name="TextBox 35"/>
-          <p:cNvSpPr txBox="1"/>
-          <p:nvPr/>
-        </p:nvSpPr>
-        <p:spPr>
-          <a:xfrm>
-            <a:off x="566928" y="5120640"/>
-            <a:ext cx="11055096" cy="658368"/>
-          </a:xfrm>
-          <a:prstGeom prst="rect">
-            <a:avLst/>
-          </a:prstGeom>
-          <a:noFill/>
-        </p:spPr>
-        <p:txBody>
-          <a:bodyPr wrap="square" anchor="ctr" lIns="0" rIns="0" tIns="0" bIns="0">
-            <a:spAutoFit/>
-          </a:bodyPr>
-          <a:lstStyle/>
-          <a:p>
-            <a:pPr algn="ctr"/>
-            <a:r>
-              <a:rPr sz="1800" b="1">
-                <a:solidFill>
-                  <a:srgbClr val="FFFFFF"/>
-                </a:solidFill>
-                <a:latin typeface="Meiryo"/>
-              </a:rPr>
-              <a:t>どの方法でお運びするかを、お一人おひとり決めています。安全に、楽に。</a:t>
-            </a:r>
           </a:p>
         </p:txBody>
       </p:sp>

--- a/houmon-nyuyoku-slides.pptx
+++ b/houmon-nyuyoku-slides.pptx
@@ -20517,29 +20517,7 @@
                 <a:ea typeface="Meiryo" pitchFamily="34" charset="-122"/>
                 <a:cs typeface="Meiryo" pitchFamily="34" charset="-120"/>
               </a:rPr>
-              <a:t>訪問入浴は介護保険サービスであり、</a:t>
-            </a:r>
-            <a:r>
-              <a:rPr lang="en-US" sz="1500" b="1" dirty="0">
-                <a:solidFill>
-                  <a:srgbClr val="1D9E75"/>
-                </a:solidFill>
-                <a:latin typeface="Meiryo" pitchFamily="34" charset="0"/>
-                <a:ea typeface="Meiryo" pitchFamily="34" charset="-122"/>
-                <a:cs typeface="Meiryo" pitchFamily="34" charset="-120"/>
-              </a:rPr>
-              <a:t>医療行為は行えません</a:t>
-            </a:r>
-            <a:r>
-              <a:rPr lang="en-US" sz="1500" dirty="0">
-                <a:solidFill>
-                  <a:srgbClr val="1A5276"/>
-                </a:solidFill>
-                <a:latin typeface="Meiryo" pitchFamily="34" charset="0"/>
-                <a:ea typeface="Meiryo" pitchFamily="34" charset="-122"/>
-                <a:cs typeface="Meiryo" pitchFamily="34" charset="-120"/>
-              </a:rPr>
-              <a:t>。だからこそ訪問看護との連携が欠かせません。</a:t>
+              <a:t>訪問入浴は介護保険のサービスです。医療保険で動く訪問看護とは、担う範囲が違います。</a:t>
             </a:r>
             <a:endParaRPr lang="en-US" sz="1500" dirty="0"/>
           </a:p>
@@ -20655,127 +20633,69 @@
                 <a:ea typeface="Meiryo" pitchFamily="34" charset="-122"/>
                 <a:cs typeface="Meiryo" pitchFamily="34" charset="-120"/>
               </a:rPr>
-              <a:t>バイタル測定と</a:t>
-            </a:r>
-            <a:r>
-              <a:rPr lang="en-US" b="1" dirty="0">
-                <a:solidFill>
-                  <a:srgbClr val="1D9E75"/>
-                </a:solidFill>
-                <a:latin typeface="Meiryo" pitchFamily="34" charset="0"/>
-                <a:ea typeface="Meiryo" pitchFamily="34" charset="-122"/>
-                <a:cs typeface="Meiryo" pitchFamily="34" charset="-120"/>
-              </a:rPr>
-              <a:t>入浴可否の判断</a:t>
+              <a:t>バイタル測定と入浴可否の判断</a:t>
             </a:r>
             <a:endParaRPr lang="en-US" dirty="0"/>
           </a:p>
           <a:p>
-            <a:pPr marL="342900" indent="-342900">
-              <a:spcAft>
-                <a:spcPts val="600"/>
-              </a:spcAft>
-              <a:buSzPct val="100000"/>
-              <a:buChar char="●"/>
-            </a:pPr>
-            <a:r>
-              <a:rPr lang="en-US" dirty="0">
+            <a:pPr/>
+            <a:r>
+              <a:rPr>
                 <a:solidFill>
                   <a:srgbClr val="1C2833"/>
                 </a:solidFill>
-                <a:latin typeface="Meiryo" pitchFamily="34" charset="0"/>
-                <a:ea typeface="Meiryo" pitchFamily="34" charset="-122"/>
-                <a:cs typeface="Meiryo" pitchFamily="34" charset="-120"/>
-              </a:rPr>
-              <a:t>入浴時の</a:t>
-            </a:r>
-            <a:r>
-              <a:rPr lang="en-US" b="1" dirty="0">
-                <a:solidFill>
-                  <a:srgbClr val="1D9E75"/>
-                </a:solidFill>
-                <a:latin typeface="Meiryo" pitchFamily="34" charset="0"/>
-                <a:ea typeface="Meiryo" pitchFamily="34" charset="-122"/>
-                <a:cs typeface="Meiryo" pitchFamily="34" charset="-120"/>
-              </a:rPr>
-              <a:t>全身観察</a:t>
-            </a:r>
-            <a:r>
-              <a:rPr lang="en-US" dirty="0">
+                <a:latin typeface="Meiryo"/>
+              </a:rPr>
+              <a:t>入浴時の全身観察（褥瘡・浮腫・皮膚）</a:t>
+            </a:r>
+          </a:p>
+          <a:p>
+            <a:pPr/>
+            <a:r>
+              <a:rPr>
                 <a:solidFill>
                   <a:srgbClr val="1C2833"/>
                 </a:solidFill>
-                <a:latin typeface="Meiryo" pitchFamily="34" charset="0"/>
-                <a:ea typeface="Meiryo" pitchFamily="34" charset="-122"/>
-                <a:cs typeface="Meiryo" pitchFamily="34" charset="-120"/>
-              </a:rPr>
-              <a:t>（褥瘡・浮腫・皮膚）</a:t>
-            </a:r>
-            <a:endParaRPr lang="en-US" dirty="0"/>
-          </a:p>
-          <a:p>
-            <a:pPr marL="342900" indent="-342900">
-              <a:spcAft>
-                <a:spcPts val="600"/>
-              </a:spcAft>
-              <a:buSzPct val="100000"/>
-              <a:buChar char="●"/>
-            </a:pPr>
-            <a:r>
-              <a:rPr lang="en-US" dirty="0">
+                <a:latin typeface="Meiryo"/>
+              </a:rPr>
+              <a:t>洗身・洗髪と日常的な保湿ケア</a:t>
+            </a:r>
+          </a:p>
+          <a:p>
+            <a:pPr/>
+            <a:r>
+              <a:rPr>
                 <a:solidFill>
                   <a:srgbClr val="1C2833"/>
                 </a:solidFill>
-                <a:latin typeface="Meiryo" pitchFamily="34" charset="0"/>
-                <a:ea typeface="Meiryo" pitchFamily="34" charset="-122"/>
-                <a:cs typeface="Meiryo" pitchFamily="34" charset="-120"/>
-              </a:rPr>
-              <a:t>洗身・洗髪と</a:t>
-            </a:r>
-            <a:r>
-              <a:rPr lang="en-US" b="1" dirty="0">
-                <a:solidFill>
-                  <a:srgbClr val="1D9E75"/>
-                </a:solidFill>
-                <a:latin typeface="Meiryo" pitchFamily="34" charset="0"/>
-                <a:ea typeface="Meiryo" pitchFamily="34" charset="-122"/>
-                <a:cs typeface="Meiryo" pitchFamily="34" charset="-120"/>
-              </a:rPr>
-              <a:t>日常的な保湿ケア</a:t>
-            </a:r>
-            <a:endParaRPr lang="en-US" dirty="0"/>
-          </a:p>
-          <a:p>
-            <a:pPr marL="342900" indent="-342900">
-              <a:spcAft>
-                <a:spcPts val="600"/>
-              </a:spcAft>
-              <a:buSzPct val="100000"/>
-              <a:buChar char="●"/>
-            </a:pPr>
-            <a:r>
-              <a:rPr lang="en-US" dirty="0">
+                <a:latin typeface="Meiryo"/>
+              </a:rPr>
+              <a:t>処方された軟膏の塗布（褥瘡の処置を除く）</a:t>
+            </a:r>
+          </a:p>
+          <a:p>
+            <a:pPr/>
+            <a:r>
+              <a:rPr>
                 <a:solidFill>
                   <a:srgbClr val="1C2833"/>
                 </a:solidFill>
-                <a:latin typeface="Meiryo" pitchFamily="34" charset="0"/>
-                <a:ea typeface="Meiryo" pitchFamily="34" charset="-122"/>
-                <a:cs typeface="Meiryo" pitchFamily="34" charset="-120"/>
-              </a:rPr>
-              <a:t>観察所見の</a:t>
-            </a:r>
-            <a:r>
-              <a:rPr lang="en-US" b="1" dirty="0">
-                <a:solidFill>
-                  <a:srgbClr val="1D9E75"/>
-                </a:solidFill>
-                <a:latin typeface="Meiryo" pitchFamily="34" charset="0"/>
-                <a:ea typeface="Meiryo" pitchFamily="34" charset="-122"/>
-                <a:cs typeface="Meiryo" pitchFamily="34" charset="-120"/>
-              </a:rPr>
-              <a:t>記録と当日中の報告</a:t>
-            </a:r>
-            <a:endParaRPr lang="en-US" dirty="0"/>
+                <a:latin typeface="Meiryo"/>
+              </a:rPr>
+              <a:t>急変時の応急対応・吸引</a:t>
+            </a:r>
+          </a:p>
+          <a:p>
+            <a:pPr/>
+            <a:r>
+              <a:rPr>
+                <a:solidFill>
+                  <a:srgbClr val="1C2833"/>
+                </a:solidFill>
+                <a:latin typeface="Meiryo"/>
+              </a:rPr>
+              <a:t>観察所見の記録と当日中の報告</a:t>
+            </a:r>
           </a:p>
         </p:txBody>
       </p:sp>
@@ -20846,7 +20766,7 @@
                 <a:ea typeface="Meiryo" pitchFamily="34" charset="-122"/>
                 <a:cs typeface="Meiryo" pitchFamily="34" charset="-120"/>
               </a:rPr>
-              <a:t>訪問看護におつなぎすること</a:t>
+              <a:t>訪問看護にお願いしたいこと</a:t>
             </a:r>
             <a:endParaRPr lang="en-US" sz="1500" dirty="0"/>
           </a:p>
@@ -20889,126 +20809,57 @@
                 <a:ea typeface="Meiryo" pitchFamily="34" charset="-122"/>
                 <a:cs typeface="Meiryo" pitchFamily="34" charset="-120"/>
               </a:rPr>
-              <a:t>褥瘡・創傷の</a:t>
-            </a:r>
-            <a:r>
-              <a:rPr lang="en-US" sz="1600" b="1" dirty="0">
-                <a:solidFill>
-                  <a:srgbClr val="1D9E75"/>
-                </a:solidFill>
-                <a:latin typeface="Meiryo" pitchFamily="34" charset="0"/>
-                <a:ea typeface="Meiryo" pitchFamily="34" charset="-122"/>
-                <a:cs typeface="Meiryo" pitchFamily="34" charset="-120"/>
-              </a:rPr>
-              <a:t>処置</a:t>
-            </a:r>
-            <a:r>
-              <a:rPr lang="en-US" sz="1600" dirty="0">
+              <a:t>褥瘡・創傷の継続的な処置</a:t>
+            </a:r>
+            <a:endParaRPr lang="en-US" sz="1600" dirty="0"/>
+          </a:p>
+          <a:p>
+            <a:pPr/>
+            <a:r>
+              <a:rPr sz="1600">
                 <a:solidFill>
                   <a:srgbClr val="1C2833"/>
                 </a:solidFill>
-                <a:latin typeface="Meiryo" pitchFamily="34" charset="0"/>
-                <a:ea typeface="Meiryo" pitchFamily="34" charset="-122"/>
-                <a:cs typeface="Meiryo" pitchFamily="34" charset="-120"/>
-              </a:rPr>
-              <a:t>、薬剤の塗布</a:t>
-            </a:r>
-            <a:endParaRPr lang="en-US" sz="1600" dirty="0"/>
-          </a:p>
-          <a:p>
-            <a:pPr marL="342900" indent="-342900">
-              <a:spcAft>
-                <a:spcPts val="600"/>
-              </a:spcAft>
-              <a:buSzPct val="100000"/>
-              <a:buChar char="●"/>
-            </a:pPr>
-            <a:r>
-              <a:rPr lang="en-US" sz="1600" dirty="0">
+                <a:latin typeface="Meiryo"/>
+              </a:rPr>
+              <a:t>点滴・注射・採血</a:t>
+            </a:r>
+          </a:p>
+          <a:p>
+            <a:pPr/>
+            <a:r>
+              <a:rPr sz="1600">
                 <a:solidFill>
                   <a:srgbClr val="1C2833"/>
                 </a:solidFill>
-                <a:latin typeface="Meiryo" pitchFamily="34" charset="0"/>
-                <a:ea typeface="Meiryo" pitchFamily="34" charset="-122"/>
-                <a:cs typeface="Meiryo" pitchFamily="34" charset="-120"/>
-              </a:rPr>
-              <a:t>点滴・注射・採血</a:t>
-            </a:r>
-            <a:endParaRPr lang="en-US" sz="1600" dirty="0"/>
-          </a:p>
-          <a:p>
-            <a:pPr marL="342900" indent="-342900">
-              <a:spcAft>
-                <a:spcPts val="600"/>
-              </a:spcAft>
-              <a:buSzPct val="100000"/>
-              <a:buChar char="●"/>
-            </a:pPr>
-            <a:r>
-              <a:rPr lang="en-US" sz="1600" dirty="0">
+                <a:latin typeface="Meiryo"/>
+              </a:rPr>
+              <a:t>カテーテル・ストーマの管理</a:t>
+            </a:r>
+          </a:p>
+          <a:p>
+            <a:pPr/>
+            <a:r>
+              <a:rPr sz="1600">
                 <a:solidFill>
                   <a:srgbClr val="1C2833"/>
                 </a:solidFill>
-                <a:latin typeface="Meiryo" pitchFamily="34" charset="0"/>
-                <a:ea typeface="Meiryo" pitchFamily="34" charset="-122"/>
-                <a:cs typeface="Meiryo" pitchFamily="34" charset="-120"/>
-              </a:rPr>
-              <a:t>カテーテル・ストーマの管理</a:t>
-            </a:r>
-            <a:endParaRPr lang="en-US" sz="1600" dirty="0"/>
-          </a:p>
-          <a:p>
-            <a:pPr marL="342900" indent="-342900">
-              <a:spcAft>
-                <a:spcPts val="600"/>
-              </a:spcAft>
-              <a:buSzPct val="100000"/>
-              <a:buChar char="●"/>
-            </a:pPr>
-            <a:r>
-              <a:rPr lang="en-US" sz="1600" dirty="0">
+                <a:latin typeface="Meiryo"/>
+              </a:rPr>
+              <a:t>計画的な喀痰吸引・経管栄養の管理</a:t>
+            </a:r>
+          </a:p>
+          <a:p>
+            <a:pPr/>
+            <a:r>
+              <a:rPr sz="1600">
                 <a:solidFill>
                   <a:srgbClr val="1C2833"/>
                 </a:solidFill>
-                <a:latin typeface="Meiryo" pitchFamily="34" charset="0"/>
-                <a:ea typeface="Meiryo" pitchFamily="34" charset="-122"/>
-                <a:cs typeface="Meiryo" pitchFamily="34" charset="-120"/>
-              </a:rPr>
-              <a:t>喀痰吸引・経管栄養の管理</a:t>
-            </a:r>
-            <a:endParaRPr lang="en-US" sz="1600" dirty="0"/>
-          </a:p>
-          <a:p>
-            <a:pPr marL="342900" indent="-342900">
-              <a:spcAft>
-                <a:spcPts val="600"/>
-              </a:spcAft>
-              <a:buSzPct val="100000"/>
-              <a:buChar char="●"/>
-            </a:pPr>
-            <a:r>
-              <a:rPr lang="en-US" sz="1600" dirty="0">
-                <a:solidFill>
-                  <a:srgbClr val="1C2833"/>
-                </a:solidFill>
-                <a:latin typeface="Meiryo" pitchFamily="34" charset="0"/>
-                <a:ea typeface="Meiryo" pitchFamily="34" charset="-122"/>
-                <a:cs typeface="Meiryo" pitchFamily="34" charset="-120"/>
-              </a:rPr>
-              <a:t>医師の指示に基づく</a:t>
-            </a:r>
-            <a:r>
-              <a:rPr lang="en-US" sz="1600" b="1" dirty="0">
-                <a:solidFill>
-                  <a:srgbClr val="1D9E75"/>
-                </a:solidFill>
-                <a:latin typeface="Meiryo" pitchFamily="34" charset="0"/>
-                <a:ea typeface="Meiryo" pitchFamily="34" charset="-122"/>
-                <a:cs typeface="Meiryo" pitchFamily="34" charset="-120"/>
-              </a:rPr>
-              <a:t>医療的ケア全般</a:t>
-            </a:r>
-            <a:endParaRPr lang="en-US" sz="1600" dirty="0"/>
+                <a:latin typeface="Meiryo"/>
+              </a:rPr>
+              <a:t>医師の指示に基づく計画的な医療的ケア</a:t>
+            </a:r>
           </a:p>
         </p:txBody>
       </p:sp>
@@ -21082,29 +20933,7 @@
                 <a:ea typeface="Meiryo" pitchFamily="34" charset="-122"/>
                 <a:cs typeface="Meiryo" pitchFamily="34" charset="-120"/>
               </a:rPr>
-              <a:t>私たちの役割は</a:t>
-            </a:r>
-            <a:r>
-              <a:rPr lang="en-US" b="1" dirty="0" err="1">
-                <a:solidFill>
-                  <a:srgbClr val="1D9E75"/>
-                </a:solidFill>
-                <a:latin typeface="Meiryo" pitchFamily="34" charset="0"/>
-                <a:ea typeface="Meiryo" pitchFamily="34" charset="-122"/>
-                <a:cs typeface="Meiryo" pitchFamily="34" charset="-120"/>
-              </a:rPr>
-              <a:t>「見つけて、つなぐ」</a:t>
-            </a:r>
-            <a:r>
-              <a:rPr lang="en-US" dirty="0" err="1">
-                <a:solidFill>
-                  <a:srgbClr val="1C2833"/>
-                </a:solidFill>
-                <a:latin typeface="Meiryo" pitchFamily="34" charset="0"/>
-                <a:ea typeface="Meiryo" pitchFamily="34" charset="-122"/>
-                <a:cs typeface="Meiryo" pitchFamily="34" charset="-120"/>
-              </a:rPr>
-              <a:t>こと。処置は訪問看護へ</a:t>
+              <a:t>「できない」のではなく、継続的に担うのが私たちの役割ではない、ということです。</a:t>
             </a:r>
             <a:endParaRPr lang="en-US" dirty="0">
               <a:solidFill>
@@ -21116,35 +20945,20 @@
             </a:endParaRPr>
           </a:p>
           <a:p>
-            <a:pPr marL="0" indent="0">
+            <a:pPr>
               <a:lnSpc>
                 <a:spcPct val="130000"/>
               </a:lnSpc>
-              <a:buNone/>
             </a:pPr>
             <a:r>
-              <a:rPr lang="en-US" dirty="0" err="1">
+              <a:rPr>
                 <a:solidFill>
                   <a:srgbClr val="1C2833"/>
                 </a:solidFill>
-                <a:latin typeface="Meiryo" pitchFamily="34" charset="0"/>
-                <a:ea typeface="Meiryo" pitchFamily="34" charset="-122"/>
-                <a:cs typeface="Meiryo" pitchFamily="34" charset="-120"/>
-              </a:rPr>
-              <a:t>この線引きを明確にすることが、安全な在宅ケアにつながります</a:t>
-            </a:r>
-            <a:r>
-              <a:rPr lang="en-US" dirty="0">
-                <a:solidFill>
-                  <a:srgbClr val="1C2833"/>
-                </a:solidFill>
-                <a:latin typeface="Meiryo" pitchFamily="34" charset="0"/>
-                <a:ea typeface="Meiryo" pitchFamily="34" charset="-122"/>
-                <a:cs typeface="Meiryo" pitchFamily="34" charset="-120"/>
-              </a:rPr>
-              <a:t>。</a:t>
-            </a:r>
-            <a:endParaRPr lang="en-US" dirty="0"/>
+                <a:latin typeface="Meiryo"/>
+              </a:rPr>
+              <a:t>見つけて、つなぐ。そのうえで、その場でできることはする。</a:t>
+            </a:r>
           </a:p>
         </p:txBody>
       </p:sp>

--- a/houmon-nyuyoku-slides.pptx
+++ b/houmon-nyuyoku-slides.pptx
@@ -9920,7 +9920,7 @@
                 <a:ea typeface="Meiryo" pitchFamily="34" charset="-122"/>
                 <a:cs typeface="Meiryo" pitchFamily="34" charset="-120"/>
               </a:rPr>
-              <a:t>医療行為は行わず「見つけて、つなぐ」</a:t>
+              <a:t>訪問看護とは役割が違う</a:t>
             </a:r>
             <a:r>
               <a:rPr lang="en-US" sz="1500" dirty="0">
@@ -9931,7 +9931,7 @@
                 <a:ea typeface="Meiryo" pitchFamily="34" charset="-122"/>
                 <a:cs typeface="Meiryo" pitchFamily="34" charset="-120"/>
               </a:rPr>
-              <a:t>——訪問看護と役割を分け合い、その日のうちに情報を共有。</a:t>
+              <a:t>——見つけて、その場でできることはして、つなぐ。継続的な処置は訪問看護へ。</a:t>
             </a:r>
             <a:endParaRPr lang="en-US" sz="1500" dirty="0"/>
           </a:p>
@@ -20682,7 +20682,7 @@
                 </a:solidFill>
                 <a:latin typeface="Meiryo"/>
               </a:rPr>
-              <a:t>急変時の応急対応・吸引</a:t>
+              <a:t>発赤時の除圧・保護、急変時の応急対応・吸引</a:t>
             </a:r>
           </a:p>
           <a:p>

--- a/houmon-nyuyoku-slides.pptx
+++ b/houmon-nyuyoku-slides.pptx
@@ -1796,7 +1796,28 @@
           <a:p/>
           <a:p>
             <a:r>
-              <a:t>【担架のときに必ず言う】</a:t>
+              <a:t>【担架のときに必ず言う①＝浴槽の置き方】</a:t>
+            </a:r>
+          </a:p>
+          <a:p>
+            <a:r>
+              <a:t> 浴槽はベッドの真横に設置します。持ち上げて運ぶ距離がありません。</a:t>
+            </a:r>
+          </a:p>
+          <a:p>
+            <a:r>
+              <a:t> ベッドから浴槽へ、平行に、水平に移すだけ。狭いお宅でもこの形がとれます。</a:t>
+            </a:r>
+          </a:p>
+          <a:p>
+            <a:r>
+              <a:t> 移動する距離が短いほど安全。安全に、楽に。</a:t>
+            </a:r>
+          </a:p>
+          <a:p/>
+          <a:p>
+            <a:r>
+              <a:t>【担架のときに必ず言う②】</a:t>
             </a:r>
           </a:p>
           <a:p>

--- a/houmon-nyuyoku-slides.pptx
+++ b/houmon-nyuyoku-slides.pptx
@@ -1796,43 +1796,37 @@
           <a:p/>
           <a:p>
             <a:r>
-              <a:t>【担架のときに必ず言う①＝浴槽の置き方】</a:t>
-            </a:r>
-          </a:p>
-          <a:p>
-            <a:r>
-              <a:t> 浴槽はベッドの真横に設置します。持ち上げて運ぶ距離がありません。</a:t>
-            </a:r>
-          </a:p>
-          <a:p>
-            <a:r>
-              <a:t> ベッドから浴槽へ、平行に、水平に移すだけ。狭いお宅でもこの形がとれます。</a:t>
-            </a:r>
-          </a:p>
-          <a:p>
-            <a:r>
-              <a:t> 移動する距離が短いほど安全。安全に、楽に。</a:t>
-            </a:r>
-          </a:p>
-          <a:p/>
-          <a:p>
-            <a:r>
-              <a:t>【担架のときに必ず言う②】</a:t>
-            </a:r>
-          </a:p>
-          <a:p>
-            <a:r>
-              <a:t> 人工呼吸器を外せない方は、必ず担架です。</a:t>
-            </a:r>
-          </a:p>
-          <a:p>
-            <a:r>
-              <a:t> ほかの方法だと回路が引っ張られて、外れる恐れがあるので。</a:t>
-            </a:r>
-          </a:p>
-          <a:p>
-            <a:r>
-              <a:t> 気管切開の方も、頸部を安定させたいので担架を選びます。</a:t>
+              <a:t>【担架のときに言うこと（ひと続きで）】</a:t>
+            </a:r>
+          </a:p>
+          <a:p>
+            <a:r>
+              <a:t> 体の大きい方、全介助の方。いちばん安全。</a:t>
+            </a:r>
+          </a:p>
+          <a:p>
+            <a:r>
+              <a:t> 浴槽はベッドの真横に設置 → 持ち上げて運ぶ距離がない。平行に、水平に移すだけ。</a:t>
+            </a:r>
+          </a:p>
+          <a:p>
+            <a:r>
+              <a:t> ベッドと浴槽の隙間が狭い部屋でもこの平行移動ならできる。狭いお宅ほど担架。</a:t>
+            </a:r>
+          </a:p>
+          <a:p>
+            <a:r>
+              <a:t> 気管切開の方も担架。頸部を安定させたまま水平に移せる。</a:t>
+            </a:r>
+          </a:p>
+          <a:p>
+            <a:r>
+              <a:t> 人工呼吸器を外せない方は必ず担架。回路が引っ張られて外れる恐れがあるので。</a:t>
+            </a:r>
+          </a:p>
+          <a:p>
+            <a:r>
+              <a:t> 締め「平行に、距離を動かさずに移す。これが担架を選ぶいちばんの理由です」</a:t>
             </a:r>
           </a:p>
           <a:p/>
